--- a/ARCHITECTURE.pptx
+++ b/ARCHITECTURE.pptx
@@ -4,6 +4,9 @@
   <p:sldMasterIdLst>
     <p:sldMasterId id="2147483648" r:id="rId1"/>
   </p:sldMasterIdLst>
+  <p:notesMasterIdLst>
+    <p:notesMasterId r:id="rId9"/>
+  </p:notesMasterIdLst>
   <p:sldIdLst>
     <p:sldId id="256" r:id="rId2"/>
     <p:sldId id="257" r:id="rId3"/>
@@ -13,9 +16,6 @@
     <p:sldId id="261" r:id="rId7"/>
     <p:sldId id="262" r:id="rId8"/>
   </p:sldIdLst>
-  <p:notesMasterIdLst>
-    <p:notesMasterId r:id="rId9"/>
-  </p:notesMasterIdLst>
   <p:sldSz cx="12192000" cy="6858000"/>
   <p:notesSz cx="6858000" cy="12192000"/>
   <p:defaultTextStyle>
@@ -110,6 +110,11 @@
       </a:defRPr>
     </a:lvl9pPr>
   </p:defaultTextStyle>
+  <p:extLst>
+    <p:ext uri="{EFAFB233-063F-42B5-8137-9DF3F51BA10A}">
+      <p15:sldGuideLst xmlns:p15="http://schemas.microsoft.com/office/powerpoint/2012/main"/>
+    </p:ext>
+  </p:extLst>
 </p:presentation>
 </file>
 
@@ -135,234 +140,10 @@
           <a:chExt cx="0" cy="0"/>
         </a:xfrm>
       </p:grpSpPr>
-      <p:sp>
-        <p:nvSpPr>
-          <p:cNvPr id="2" name="Header Placeholder 1"/>
-          <p:cNvSpPr>
-            <a:spLocks noGrp="1"/>
-          </p:cNvSpPr>
-          <p:nvPr>
-            <p:ph type="hdr" sz="quarter"/>
-          </p:nvPr>
-        </p:nvSpPr>
-        <p:spPr>
-          <a:xfrm>
-            <a:off x="0" y="0"/>
-            <a:ext cx="2971800" cy="458788"/>
-          </a:xfrm>
-          <a:prstGeom prst="rect">
-            <a:avLst/>
-          </a:prstGeom>
-        </p:spPr>
-        <p:txBody>
-          <a:bodyPr vert="horz" lIns="91440" tIns="45720" rIns="91440" bIns="45720" rtlCol="0"/>
-          <a:lstStyle>
-            <a:lvl1pPr algn="l">
-              <a:defRPr sz="1200"/>
-            </a:lvl1pPr>
-          </a:lstStyle>
-          <a:p>
-            <a:endParaRPr lang="en-US"/>
-          </a:p>
-        </p:txBody>
-      </p:sp>
-      <p:sp>
-        <p:nvSpPr>
-          <p:cNvPr id="3" name="Date Placeholder 2"/>
-          <p:cNvSpPr>
-            <a:spLocks noGrp="1"/>
-          </p:cNvSpPr>
-          <p:nvPr>
-            <p:ph type="dt" idx="1"/>
-          </p:nvPr>
-        </p:nvSpPr>
-        <p:spPr>
-          <a:xfrm>
-            <a:off x="3884613" y="0"/>
-            <a:ext cx="2971800" cy="458788"/>
-          </a:xfrm>
-          <a:prstGeom prst="rect">
-            <a:avLst/>
-          </a:prstGeom>
-        </p:spPr>
-        <p:txBody>
-          <a:bodyPr vert="horz" lIns="91440" tIns="45720" rIns="91440" bIns="45720" rtlCol="0"/>
-          <a:lstStyle>
-            <a:lvl1pPr algn="r">
-              <a:defRPr sz="1200"/>
-            </a:lvl1pPr>
-          </a:lstStyle>
-          <a:p>
-            <a:fld id="{5282F153-3F37-0F45-9E97-73ACFA13230C}" type="datetimeFigureOut">
-              <a:rPr lang="en-US"/>
-              <a:t>7/23/19</a:t>
-            </a:fld>
-            <a:endParaRPr lang="en-US"/>
-          </a:p>
-        </p:txBody>
-      </p:sp>
-      <p:sp>
-        <p:nvSpPr>
-          <p:cNvPr id="4" name="Slide Image Placeholder 3"/>
-          <p:cNvSpPr>
-            <a:spLocks noGrp="1" noRot="1" noChangeAspect="1"/>
-          </p:cNvSpPr>
-          <p:nvPr>
-            <p:ph type="sldImg" idx="2"/>
-          </p:nvPr>
-        </p:nvSpPr>
-        <p:spPr>
-          <a:xfrm>
-            <a:off x="685800" y="1143000"/>
-            <a:ext cx="5486400" cy="3086100"/>
-          </a:xfrm>
-          <a:prstGeom prst="rect">
-            <a:avLst/>
-          </a:prstGeom>
-          <a:noFill/>
-          <a:ln w="12700">
-            <a:solidFill>
-              <a:prstClr val="black"/>
-            </a:solidFill>
-          </a:ln>
-        </p:spPr>
-        <p:txBody>
-          <a:bodyPr vert="horz" lIns="91440" tIns="45720" rIns="91440" bIns="45720" rtlCol="0" anchor="ctr"/>
-          <a:lstStyle/>
-          <a:p>
-            <a:endParaRPr lang="en-US"/>
-          </a:p>
-        </p:txBody>
-      </p:sp>
-      <p:sp>
-        <p:nvSpPr>
-          <p:cNvPr id="5" name="Notes Placeholder 4"/>
-          <p:cNvSpPr>
-            <a:spLocks noGrp="1"/>
-          </p:cNvSpPr>
-          <p:nvPr>
-            <p:ph type="body" sz="quarter" idx="3"/>
-          </p:nvPr>
-        </p:nvSpPr>
-        <p:spPr>
-          <a:xfrm>
-            <a:off x="685800" y="4400550"/>
-            <a:ext cx="5486400" cy="3600450"/>
-          </a:xfrm>
-          <a:prstGeom prst="rect">
-            <a:avLst/>
-          </a:prstGeom>
-        </p:spPr>
-        <p:txBody>
-          <a:bodyPr vert="horz" lIns="91440" tIns="45720" rIns="91440" bIns="45720" rtlCol="0"/>
-          <a:lstStyle/>
-          <a:p>
-            <a:pPr lvl="0"/>
-            <a:r>
-              <a:rPr lang="en-US"/>
-              <a:t>Click to edit Master text styles</a:t>
-            </a:r>
-          </a:p>
-          <a:p>
-            <a:pPr lvl="1"/>
-            <a:r>
-              <a:rPr lang="en-US"/>
-              <a:t>Second level</a:t>
-            </a:r>
-          </a:p>
-          <a:p>
-            <a:pPr lvl="2"/>
-            <a:r>
-              <a:rPr lang="en-US"/>
-              <a:t>Third level</a:t>
-            </a:r>
-          </a:p>
-          <a:p>
-            <a:pPr lvl="3"/>
-            <a:r>
-              <a:rPr lang="en-US"/>
-              <a:t>Fourth level</a:t>
-            </a:r>
-          </a:p>
-          <a:p>
-            <a:pPr lvl="4"/>
-            <a:r>
-              <a:rPr lang="en-US"/>
-              <a:t>Fifth level</a:t>
-            </a:r>
-          </a:p>
-        </p:txBody>
-      </p:sp>
-      <p:sp>
-        <p:nvSpPr>
-          <p:cNvPr id="6" name="Footer Placeholder 5"/>
-          <p:cNvSpPr>
-            <a:spLocks noGrp="1"/>
-          </p:cNvSpPr>
-          <p:nvPr>
-            <p:ph type="ftr" sz="quarter" idx="4"/>
-          </p:nvPr>
-        </p:nvSpPr>
-        <p:spPr>
-          <a:xfrm>
-            <a:off x="0" y="8685213"/>
-            <a:ext cx="2971800" cy="458787"/>
-          </a:xfrm>
-          <a:prstGeom prst="rect">
-            <a:avLst/>
-          </a:prstGeom>
-        </p:spPr>
-        <p:txBody>
-          <a:bodyPr vert="horz" lIns="91440" tIns="45720" rIns="91440" bIns="45720" rtlCol="0" anchor="b"/>
-          <a:lstStyle>
-            <a:lvl1pPr algn="l">
-              <a:defRPr sz="1200"/>
-            </a:lvl1pPr>
-          </a:lstStyle>
-          <a:p>
-            <a:endParaRPr lang="en-US"/>
-          </a:p>
-        </p:txBody>
-      </p:sp>
-      <p:sp>
-        <p:nvSpPr>
-          <p:cNvPr id="7" name="Slide Number Placeholder 6"/>
-          <p:cNvSpPr>
-            <a:spLocks noGrp="1"/>
-          </p:cNvSpPr>
-          <p:nvPr>
-            <p:ph type="sldNum" sz="quarter" idx="5"/>
-          </p:nvPr>
-        </p:nvSpPr>
-        <p:spPr>
-          <a:xfrm>
-            <a:off x="3884613" y="8685213"/>
-            <a:ext cx="2971800" cy="458787"/>
-          </a:xfrm>
-          <a:prstGeom prst="rect">
-            <a:avLst/>
-          </a:prstGeom>
-        </p:spPr>
-        <p:txBody>
-          <a:bodyPr vert="horz" lIns="91440" tIns="45720" rIns="91440" bIns="45720" rtlCol="0" anchor="b"/>
-          <a:lstStyle>
-            <a:lvl1pPr algn="r">
-              <a:defRPr sz="1200"/>
-            </a:lvl1pPr>
-          </a:lstStyle>
-          <a:p>
-            <a:fld id="{CE5E9CC1-C706-0F49-92D6-E571CC5EEA8F}" type="slidenum">
-              <a:rPr lang="en-US"/>
-              <a:t>‹#›</a:t>
-            </a:fld>
-            <a:endParaRPr lang="en-US"/>
-          </a:p>
-        </p:txBody>
-      </p:sp>
     </p:spTree>
     <p:extLst>
       <p:ext uri="{BB962C8B-B14F-4D97-AF65-F5344CB8AC3E}">
-        <p14:creationId xmlns:p14="http://schemas.microsoft.com/office/powerpoint/2010/main" val="1024086991"/>
+        <p14:creationId xmlns:p14="http://schemas.microsoft.com/office/powerpoint/2010/main" val="2587921981"/>
       </p:ext>
     </p:extLst>
   </p:cSld>
@@ -506,10 +287,6 @@
           <a:bodyPr/>
           <a:lstStyle/>
           <a:p>
-            <a:r>
-              <a:rPr lang="en-US" dirty="0"/>
-              <a:t/>
-            </a:r>
             <a:endParaRPr lang="en-US" dirty="0"/>
           </a:p>
         </p:txBody>
@@ -594,10 +371,6 @@
           <a:bodyPr/>
           <a:lstStyle/>
           <a:p>
-            <a:r>
-              <a:rPr lang="en-US" dirty="0"/>
-              <a:t/>
-            </a:r>
             <a:endParaRPr lang="en-US" dirty="0"/>
           </a:p>
         </p:txBody>
@@ -682,10 +455,6 @@
           <a:bodyPr/>
           <a:lstStyle/>
           <a:p>
-            <a:r>
-              <a:rPr lang="en-US" dirty="0"/>
-              <a:t/>
-            </a:r>
             <a:endParaRPr lang="en-US" dirty="0"/>
           </a:p>
         </p:txBody>
@@ -770,10 +539,6 @@
           <a:bodyPr/>
           <a:lstStyle/>
           <a:p>
-            <a:r>
-              <a:rPr lang="en-US" dirty="0"/>
-              <a:t/>
-            </a:r>
             <a:endParaRPr lang="en-US" dirty="0"/>
           </a:p>
         </p:txBody>
@@ -858,10 +623,6 @@
           <a:bodyPr/>
           <a:lstStyle/>
           <a:p>
-            <a:r>
-              <a:rPr lang="en-US" dirty="0"/>
-              <a:t/>
-            </a:r>
             <a:endParaRPr lang="en-US" dirty="0"/>
           </a:p>
         </p:txBody>
@@ -946,10 +707,6 @@
           <a:bodyPr/>
           <a:lstStyle/>
           <a:p>
-            <a:r>
-              <a:rPr lang="en-US" dirty="0"/>
-              <a:t/>
-            </a:r>
             <a:endParaRPr lang="en-US" dirty="0"/>
           </a:p>
         </p:txBody>
@@ -1034,10 +791,6 @@
           <a:bodyPr/>
           <a:lstStyle/>
           <a:p>
-            <a:r>
-              <a:rPr lang="en-US" dirty="0"/>
-              <a:t/>
-            </a:r>
             <a:endParaRPr lang="en-US" dirty="0"/>
           </a:p>
         </p:txBody>
@@ -1111,6 +864,11 @@
 <file path=ppt/slideMasters/slideMaster1.xml><?xml version="1.0" encoding="utf-8"?>
 <p:sldMaster xmlns:a="http://schemas.openxmlformats.org/drawingml/2006/main" xmlns:r="http://schemas.openxmlformats.org/officeDocument/2006/relationships" xmlns:p="http://schemas.openxmlformats.org/presentationml/2006/main">
   <p:cSld>
+    <p:bg>
+      <p:bgRef idx="1001">
+        <a:schemeClr val="bg1"/>
+      </p:bgRef>
+    </p:bg>
     <p:spTree>
       <p:nvGrpSpPr>
         <p:cNvPr id="1" name=""/>
@@ -1393,6 +1151,7 @@
         <a:solidFill>
           <a:srgbClr val="141C44"/>
         </a:solidFill>
+        <a:effectLst/>
       </p:bgPr>
     </p:bg>
     <p:spTree>
@@ -1437,6 +1196,13 @@
             <a:prstDash val="solid"/>
           </a:ln>
         </p:spPr>
+        <p:txBody>
+          <a:bodyPr/>
+          <a:lstStyle/>
+          <a:p>
+            <a:endParaRPr lang="en-US"/>
+          </a:p>
+        </p:txBody>
       </p:sp>
       <p:sp>
         <p:nvSpPr>
@@ -1466,6 +1232,13 @@
             <a:prstDash val="solid"/>
           </a:ln>
         </p:spPr>
+        <p:txBody>
+          <a:bodyPr/>
+          <a:lstStyle/>
+          <a:p>
+            <a:endParaRPr lang="en-US"/>
+          </a:p>
+        </p:txBody>
       </p:sp>
       <p:sp>
         <p:nvSpPr>
@@ -1495,6 +1268,13 @@
             <a:prstDash val="solid"/>
           </a:ln>
         </p:spPr>
+        <p:txBody>
+          <a:bodyPr/>
+          <a:lstStyle/>
+          <a:p>
+            <a:endParaRPr lang="en-US"/>
+          </a:p>
+        </p:txBody>
       </p:sp>
       <p:sp>
         <p:nvSpPr>
@@ -1524,6 +1304,13 @@
             <a:prstDash val="solid"/>
           </a:ln>
         </p:spPr>
+        <p:txBody>
+          <a:bodyPr/>
+          <a:lstStyle/>
+          <a:p>
+            <a:endParaRPr lang="en-US"/>
+          </a:p>
+        </p:txBody>
       </p:sp>
       <p:sp>
         <p:nvSpPr>
@@ -1553,6 +1340,13 @@
             <a:prstDash val="solid"/>
           </a:ln>
         </p:spPr>
+        <p:txBody>
+          <a:bodyPr/>
+          <a:lstStyle/>
+          <a:p>
+            <a:endParaRPr lang="en-US"/>
+          </a:p>
+        </p:txBody>
       </p:sp>
       <p:sp>
         <p:nvSpPr>
@@ -1582,6 +1376,13 @@
             <a:prstDash val="solid"/>
           </a:ln>
         </p:spPr>
+        <p:txBody>
+          <a:bodyPr/>
+          <a:lstStyle/>
+          <a:p>
+            <a:endParaRPr lang="en-US"/>
+          </a:p>
+        </p:txBody>
       </p:sp>
       <p:sp>
         <p:nvSpPr>
@@ -1611,6 +1412,13 @@
             <a:prstDash val="solid"/>
           </a:ln>
         </p:spPr>
+        <p:txBody>
+          <a:bodyPr/>
+          <a:lstStyle/>
+          <a:p>
+            <a:endParaRPr lang="en-US"/>
+          </a:p>
+        </p:txBody>
       </p:sp>
       <p:sp>
         <p:nvSpPr>
@@ -1640,6 +1448,13 @@
             <a:prstDash val="solid"/>
           </a:ln>
         </p:spPr>
+        <p:txBody>
+          <a:bodyPr/>
+          <a:lstStyle/>
+          <a:p>
+            <a:endParaRPr lang="en-US"/>
+          </a:p>
+        </p:txBody>
       </p:sp>
       <p:sp>
         <p:nvSpPr>
@@ -1662,11 +1477,11 @@
           <a:bodyPr wrap="square" lIns="0" tIns="0" rIns="0" bIns="0" rtlCol="0" anchor="ctr"/>
           <a:lstStyle/>
           <a:p>
-            <a:pPr indent="0" marL="0">
-              <a:buNone/>
-            </a:pPr>
-            <a:r>
-              <a:rPr lang="en-US" sz="1100" b="1" spc="400" kern="0" dirty="0">
+            <a:pPr marL="0" indent="0">
+              <a:buNone/>
+            </a:pPr>
+            <a:r>
+              <a:rPr lang="en-US" sz="1100" b="1" kern="0" spc="400" dirty="0">
                 <a:solidFill>
                   <a:srgbClr val="CADCFC"/>
                 </a:solidFill>
@@ -1701,7 +1516,7 @@
           <a:bodyPr wrap="square" lIns="0" tIns="0" rIns="0" bIns="0" rtlCol="0" anchor="ctr"/>
           <a:lstStyle/>
           <a:p>
-            <a:pPr indent="0" marL="0">
+            <a:pPr marL="0" indent="0">
               <a:buNone/>
             </a:pPr>
             <a:r>
@@ -1740,7 +1555,7 @@
           <a:bodyPr wrap="square" lIns="0" tIns="0" rIns="0" bIns="0" rtlCol="0" anchor="ctr"/>
           <a:lstStyle/>
           <a:p>
-            <a:pPr indent="0" marL="0">
+            <a:pPr marL="0" indent="0">
               <a:buNone/>
             </a:pPr>
             <a:r>
@@ -1782,6 +1597,13 @@
             <a:prstDash val="solid"/>
           </a:ln>
         </p:spPr>
+        <p:txBody>
+          <a:bodyPr/>
+          <a:lstStyle/>
+          <a:p>
+            <a:endParaRPr lang="en-US"/>
+          </a:p>
+        </p:txBody>
       </p:sp>
       <p:sp>
         <p:nvSpPr>
@@ -1804,7 +1626,7 @@
           <a:bodyPr wrap="square" lIns="0" tIns="0" rIns="0" bIns="0" rtlCol="0" anchor="ctr"/>
           <a:lstStyle/>
           <a:p>
-            <a:pPr indent="0" marL="0">
+            <a:pPr marL="0" indent="0">
               <a:buNone/>
             </a:pPr>
             <a:r>
@@ -1843,7 +1665,7 @@
           <a:bodyPr wrap="square" lIns="0" tIns="0" rIns="0" bIns="0" rtlCol="0" anchor="ctr"/>
           <a:lstStyle/>
           <a:p>
-            <a:pPr indent="0" marL="0">
+            <a:pPr marL="0" indent="0">
               <a:buNone/>
             </a:pPr>
             <a:r>
@@ -1885,6 +1707,13 @@
             <a:prstDash val="solid"/>
           </a:ln>
         </p:spPr>
+        <p:txBody>
+          <a:bodyPr/>
+          <a:lstStyle/>
+          <a:p>
+            <a:endParaRPr lang="en-US"/>
+          </a:p>
+        </p:txBody>
       </p:sp>
       <p:sp>
         <p:nvSpPr>
@@ -1907,7 +1736,7 @@
           <a:bodyPr wrap="square" lIns="0" tIns="0" rIns="0" bIns="0" rtlCol="0" anchor="ctr"/>
           <a:lstStyle/>
           <a:p>
-            <a:pPr indent="0" marL="0">
+            <a:pPr marL="0" indent="0">
               <a:buNone/>
             </a:pPr>
             <a:r>
@@ -1946,7 +1775,7 @@
           <a:bodyPr wrap="square" lIns="0" tIns="0" rIns="0" bIns="0" rtlCol="0" anchor="ctr"/>
           <a:lstStyle/>
           <a:p>
-            <a:pPr indent="0" marL="0">
+            <a:pPr marL="0" indent="0">
               <a:buNone/>
             </a:pPr>
             <a:r>
@@ -1985,7 +1814,7 @@
           <a:bodyPr wrap="square" lIns="0" tIns="0" rIns="0" bIns="0" rtlCol="0" anchor="ctr"/>
           <a:lstStyle/>
           <a:p>
-            <a:pPr algn="r" indent="0" marL="0">
+            <a:pPr marL="0" indent="0" algn="r">
               <a:buNone/>
             </a:pPr>
             <a:r>
@@ -2019,6 +1848,7 @@
         <a:solidFill>
           <a:srgbClr val="F5F7FB"/>
         </a:solidFill>
+        <a:effectLst/>
       </p:bgPr>
     </p:bg>
     <p:spTree>
@@ -2059,6 +1889,13 @@
             <a:prstDash val="solid"/>
           </a:ln>
         </p:spPr>
+        <p:txBody>
+          <a:bodyPr/>
+          <a:lstStyle/>
+          <a:p>
+            <a:endParaRPr lang="en-US"/>
+          </a:p>
+        </p:txBody>
       </p:sp>
       <p:sp>
         <p:nvSpPr>
@@ -2081,7 +1918,7 @@
           <a:bodyPr wrap="square" lIns="0" tIns="0" rIns="0" bIns="0" rtlCol="0" anchor="ctr"/>
           <a:lstStyle/>
           <a:p>
-            <a:pPr algn="r" indent="0" marL="0">
+            <a:pPr marL="0" indent="0" algn="r">
               <a:buNone/>
             </a:pPr>
             <a:r>
@@ -2120,7 +1957,7 @@
           <a:bodyPr wrap="square" lIns="0" tIns="0" rIns="0" bIns="0" rtlCol="0" anchor="ctr"/>
           <a:lstStyle/>
           <a:p>
-            <a:pPr indent="0" marL="0">
+            <a:pPr marL="0" indent="0">
               <a:buNone/>
             </a:pPr>
             <a:r>
@@ -2159,7 +1996,7 @@
           <a:bodyPr wrap="square" lIns="0" tIns="0" rIns="0" bIns="0" rtlCol="0" anchor="ctr"/>
           <a:lstStyle/>
           <a:p>
-            <a:pPr indent="0" marL="0">
+            <a:pPr marL="0" indent="0">
               <a:buNone/>
             </a:pPr>
             <a:r>
@@ -2203,6 +2040,13 @@
             <a:prstDash val="solid"/>
           </a:ln>
         </p:spPr>
+        <p:txBody>
+          <a:bodyPr/>
+          <a:lstStyle/>
+          <a:p>
+            <a:endParaRPr lang="en-US"/>
+          </a:p>
+        </p:txBody>
       </p:sp>
       <p:sp>
         <p:nvSpPr>
@@ -2225,11 +2069,11 @@
           <a:bodyPr wrap="square" lIns="0" tIns="0" rIns="0" bIns="0" rtlCol="0" anchor="ctr"/>
           <a:lstStyle/>
           <a:p>
-            <a:pPr algn="ctr" indent="0" marL="0">
-              <a:buNone/>
-            </a:pPr>
-            <a:r>
-              <a:rPr lang="en-US" sz="1000" b="1" spc="400" kern="0" dirty="0">
+            <a:pPr marL="0" indent="0" algn="ctr">
+              <a:buNone/>
+            </a:pPr>
+            <a:r>
+              <a:rPr lang="en-US" sz="1000" b="1" kern="0" spc="400" dirty="0">
                 <a:solidFill>
                   <a:srgbClr val="1E2761"/>
                 </a:solidFill>
@@ -2267,13 +2111,20 @@
             <a:prstDash val="solid"/>
           </a:ln>
           <a:effectLst>
-            <a:outerShdw sx="100000" sy="100000" kx="0" ky="0" algn="bl" rotWithShape="0" blurRad="101600" dist="25400" dir="5400000">
+            <a:outerShdw blurRad="101600" dist="25400" dir="5400000" algn="bl" rotWithShape="0">
               <a:srgbClr val="000000">
                 <a:alpha val="8000"/>
               </a:srgbClr>
             </a:outerShdw>
           </a:effectLst>
         </p:spPr>
+        <p:txBody>
+          <a:bodyPr/>
+          <a:lstStyle/>
+          <a:p>
+            <a:endParaRPr lang="en-US"/>
+          </a:p>
+        </p:txBody>
       </p:sp>
       <p:sp>
         <p:nvSpPr>
@@ -2299,6 +2150,13 @@
             <a:prstDash val="solid"/>
           </a:ln>
         </p:spPr>
+        <p:txBody>
+          <a:bodyPr/>
+          <a:lstStyle/>
+          <a:p>
+            <a:endParaRPr lang="en-US"/>
+          </a:p>
+        </p:txBody>
       </p:sp>
       <p:sp>
         <p:nvSpPr>
@@ -2321,11 +2179,11 @@
           <a:bodyPr wrap="square" lIns="0" tIns="0" rIns="0" bIns="0" rtlCol="0" anchor="ctr"/>
           <a:lstStyle/>
           <a:p>
-            <a:pPr indent="0" marL="0">
-              <a:buNone/>
-            </a:pPr>
-            <a:r>
-              <a:rPr lang="en-US" sz="800" b="1" spc="200" kern="0" dirty="0">
+            <a:pPr marL="0" indent="0">
+              <a:buNone/>
+            </a:pPr>
+            <a:r>
+              <a:rPr lang="en-US" sz="800" b="1" kern="0" spc="200" dirty="0">
                 <a:solidFill>
                   <a:srgbClr val="1E2761"/>
                 </a:solidFill>
@@ -2360,7 +2218,7 @@
           <a:bodyPr wrap="square" lIns="0" tIns="0" rIns="0" bIns="0" rtlCol="0" anchor="ctr"/>
           <a:lstStyle/>
           <a:p>
-            <a:pPr indent="0" marL="0">
+            <a:pPr marL="0" indent="0">
               <a:buNone/>
             </a:pPr>
             <a:r>
@@ -2487,13 +2345,20 @@
             <a:prstDash val="solid"/>
           </a:ln>
           <a:effectLst>
-            <a:outerShdw sx="100000" sy="100000" kx="0" ky="0" algn="bl" rotWithShape="0" blurRad="101600" dist="25400" dir="5400000">
+            <a:outerShdw blurRad="101600" dist="25400" dir="5400000" algn="bl" rotWithShape="0">
               <a:srgbClr val="000000">
                 <a:alpha val="8000"/>
               </a:srgbClr>
             </a:outerShdw>
           </a:effectLst>
         </p:spPr>
+        <p:txBody>
+          <a:bodyPr/>
+          <a:lstStyle/>
+          <a:p>
+            <a:endParaRPr lang="en-US"/>
+          </a:p>
+        </p:txBody>
       </p:sp>
       <p:sp>
         <p:nvSpPr>
@@ -2519,6 +2384,13 @@
             <a:prstDash val="solid"/>
           </a:ln>
         </p:spPr>
+        <p:txBody>
+          <a:bodyPr/>
+          <a:lstStyle/>
+          <a:p>
+            <a:endParaRPr lang="en-US"/>
+          </a:p>
+        </p:txBody>
       </p:sp>
       <p:sp>
         <p:nvSpPr>
@@ -2541,11 +2413,11 @@
           <a:bodyPr wrap="square" lIns="0" tIns="0" rIns="0" bIns="0" rtlCol="0" anchor="ctr"/>
           <a:lstStyle/>
           <a:p>
-            <a:pPr indent="0" marL="0">
-              <a:buNone/>
-            </a:pPr>
-            <a:r>
-              <a:rPr lang="en-US" sz="800" b="1" spc="200" kern="0" dirty="0">
+            <a:pPr marL="0" indent="0">
+              <a:buNone/>
+            </a:pPr>
+            <a:r>
+              <a:rPr lang="en-US" sz="800" b="1" kern="0" spc="200" dirty="0">
                 <a:solidFill>
                   <a:srgbClr val="1E2761"/>
                 </a:solidFill>
@@ -2580,7 +2452,7 @@
           <a:bodyPr wrap="square" lIns="0" tIns="0" rIns="0" bIns="0" rtlCol="0" anchor="ctr"/>
           <a:lstStyle/>
           <a:p>
-            <a:pPr indent="0" marL="0">
+            <a:pPr marL="0" indent="0">
               <a:buNone/>
             </a:pPr>
             <a:r>
@@ -2709,6 +2581,13 @@
             <a:prstDash val="dash"/>
           </a:ln>
         </p:spPr>
+        <p:txBody>
+          <a:bodyPr/>
+          <a:lstStyle/>
+          <a:p>
+            <a:endParaRPr lang="en-US"/>
+          </a:p>
+        </p:txBody>
       </p:sp>
       <p:sp>
         <p:nvSpPr>
@@ -2731,11 +2610,11 @@
           <a:bodyPr wrap="square" lIns="0" tIns="0" rIns="0" bIns="0" rtlCol="0" anchor="ctr"/>
           <a:lstStyle/>
           <a:p>
-            <a:pPr algn="ctr" indent="0" marL="0">
-              <a:buNone/>
-            </a:pPr>
-            <a:r>
-              <a:rPr lang="en-US" sz="1000" b="1" spc="400" kern="0" dirty="0">
+            <a:pPr marL="0" indent="0" algn="ctr">
+              <a:buNone/>
+            </a:pPr>
+            <a:r>
+              <a:rPr lang="en-US" sz="1000" b="1" kern="0" spc="400" dirty="0">
                 <a:solidFill>
                   <a:srgbClr val="F96167"/>
                 </a:solidFill>
@@ -2773,13 +2652,20 @@
             <a:prstDash val="solid"/>
           </a:ln>
           <a:effectLst>
-            <a:outerShdw sx="100000" sy="100000" kx="0" ky="0" algn="bl" rotWithShape="0" blurRad="101600" dist="25400" dir="5400000">
+            <a:outerShdw blurRad="101600" dist="25400" dir="5400000" algn="bl" rotWithShape="0">
               <a:srgbClr val="000000">
                 <a:alpha val="8000"/>
               </a:srgbClr>
             </a:outerShdw>
           </a:effectLst>
         </p:spPr>
+        <p:txBody>
+          <a:bodyPr/>
+          <a:lstStyle/>
+          <a:p>
+            <a:endParaRPr lang="en-US"/>
+          </a:p>
+        </p:txBody>
       </p:sp>
       <p:sp>
         <p:nvSpPr>
@@ -2805,6 +2691,13 @@
             <a:prstDash val="solid"/>
           </a:ln>
         </p:spPr>
+        <p:txBody>
+          <a:bodyPr/>
+          <a:lstStyle/>
+          <a:p>
+            <a:endParaRPr lang="en-US"/>
+          </a:p>
+        </p:txBody>
       </p:sp>
       <p:sp>
         <p:nvSpPr>
@@ -2827,11 +2720,11 @@
           <a:bodyPr wrap="square" lIns="0" tIns="0" rIns="0" bIns="0" rtlCol="0" anchor="ctr"/>
           <a:lstStyle/>
           <a:p>
-            <a:pPr indent="0" marL="0">
-              <a:buNone/>
-            </a:pPr>
-            <a:r>
-              <a:rPr lang="en-US" sz="800" b="1" spc="200" kern="0" dirty="0">
+            <a:pPr marL="0" indent="0">
+              <a:buNone/>
+            </a:pPr>
+            <a:r>
+              <a:rPr lang="en-US" sz="800" b="1" kern="0" spc="200" dirty="0">
                 <a:solidFill>
                   <a:srgbClr val="F96167"/>
                 </a:solidFill>
@@ -2866,7 +2759,7 @@
           <a:bodyPr wrap="square" lIns="0" tIns="0" rIns="0" bIns="0" rtlCol="0" anchor="ctr"/>
           <a:lstStyle/>
           <a:p>
-            <a:pPr indent="0" marL="0">
+            <a:pPr marL="0" indent="0">
               <a:buNone/>
             </a:pPr>
             <a:r>
@@ -2905,7 +2798,7 @@
           <a:bodyPr wrap="square" lIns="0" tIns="0" rIns="0" bIns="0" rtlCol="0" anchor="ctr"/>
           <a:lstStyle/>
           <a:p>
-            <a:pPr indent="0" marL="0">
+            <a:pPr marL="0" indent="0">
               <a:buNone/>
             </a:pPr>
             <a:r>
@@ -3011,13 +2904,20 @@
             <a:prstDash val="solid"/>
           </a:ln>
           <a:effectLst>
-            <a:outerShdw sx="100000" sy="100000" kx="0" ky="0" algn="bl" rotWithShape="0" blurRad="101600" dist="25400" dir="5400000">
+            <a:outerShdw blurRad="101600" dist="25400" dir="5400000" algn="bl" rotWithShape="0">
               <a:srgbClr val="000000">
                 <a:alpha val="8000"/>
               </a:srgbClr>
             </a:outerShdw>
           </a:effectLst>
         </p:spPr>
+        <p:txBody>
+          <a:bodyPr/>
+          <a:lstStyle/>
+          <a:p>
+            <a:endParaRPr lang="en-US"/>
+          </a:p>
+        </p:txBody>
       </p:sp>
       <p:sp>
         <p:nvSpPr>
@@ -3043,6 +2943,13 @@
             <a:prstDash val="solid"/>
           </a:ln>
         </p:spPr>
+        <p:txBody>
+          <a:bodyPr/>
+          <a:lstStyle/>
+          <a:p>
+            <a:endParaRPr lang="en-US"/>
+          </a:p>
+        </p:txBody>
       </p:sp>
       <p:sp>
         <p:nvSpPr>
@@ -3065,11 +2972,11 @@
           <a:bodyPr wrap="square" lIns="0" tIns="0" rIns="0" bIns="0" rtlCol="0" anchor="ctr"/>
           <a:lstStyle/>
           <a:p>
-            <a:pPr indent="0" marL="0">
-              <a:buNone/>
-            </a:pPr>
-            <a:r>
-              <a:rPr lang="en-US" sz="800" b="1" spc="200" kern="0" dirty="0">
+            <a:pPr marL="0" indent="0">
+              <a:buNone/>
+            </a:pPr>
+            <a:r>
+              <a:rPr lang="en-US" sz="800" b="1" kern="0" spc="200" dirty="0">
                 <a:solidFill>
                   <a:srgbClr val="F96167"/>
                 </a:solidFill>
@@ -3104,7 +3011,7 @@
           <a:bodyPr wrap="square" lIns="0" tIns="0" rIns="0" bIns="0" rtlCol="0" anchor="ctr"/>
           <a:lstStyle/>
           <a:p>
-            <a:pPr indent="0" marL="0">
+            <a:pPr marL="0" indent="0">
               <a:buNone/>
             </a:pPr>
             <a:r>
@@ -3143,7 +3050,7 @@
           <a:bodyPr wrap="square" lIns="0" tIns="0" rIns="0" bIns="0" rtlCol="0" anchor="ctr"/>
           <a:lstStyle/>
           <a:p>
-            <a:pPr indent="0" marL="0">
+            <a:pPr marL="0" indent="0">
               <a:buNone/>
             </a:pPr>
             <a:r>
@@ -3291,13 +3198,20 @@
             <a:prstDash val="solid"/>
           </a:ln>
           <a:effectLst>
-            <a:outerShdw sx="100000" sy="100000" kx="0" ky="0" algn="bl" rotWithShape="0" blurRad="101600" dist="25400" dir="5400000">
+            <a:outerShdw blurRad="101600" dist="25400" dir="5400000" algn="bl" rotWithShape="0">
               <a:srgbClr val="000000">
                 <a:alpha val="8000"/>
               </a:srgbClr>
             </a:outerShdw>
           </a:effectLst>
         </p:spPr>
+        <p:txBody>
+          <a:bodyPr/>
+          <a:lstStyle/>
+          <a:p>
+            <a:endParaRPr lang="en-US"/>
+          </a:p>
+        </p:txBody>
       </p:sp>
       <p:sp>
         <p:nvSpPr>
@@ -3323,6 +3237,13 @@
             <a:prstDash val="solid"/>
           </a:ln>
         </p:spPr>
+        <p:txBody>
+          <a:bodyPr/>
+          <a:lstStyle/>
+          <a:p>
+            <a:endParaRPr lang="en-US"/>
+          </a:p>
+        </p:txBody>
       </p:sp>
       <p:sp>
         <p:nvSpPr>
@@ -3345,11 +3266,11 @@
           <a:bodyPr wrap="square" lIns="0" tIns="0" rIns="0" bIns="0" rtlCol="0" anchor="ctr"/>
           <a:lstStyle/>
           <a:p>
-            <a:pPr indent="0" marL="0">
-              <a:buNone/>
-            </a:pPr>
-            <a:r>
-              <a:rPr lang="en-US" sz="800" b="1" spc="200" kern="0" dirty="0">
+            <a:pPr marL="0" indent="0">
+              <a:buNone/>
+            </a:pPr>
+            <a:r>
+              <a:rPr lang="en-US" sz="800" b="1" kern="0" spc="200" dirty="0">
                 <a:solidFill>
                   <a:srgbClr val="F96167"/>
                 </a:solidFill>
@@ -3384,7 +3305,7 @@
           <a:bodyPr wrap="square" lIns="0" tIns="0" rIns="0" bIns="0" rtlCol="0" anchor="ctr"/>
           <a:lstStyle/>
           <a:p>
-            <a:pPr indent="0" marL="0">
+            <a:pPr marL="0" indent="0">
               <a:buNone/>
             </a:pPr>
             <a:r>
@@ -3423,7 +3344,7 @@
           <a:bodyPr wrap="square" lIns="0" tIns="0" rIns="0" bIns="0" rtlCol="0" anchor="ctr"/>
           <a:lstStyle/>
           <a:p>
-            <a:pPr indent="0" marL="0">
+            <a:pPr marL="0" indent="0">
               <a:buNone/>
             </a:pPr>
             <a:r>
@@ -3550,13 +3471,20 @@
             <a:prstDash val="solid"/>
           </a:ln>
           <a:effectLst>
-            <a:outerShdw sx="100000" sy="100000" kx="0" ky="0" algn="bl" rotWithShape="0" blurRad="101600" dist="25400" dir="5400000">
+            <a:outerShdw blurRad="101600" dist="25400" dir="5400000" algn="bl" rotWithShape="0">
               <a:srgbClr val="000000">
                 <a:alpha val="8000"/>
               </a:srgbClr>
             </a:outerShdw>
           </a:effectLst>
         </p:spPr>
+        <p:txBody>
+          <a:bodyPr/>
+          <a:lstStyle/>
+          <a:p>
+            <a:endParaRPr lang="en-US"/>
+          </a:p>
+        </p:txBody>
       </p:sp>
       <p:sp>
         <p:nvSpPr>
@@ -3582,6 +3510,13 @@
             <a:prstDash val="solid"/>
           </a:ln>
         </p:spPr>
+        <p:txBody>
+          <a:bodyPr/>
+          <a:lstStyle/>
+          <a:p>
+            <a:endParaRPr lang="en-US"/>
+          </a:p>
+        </p:txBody>
       </p:sp>
       <p:sp>
         <p:nvSpPr>
@@ -3604,11 +3539,11 @@
           <a:bodyPr wrap="square" lIns="0" tIns="0" rIns="0" bIns="0" rtlCol="0" anchor="ctr"/>
           <a:lstStyle/>
           <a:p>
-            <a:pPr indent="0" marL="0">
-              <a:buNone/>
-            </a:pPr>
-            <a:r>
-              <a:rPr lang="en-US" sz="800" b="1" spc="200" kern="0" dirty="0">
+            <a:pPr marL="0" indent="0">
+              <a:buNone/>
+            </a:pPr>
+            <a:r>
+              <a:rPr lang="en-US" sz="800" b="1" kern="0" spc="200" dirty="0">
                 <a:solidFill>
                   <a:srgbClr val="F96167"/>
                 </a:solidFill>
@@ -3643,7 +3578,7 @@
           <a:bodyPr wrap="square" lIns="0" tIns="0" rIns="0" bIns="0" rtlCol="0" anchor="ctr"/>
           <a:lstStyle/>
           <a:p>
-            <a:pPr indent="0" marL="0">
+            <a:pPr marL="0" indent="0">
               <a:buNone/>
             </a:pPr>
             <a:r>
@@ -3730,6 +3665,13 @@
             <a:prstDash val="dash"/>
           </a:ln>
         </p:spPr>
+        <p:txBody>
+          <a:bodyPr/>
+          <a:lstStyle/>
+          <a:p>
+            <a:endParaRPr lang="en-US"/>
+          </a:p>
+        </p:txBody>
       </p:sp>
       <p:sp>
         <p:nvSpPr>
@@ -3752,11 +3694,11 @@
           <a:bodyPr wrap="square" lIns="0" tIns="0" rIns="0" bIns="0" rtlCol="0" anchor="ctr"/>
           <a:lstStyle/>
           <a:p>
-            <a:pPr algn="ctr" indent="0" marL="0">
-              <a:buNone/>
-            </a:pPr>
-            <a:r>
-              <a:rPr lang="en-US" sz="1000" b="1" spc="400" kern="0" dirty="0">
+            <a:pPr marL="0" indent="0" algn="ctr">
+              <a:buNone/>
+            </a:pPr>
+            <a:r>
+              <a:rPr lang="en-US" sz="1000" b="1" kern="0" spc="400" dirty="0">
                 <a:solidFill>
                   <a:srgbClr val="D97706"/>
                 </a:solidFill>
@@ -3794,13 +3736,20 @@
             <a:prstDash val="solid"/>
           </a:ln>
           <a:effectLst>
-            <a:outerShdw sx="100000" sy="100000" kx="0" ky="0" algn="bl" rotWithShape="0" blurRad="101600" dist="25400" dir="5400000">
+            <a:outerShdw blurRad="101600" dist="25400" dir="5400000" algn="bl" rotWithShape="0">
               <a:srgbClr val="000000">
                 <a:alpha val="8000"/>
               </a:srgbClr>
             </a:outerShdw>
           </a:effectLst>
         </p:spPr>
+        <p:txBody>
+          <a:bodyPr/>
+          <a:lstStyle/>
+          <a:p>
+            <a:endParaRPr lang="en-US"/>
+          </a:p>
+        </p:txBody>
       </p:sp>
       <p:sp>
         <p:nvSpPr>
@@ -3826,6 +3775,13 @@
             <a:prstDash val="solid"/>
           </a:ln>
         </p:spPr>
+        <p:txBody>
+          <a:bodyPr/>
+          <a:lstStyle/>
+          <a:p>
+            <a:endParaRPr lang="en-US"/>
+          </a:p>
+        </p:txBody>
       </p:sp>
       <p:sp>
         <p:nvSpPr>
@@ -3848,11 +3804,11 @@
           <a:bodyPr wrap="square" lIns="0" tIns="0" rIns="0" bIns="0" rtlCol="0" anchor="ctr"/>
           <a:lstStyle/>
           <a:p>
-            <a:pPr indent="0" marL="0">
-              <a:buNone/>
-            </a:pPr>
-            <a:r>
-              <a:rPr lang="en-US" sz="800" b="1" spc="200" kern="0" dirty="0">
+            <a:pPr marL="0" indent="0">
+              <a:buNone/>
+            </a:pPr>
+            <a:r>
+              <a:rPr lang="en-US" sz="800" b="1" kern="0" spc="200" dirty="0">
                 <a:solidFill>
                   <a:srgbClr val="D97706"/>
                 </a:solidFill>
@@ -3887,7 +3843,7 @@
           <a:bodyPr wrap="square" lIns="0" tIns="0" rIns="0" bIns="0" rtlCol="0" anchor="ctr"/>
           <a:lstStyle/>
           <a:p>
-            <a:pPr indent="0" marL="0">
+            <a:pPr marL="0" indent="0">
               <a:buNone/>
             </a:pPr>
             <a:r>
@@ -3926,7 +3882,7 @@
           <a:bodyPr wrap="square" lIns="0" tIns="0" rIns="0" bIns="0" rtlCol="0" anchor="ctr"/>
           <a:lstStyle/>
           <a:p>
-            <a:pPr indent="0" marL="0">
+            <a:pPr marL="0" indent="0">
               <a:buNone/>
             </a:pPr>
             <a:r>
@@ -4053,13 +4009,20 @@
             <a:prstDash val="solid"/>
           </a:ln>
           <a:effectLst>
-            <a:outerShdw sx="100000" sy="100000" kx="0" ky="0" algn="bl" rotWithShape="0" blurRad="101600" dist="25400" dir="5400000">
+            <a:outerShdw blurRad="101600" dist="25400" dir="5400000" algn="bl" rotWithShape="0">
               <a:srgbClr val="000000">
                 <a:alpha val="8000"/>
               </a:srgbClr>
             </a:outerShdw>
           </a:effectLst>
         </p:spPr>
+        <p:txBody>
+          <a:bodyPr/>
+          <a:lstStyle/>
+          <a:p>
+            <a:endParaRPr lang="en-US"/>
+          </a:p>
+        </p:txBody>
       </p:sp>
       <p:sp>
         <p:nvSpPr>
@@ -4085,6 +4048,13 @@
             <a:prstDash val="solid"/>
           </a:ln>
         </p:spPr>
+        <p:txBody>
+          <a:bodyPr/>
+          <a:lstStyle/>
+          <a:p>
+            <a:endParaRPr lang="en-US"/>
+          </a:p>
+        </p:txBody>
       </p:sp>
       <p:sp>
         <p:nvSpPr>
@@ -4107,11 +4077,11 @@
           <a:bodyPr wrap="square" lIns="0" tIns="0" rIns="0" bIns="0" rtlCol="0" anchor="ctr"/>
           <a:lstStyle/>
           <a:p>
-            <a:pPr indent="0" marL="0">
-              <a:buNone/>
-            </a:pPr>
-            <a:r>
-              <a:rPr lang="en-US" sz="800" b="1" spc="200" kern="0" dirty="0">
+            <a:pPr marL="0" indent="0">
+              <a:buNone/>
+            </a:pPr>
+            <a:r>
+              <a:rPr lang="en-US" sz="800" b="1" kern="0" spc="200" dirty="0">
                 <a:solidFill>
                   <a:srgbClr val="D97706"/>
                 </a:solidFill>
@@ -4146,7 +4116,7 @@
           <a:bodyPr wrap="square" lIns="0" tIns="0" rIns="0" bIns="0" rtlCol="0" anchor="ctr"/>
           <a:lstStyle/>
           <a:p>
-            <a:pPr indent="0" marL="0">
+            <a:pPr marL="0" indent="0">
               <a:buNone/>
             </a:pPr>
             <a:r>
@@ -4185,7 +4155,7 @@
           <a:bodyPr wrap="square" lIns="0" tIns="0" rIns="0" bIns="0" rtlCol="0" anchor="ctr"/>
           <a:lstStyle/>
           <a:p>
-            <a:pPr indent="0" marL="0">
+            <a:pPr marL="0" indent="0">
               <a:buNone/>
             </a:pPr>
             <a:r>
@@ -4318,7 +4288,7 @@
         <p:spPr>
           <a:xfrm>
             <a:off x="2880360" y="2715768"/>
-            <a:ext cx="640080" cy="-201168"/>
+            <a:ext cx="640080" cy="0"/>
           </a:xfrm>
           <a:prstGeom prst="line">
             <a:avLst/>
@@ -4332,6 +4302,13 @@
             <a:tailEnd type="triangle"/>
           </a:ln>
         </p:spPr>
+        <p:txBody>
+          <a:bodyPr/>
+          <a:lstStyle/>
+          <a:p>
+            <a:endParaRPr lang="en-US"/>
+          </a:p>
+        </p:txBody>
       </p:sp>
       <p:sp>
         <p:nvSpPr>
@@ -4342,7 +4319,7 @@
         <p:spPr>
           <a:xfrm>
             <a:off x="2880360" y="4270248"/>
-            <a:ext cx="640080" cy="-1389888"/>
+            <a:ext cx="640080" cy="0"/>
           </a:xfrm>
           <a:prstGeom prst="line">
             <a:avLst/>
@@ -4356,6 +4333,13 @@
             <a:tailEnd type="triangle"/>
           </a:ln>
         </p:spPr>
+        <p:txBody>
+          <a:bodyPr/>
+          <a:lstStyle/>
+          <a:p>
+            <a:endParaRPr lang="en-US"/>
+          </a:p>
+        </p:txBody>
       </p:sp>
       <p:sp>
         <p:nvSpPr>
@@ -4380,6 +4364,13 @@
             <a:tailEnd type="triangle"/>
           </a:ln>
         </p:spPr>
+        <p:txBody>
+          <a:bodyPr/>
+          <a:lstStyle/>
+          <a:p>
+            <a:endParaRPr lang="en-US"/>
+          </a:p>
+        </p:txBody>
       </p:sp>
       <p:sp>
         <p:nvSpPr>
@@ -4404,6 +4395,13 @@
             <a:tailEnd type="triangle"/>
           </a:ln>
         </p:spPr>
+        <p:txBody>
+          <a:bodyPr/>
+          <a:lstStyle/>
+          <a:p>
+            <a:endParaRPr lang="en-US"/>
+          </a:p>
+        </p:txBody>
       </p:sp>
       <p:sp>
         <p:nvSpPr>
@@ -4427,6 +4425,13 @@
             <a:prstDash val="solid"/>
           </a:ln>
         </p:spPr>
+        <p:txBody>
+          <a:bodyPr/>
+          <a:lstStyle/>
+          <a:p>
+            <a:endParaRPr lang="en-US"/>
+          </a:p>
+        </p:txBody>
       </p:sp>
       <p:sp>
         <p:nvSpPr>
@@ -4449,7 +4454,7 @@
           <a:bodyPr wrap="square" lIns="0" tIns="0" rIns="0" bIns="0" rtlCol="0" anchor="ctr"/>
           <a:lstStyle/>
           <a:p>
-            <a:pPr indent="0" marL="0">
+            <a:pPr marL="0" indent="0">
               <a:buNone/>
             </a:pPr>
             <a:r>
@@ -4488,7 +4493,7 @@
           <a:bodyPr wrap="square" lIns="0" tIns="0" rIns="0" bIns="0" rtlCol="0" anchor="ctr"/>
           <a:lstStyle/>
           <a:p>
-            <a:pPr algn="r" indent="0" marL="0">
+            <a:pPr marL="0" indent="0" algn="r">
               <a:buNone/>
             </a:pPr>
             <a:r>
@@ -4522,6 +4527,7 @@
         <a:solidFill>
           <a:srgbClr val="F5F7FB"/>
         </a:solidFill>
+        <a:effectLst/>
       </p:bgPr>
     </p:bg>
     <p:spTree>
@@ -4562,6 +4568,13 @@
             <a:prstDash val="solid"/>
           </a:ln>
         </p:spPr>
+        <p:txBody>
+          <a:bodyPr/>
+          <a:lstStyle/>
+          <a:p>
+            <a:endParaRPr lang="en-US"/>
+          </a:p>
+        </p:txBody>
       </p:sp>
       <p:sp>
         <p:nvSpPr>
@@ -4584,7 +4597,7 @@
           <a:bodyPr wrap="square" lIns="0" tIns="0" rIns="0" bIns="0" rtlCol="0" anchor="ctr"/>
           <a:lstStyle/>
           <a:p>
-            <a:pPr algn="r" indent="0" marL="0">
+            <a:pPr marL="0" indent="0" algn="r">
               <a:buNone/>
             </a:pPr>
             <a:r>
@@ -4623,7 +4636,7 @@
           <a:bodyPr wrap="square" lIns="0" tIns="0" rIns="0" bIns="0" rtlCol="0" anchor="ctr"/>
           <a:lstStyle/>
           <a:p>
-            <a:pPr indent="0" marL="0">
+            <a:pPr marL="0" indent="0">
               <a:buNone/>
             </a:pPr>
             <a:r>
@@ -4662,7 +4675,7 @@
           <a:bodyPr wrap="square" lIns="0" tIns="0" rIns="0" bIns="0" rtlCol="0" anchor="ctr"/>
           <a:lstStyle/>
           <a:p>
-            <a:pPr indent="0" marL="0">
+            <a:pPr marL="0" indent="0">
               <a:buNone/>
             </a:pPr>
             <a:r>
@@ -4704,13 +4717,20 @@
             <a:prstDash val="solid"/>
           </a:ln>
           <a:effectLst>
-            <a:outerShdw sx="100000" sy="100000" kx="0" ky="0" algn="bl" rotWithShape="0" blurRad="101600" dist="25400" dir="5400000">
+            <a:outerShdw blurRad="101600" dist="25400" dir="5400000" algn="bl" rotWithShape="0">
               <a:srgbClr val="000000">
                 <a:alpha val="8000"/>
               </a:srgbClr>
             </a:outerShdw>
           </a:effectLst>
         </p:spPr>
+        <p:txBody>
+          <a:bodyPr/>
+          <a:lstStyle/>
+          <a:p>
+            <a:endParaRPr lang="en-US"/>
+          </a:p>
+        </p:txBody>
       </p:sp>
       <p:sp>
         <p:nvSpPr>
@@ -4736,6 +4756,13 @@
             <a:prstDash val="solid"/>
           </a:ln>
         </p:spPr>
+        <p:txBody>
+          <a:bodyPr/>
+          <a:lstStyle/>
+          <a:p>
+            <a:endParaRPr lang="en-US"/>
+          </a:p>
+        </p:txBody>
       </p:sp>
       <p:sp>
         <p:nvSpPr>
@@ -4758,11 +4785,11 @@
           <a:bodyPr wrap="square" lIns="0" tIns="0" rIns="0" bIns="0" rtlCol="0" anchor="ctr"/>
           <a:lstStyle/>
           <a:p>
-            <a:pPr indent="0" marL="0">
-              <a:buNone/>
-            </a:pPr>
-            <a:r>
-              <a:rPr lang="en-US" sz="800" b="1" spc="200" kern="0" dirty="0">
+            <a:pPr marL="0" indent="0">
+              <a:buNone/>
+            </a:pPr>
+            <a:r>
+              <a:rPr lang="en-US" sz="800" b="1" kern="0" spc="200" dirty="0">
                 <a:solidFill>
                   <a:srgbClr val="64748B"/>
                 </a:solidFill>
@@ -4797,7 +4824,7 @@
           <a:bodyPr wrap="square" lIns="0" tIns="0" rIns="0" bIns="0" rtlCol="0" anchor="ctr"/>
           <a:lstStyle/>
           <a:p>
-            <a:pPr indent="0" marL="0">
+            <a:pPr marL="0" indent="0">
               <a:buNone/>
             </a:pPr>
             <a:r>
@@ -4839,13 +4866,20 @@
             <a:prstDash val="solid"/>
           </a:ln>
           <a:effectLst>
-            <a:outerShdw sx="100000" sy="100000" kx="0" ky="0" algn="bl" rotWithShape="0" blurRad="101600" dist="25400" dir="5400000">
+            <a:outerShdw blurRad="101600" dist="25400" dir="5400000" algn="bl" rotWithShape="0">
               <a:srgbClr val="000000">
                 <a:alpha val="8000"/>
               </a:srgbClr>
             </a:outerShdw>
           </a:effectLst>
         </p:spPr>
+        <p:txBody>
+          <a:bodyPr/>
+          <a:lstStyle/>
+          <a:p>
+            <a:endParaRPr lang="en-US"/>
+          </a:p>
+        </p:txBody>
       </p:sp>
       <p:sp>
         <p:nvSpPr>
@@ -4871,6 +4905,13 @@
             <a:prstDash val="solid"/>
           </a:ln>
         </p:spPr>
+        <p:txBody>
+          <a:bodyPr/>
+          <a:lstStyle/>
+          <a:p>
+            <a:endParaRPr lang="en-US"/>
+          </a:p>
+        </p:txBody>
       </p:sp>
       <p:sp>
         <p:nvSpPr>
@@ -4893,11 +4934,11 @@
           <a:bodyPr wrap="square" lIns="0" tIns="0" rIns="0" bIns="0" rtlCol="0" anchor="ctr"/>
           <a:lstStyle/>
           <a:p>
-            <a:pPr indent="0" marL="0">
-              <a:buNone/>
-            </a:pPr>
-            <a:r>
-              <a:rPr lang="en-US" sz="800" b="1" spc="200" kern="0" dirty="0">
+            <a:pPr marL="0" indent="0">
+              <a:buNone/>
+            </a:pPr>
+            <a:r>
+              <a:rPr lang="en-US" sz="800" b="1" kern="0" spc="200" dirty="0">
                 <a:solidFill>
                   <a:srgbClr val="64748B"/>
                 </a:solidFill>
@@ -4932,7 +4973,7 @@
           <a:bodyPr wrap="square" lIns="0" tIns="0" rIns="0" bIns="0" rtlCol="0" anchor="ctr"/>
           <a:lstStyle/>
           <a:p>
-            <a:pPr indent="0" marL="0">
+            <a:pPr marL="0" indent="0">
               <a:buNone/>
             </a:pPr>
             <a:r>
@@ -4974,13 +5015,20 @@
             <a:prstDash val="solid"/>
           </a:ln>
           <a:effectLst>
-            <a:outerShdw sx="100000" sy="100000" kx="0" ky="0" algn="bl" rotWithShape="0" blurRad="101600" dist="25400" dir="5400000">
+            <a:outerShdw blurRad="101600" dist="25400" dir="5400000" algn="bl" rotWithShape="0">
               <a:srgbClr val="000000">
                 <a:alpha val="8000"/>
               </a:srgbClr>
             </a:outerShdw>
           </a:effectLst>
         </p:spPr>
+        <p:txBody>
+          <a:bodyPr/>
+          <a:lstStyle/>
+          <a:p>
+            <a:endParaRPr lang="en-US"/>
+          </a:p>
+        </p:txBody>
       </p:sp>
       <p:sp>
         <p:nvSpPr>
@@ -5006,6 +5054,13 @@
             <a:prstDash val="solid"/>
           </a:ln>
         </p:spPr>
+        <p:txBody>
+          <a:bodyPr/>
+          <a:lstStyle/>
+          <a:p>
+            <a:endParaRPr lang="en-US"/>
+          </a:p>
+        </p:txBody>
       </p:sp>
       <p:sp>
         <p:nvSpPr>
@@ -5028,11 +5083,11 @@
           <a:bodyPr wrap="square" lIns="0" tIns="0" rIns="0" bIns="0" rtlCol="0" anchor="ctr"/>
           <a:lstStyle/>
           <a:p>
-            <a:pPr indent="0" marL="0">
-              <a:buNone/>
-            </a:pPr>
-            <a:r>
-              <a:rPr lang="en-US" sz="800" b="1" spc="200" kern="0" dirty="0">
+            <a:pPr marL="0" indent="0">
+              <a:buNone/>
+            </a:pPr>
+            <a:r>
+              <a:rPr lang="en-US" sz="800" b="1" kern="0" spc="200" dirty="0">
                 <a:solidFill>
                   <a:srgbClr val="64748B"/>
                 </a:solidFill>
@@ -5067,7 +5122,7 @@
           <a:bodyPr wrap="square" lIns="0" tIns="0" rIns="0" bIns="0" rtlCol="0" anchor="ctr"/>
           <a:lstStyle/>
           <a:p>
-            <a:pPr indent="0" marL="0">
+            <a:pPr marL="0" indent="0">
               <a:buNone/>
             </a:pPr>
             <a:r>
@@ -5109,13 +5164,20 @@
             <a:prstDash val="solid"/>
           </a:ln>
           <a:effectLst>
-            <a:outerShdw sx="100000" sy="100000" kx="0" ky="0" algn="bl" rotWithShape="0" blurRad="101600" dist="25400" dir="5400000">
+            <a:outerShdw blurRad="101600" dist="25400" dir="5400000" algn="bl" rotWithShape="0">
               <a:srgbClr val="000000">
                 <a:alpha val="8000"/>
               </a:srgbClr>
             </a:outerShdw>
           </a:effectLst>
         </p:spPr>
+        <p:txBody>
+          <a:bodyPr/>
+          <a:lstStyle/>
+          <a:p>
+            <a:endParaRPr lang="en-US"/>
+          </a:p>
+        </p:txBody>
       </p:sp>
       <p:sp>
         <p:nvSpPr>
@@ -5141,6 +5203,13 @@
             <a:prstDash val="solid"/>
           </a:ln>
         </p:spPr>
+        <p:txBody>
+          <a:bodyPr/>
+          <a:lstStyle/>
+          <a:p>
+            <a:endParaRPr lang="en-US"/>
+          </a:p>
+        </p:txBody>
       </p:sp>
       <p:sp>
         <p:nvSpPr>
@@ -5163,11 +5232,11 @@
           <a:bodyPr wrap="square" lIns="0" tIns="0" rIns="0" bIns="0" rtlCol="0" anchor="ctr"/>
           <a:lstStyle/>
           <a:p>
-            <a:pPr indent="0" marL="0">
-              <a:buNone/>
-            </a:pPr>
-            <a:r>
-              <a:rPr lang="en-US" sz="800" b="1" spc="200" kern="0" dirty="0">
+            <a:pPr marL="0" indent="0">
+              <a:buNone/>
+            </a:pPr>
+            <a:r>
+              <a:rPr lang="en-US" sz="800" b="1" kern="0" spc="200" dirty="0">
                 <a:solidFill>
                   <a:srgbClr val="64748B"/>
                 </a:solidFill>
@@ -5202,7 +5271,7 @@
           <a:bodyPr wrap="square" lIns="0" tIns="0" rIns="0" bIns="0" rtlCol="0" anchor="ctr"/>
           <a:lstStyle/>
           <a:p>
-            <a:pPr indent="0" marL="0">
+            <a:pPr marL="0" indent="0">
               <a:buNone/>
             </a:pPr>
             <a:r>
@@ -5244,6 +5313,13 @@
             <a:prstDash val="solid"/>
           </a:ln>
         </p:spPr>
+        <p:txBody>
+          <a:bodyPr/>
+          <a:lstStyle/>
+          <a:p>
+            <a:endParaRPr lang="en-US"/>
+          </a:p>
+        </p:txBody>
       </p:sp>
       <p:sp>
         <p:nvSpPr>
@@ -5271,6 +5347,13 @@
             <a:prstDash val="solid"/>
           </a:ln>
         </p:spPr>
+        <p:txBody>
+          <a:bodyPr/>
+          <a:lstStyle/>
+          <a:p>
+            <a:endParaRPr lang="en-US"/>
+          </a:p>
+        </p:txBody>
       </p:sp>
       <p:sp>
         <p:nvSpPr>
@@ -5296,6 +5379,13 @@
             <a:prstDash val="solid"/>
           </a:ln>
         </p:spPr>
+        <p:txBody>
+          <a:bodyPr/>
+          <a:lstStyle/>
+          <a:p>
+            <a:endParaRPr lang="en-US"/>
+          </a:p>
+        </p:txBody>
       </p:sp>
       <p:sp>
         <p:nvSpPr>
@@ -5318,7 +5408,7 @@
           <a:bodyPr wrap="square" lIns="0" tIns="0" rIns="0" bIns="0" rtlCol="0" anchor="ctr"/>
           <a:lstStyle/>
           <a:p>
-            <a:pPr algn="ctr" indent="0" marL="0">
+            <a:pPr marL="0" indent="0" algn="ctr">
               <a:buNone/>
             </a:pPr>
             <a:r>
@@ -5360,6 +5450,13 @@
             <a:prstDash val="solid"/>
           </a:ln>
         </p:spPr>
+        <p:txBody>
+          <a:bodyPr/>
+          <a:lstStyle/>
+          <a:p>
+            <a:endParaRPr lang="en-US"/>
+          </a:p>
+        </p:txBody>
       </p:sp>
       <p:sp>
         <p:nvSpPr>
@@ -5382,7 +5479,7 @@
           <a:bodyPr wrap="square" lIns="0" tIns="0" rIns="0" bIns="0" rtlCol="0" anchor="ctr"/>
           <a:lstStyle/>
           <a:p>
-            <a:pPr algn="ctr" indent="0" marL="0">
+            <a:pPr marL="0" indent="0" algn="ctr">
               <a:buNone/>
             </a:pPr>
             <a:r>
@@ -5424,6 +5521,13 @@
             <a:prstDash val="solid"/>
           </a:ln>
         </p:spPr>
+        <p:txBody>
+          <a:bodyPr/>
+          <a:lstStyle/>
+          <a:p>
+            <a:endParaRPr lang="en-US"/>
+          </a:p>
+        </p:txBody>
       </p:sp>
       <p:sp>
         <p:nvSpPr>
@@ -5446,7 +5550,7 @@
           <a:bodyPr wrap="square" lIns="0" tIns="0" rIns="0" bIns="0" rtlCol="0" anchor="ctr"/>
           <a:lstStyle/>
           <a:p>
-            <a:pPr algn="ctr" indent="0" marL="0">
+            <a:pPr marL="0" indent="0" algn="ctr">
               <a:buNone/>
             </a:pPr>
             <a:r>
@@ -5488,6 +5592,13 @@
             <a:prstDash val="solid"/>
           </a:ln>
         </p:spPr>
+        <p:txBody>
+          <a:bodyPr/>
+          <a:lstStyle/>
+          <a:p>
+            <a:endParaRPr lang="en-US"/>
+          </a:p>
+        </p:txBody>
       </p:sp>
       <p:sp>
         <p:nvSpPr>
@@ -5510,7 +5621,7 @@
           <a:bodyPr wrap="square" lIns="0" tIns="0" rIns="0" bIns="0" rtlCol="0" anchor="ctr"/>
           <a:lstStyle/>
           <a:p>
-            <a:pPr algn="ctr" indent="0" marL="0">
+            <a:pPr marL="0" indent="0" algn="ctr">
               <a:buNone/>
             </a:pPr>
             <a:r>
@@ -5552,6 +5663,13 @@
             <a:prstDash val="solid"/>
           </a:ln>
         </p:spPr>
+        <p:txBody>
+          <a:bodyPr/>
+          <a:lstStyle/>
+          <a:p>
+            <a:endParaRPr lang="en-US"/>
+          </a:p>
+        </p:txBody>
       </p:sp>
       <p:sp>
         <p:nvSpPr>
@@ -5574,7 +5692,7 @@
           <a:bodyPr wrap="square" lIns="0" tIns="0" rIns="0" bIns="0" rtlCol="0" anchor="ctr"/>
           <a:lstStyle/>
           <a:p>
-            <a:pPr algn="ctr" indent="0" marL="0">
+            <a:pPr marL="0" indent="0" algn="ctr">
               <a:buNone/>
             </a:pPr>
             <a:r>
@@ -5614,6 +5732,13 @@
             <a:prstDash val="solid"/>
           </a:ln>
         </p:spPr>
+        <p:txBody>
+          <a:bodyPr/>
+          <a:lstStyle/>
+          <a:p>
+            <a:endParaRPr lang="en-US"/>
+          </a:p>
+        </p:txBody>
       </p:sp>
       <p:sp>
         <p:nvSpPr>
@@ -5636,7 +5761,7 @@
           <a:bodyPr wrap="square" lIns="0" tIns="0" rIns="0" bIns="0" rtlCol="0" anchor="ctr"/>
           <a:lstStyle/>
           <a:p>
-            <a:pPr algn="ctr" indent="0" marL="0">
+            <a:pPr marL="0" indent="0" algn="ctr">
               <a:buNone/>
             </a:pPr>
             <a:r>
@@ -5676,6 +5801,13 @@
             <a:prstDash val="solid"/>
           </a:ln>
         </p:spPr>
+        <p:txBody>
+          <a:bodyPr/>
+          <a:lstStyle/>
+          <a:p>
+            <a:endParaRPr lang="en-US"/>
+          </a:p>
+        </p:txBody>
       </p:sp>
       <p:sp>
         <p:nvSpPr>
@@ -5698,7 +5830,7 @@
           <a:bodyPr wrap="square" lIns="0" tIns="0" rIns="0" bIns="0" rtlCol="0" anchor="ctr"/>
           <a:lstStyle/>
           <a:p>
-            <a:pPr algn="ctr" indent="0" marL="0">
+            <a:pPr marL="0" indent="0" algn="ctr">
               <a:buNone/>
             </a:pPr>
             <a:r>
@@ -5738,6 +5870,13 @@
             <a:prstDash val="solid"/>
           </a:ln>
         </p:spPr>
+        <p:txBody>
+          <a:bodyPr/>
+          <a:lstStyle/>
+          <a:p>
+            <a:endParaRPr lang="en-US"/>
+          </a:p>
+        </p:txBody>
       </p:sp>
       <p:sp>
         <p:nvSpPr>
@@ -5760,7 +5899,7 @@
           <a:bodyPr wrap="square" lIns="0" tIns="0" rIns="0" bIns="0" rtlCol="0" anchor="ctr"/>
           <a:lstStyle/>
           <a:p>
-            <a:pPr algn="ctr" indent="0" marL="0">
+            <a:pPr marL="0" indent="0" algn="ctr">
               <a:buNone/>
             </a:pPr>
             <a:r>
@@ -5800,6 +5939,13 @@
             <a:prstDash val="solid"/>
           </a:ln>
         </p:spPr>
+        <p:txBody>
+          <a:bodyPr/>
+          <a:lstStyle/>
+          <a:p>
+            <a:endParaRPr lang="en-US"/>
+          </a:p>
+        </p:txBody>
       </p:sp>
       <p:sp>
         <p:nvSpPr>
@@ -5822,7 +5968,7 @@
           <a:bodyPr wrap="square" lIns="0" tIns="0" rIns="0" bIns="0" rtlCol="0" anchor="ctr"/>
           <a:lstStyle/>
           <a:p>
-            <a:pPr algn="ctr" indent="0" marL="0">
+            <a:pPr marL="0" indent="0" algn="ctr">
               <a:buNone/>
             </a:pPr>
             <a:r>
@@ -5862,6 +6008,13 @@
             <a:prstDash val="solid"/>
           </a:ln>
         </p:spPr>
+        <p:txBody>
+          <a:bodyPr/>
+          <a:lstStyle/>
+          <a:p>
+            <a:endParaRPr lang="en-US"/>
+          </a:p>
+        </p:txBody>
       </p:sp>
       <p:sp>
         <p:nvSpPr>
@@ -5884,7 +6037,7 @@
           <a:bodyPr wrap="square" lIns="0" tIns="0" rIns="0" bIns="0" rtlCol="0" anchor="ctr"/>
           <a:lstStyle/>
           <a:p>
-            <a:pPr algn="ctr" indent="0" marL="0">
+            <a:pPr marL="0" indent="0" algn="ctr">
               <a:buNone/>
             </a:pPr>
             <a:r>
@@ -5924,6 +6077,13 @@
             <a:prstDash val="solid"/>
           </a:ln>
         </p:spPr>
+        <p:txBody>
+          <a:bodyPr/>
+          <a:lstStyle/>
+          <a:p>
+            <a:endParaRPr lang="en-US"/>
+          </a:p>
+        </p:txBody>
       </p:sp>
       <p:sp>
         <p:nvSpPr>
@@ -5946,7 +6106,7 @@
           <a:bodyPr wrap="square" lIns="0" tIns="0" rIns="0" bIns="0" rtlCol="0" anchor="ctr"/>
           <a:lstStyle/>
           <a:p>
-            <a:pPr algn="ctr" indent="0" marL="0">
+            <a:pPr marL="0" indent="0" algn="ctr">
               <a:buNone/>
             </a:pPr>
             <a:r>
@@ -5985,7 +6145,7 @@
           <a:bodyPr wrap="square" lIns="0" tIns="0" rIns="0" bIns="0" rtlCol="0" anchor="ctr"/>
           <a:lstStyle/>
           <a:p>
-            <a:pPr algn="ctr" indent="0" marL="0">
+            <a:pPr marL="0" indent="0" algn="ctr">
               <a:buNone/>
             </a:pPr>
             <a:r>
@@ -6025,6 +6185,13 @@
             <a:prstDash val="dash"/>
           </a:ln>
         </p:spPr>
+        <p:txBody>
+          <a:bodyPr/>
+          <a:lstStyle/>
+          <a:p>
+            <a:endParaRPr lang="en-US"/>
+          </a:p>
+        </p:txBody>
       </p:sp>
       <p:sp>
         <p:nvSpPr>
@@ -6047,7 +6214,7 @@
           <a:bodyPr wrap="square" lIns="0" tIns="0" rIns="0" bIns="0" rtlCol="0" anchor="ctr"/>
           <a:lstStyle/>
           <a:p>
-            <a:pPr algn="r" indent="0" marL="0">
+            <a:pPr marL="0" indent="0" algn="r">
               <a:buNone/>
             </a:pPr>
             <a:r>
@@ -6089,6 +6256,13 @@
             <a:prstDash val="solid"/>
           </a:ln>
         </p:spPr>
+        <p:txBody>
+          <a:bodyPr/>
+          <a:lstStyle/>
+          <a:p>
+            <a:endParaRPr lang="en-US"/>
+          </a:p>
+        </p:txBody>
       </p:sp>
       <p:sp>
         <p:nvSpPr>
@@ -6111,7 +6285,7 @@
           <a:bodyPr wrap="square" lIns="0" tIns="0" rIns="0" bIns="0" rtlCol="0" anchor="ctr"/>
           <a:lstStyle/>
           <a:p>
-            <a:pPr indent="0" marL="0">
+            <a:pPr marL="0" indent="0">
               <a:buNone/>
             </a:pPr>
             <a:r>
@@ -6150,7 +6324,7 @@
           <a:bodyPr wrap="square" lIns="0" tIns="0" rIns="0" bIns="0" rtlCol="0" anchor="ctr"/>
           <a:lstStyle/>
           <a:p>
-            <a:pPr indent="0" marL="0">
+            <a:pPr marL="0" indent="0">
               <a:buNone/>
             </a:pPr>
             <a:r>
@@ -6192,6 +6366,13 @@
             <a:prstDash val="solid"/>
           </a:ln>
         </p:spPr>
+        <p:txBody>
+          <a:bodyPr/>
+          <a:lstStyle/>
+          <a:p>
+            <a:endParaRPr lang="en-US"/>
+          </a:p>
+        </p:txBody>
       </p:sp>
       <p:sp>
         <p:nvSpPr>
@@ -6214,7 +6395,7 @@
           <a:bodyPr wrap="square" lIns="0" tIns="0" rIns="0" bIns="0" rtlCol="0" anchor="ctr"/>
           <a:lstStyle/>
           <a:p>
-            <a:pPr indent="0" marL="0">
+            <a:pPr marL="0" indent="0">
               <a:buNone/>
             </a:pPr>
             <a:r>
@@ -6253,7 +6434,7 @@
           <a:bodyPr wrap="square" lIns="0" tIns="0" rIns="0" bIns="0" rtlCol="0" anchor="ctr"/>
           <a:lstStyle/>
           <a:p>
-            <a:pPr indent="0" marL="0">
+            <a:pPr marL="0" indent="0">
               <a:buNone/>
             </a:pPr>
             <a:r>
@@ -6295,6 +6476,13 @@
             <a:prstDash val="solid"/>
           </a:ln>
         </p:spPr>
+        <p:txBody>
+          <a:bodyPr/>
+          <a:lstStyle/>
+          <a:p>
+            <a:endParaRPr lang="en-US"/>
+          </a:p>
+        </p:txBody>
       </p:sp>
       <p:sp>
         <p:nvSpPr>
@@ -6317,7 +6505,7 @@
           <a:bodyPr wrap="square" lIns="0" tIns="0" rIns="0" bIns="0" rtlCol="0" anchor="ctr"/>
           <a:lstStyle/>
           <a:p>
-            <a:pPr indent="0" marL="0">
+            <a:pPr marL="0" indent="0">
               <a:buNone/>
             </a:pPr>
             <a:r>
@@ -6356,7 +6544,7 @@
           <a:bodyPr wrap="square" lIns="0" tIns="0" rIns="0" bIns="0" rtlCol="0" anchor="ctr"/>
           <a:lstStyle/>
           <a:p>
-            <a:pPr indent="0" marL="0">
+            <a:pPr marL="0" indent="0">
               <a:buNone/>
             </a:pPr>
             <a:r>
@@ -6398,6 +6586,13 @@
             <a:prstDash val="solid"/>
           </a:ln>
         </p:spPr>
+        <p:txBody>
+          <a:bodyPr/>
+          <a:lstStyle/>
+          <a:p>
+            <a:endParaRPr lang="en-US"/>
+          </a:p>
+        </p:txBody>
       </p:sp>
       <p:sp>
         <p:nvSpPr>
@@ -6420,7 +6615,7 @@
           <a:bodyPr wrap="square" lIns="0" tIns="0" rIns="0" bIns="0" rtlCol="0" anchor="ctr"/>
           <a:lstStyle/>
           <a:p>
-            <a:pPr indent="0" marL="0">
+            <a:pPr marL="0" indent="0">
               <a:buNone/>
             </a:pPr>
             <a:r>
@@ -6459,7 +6654,7 @@
           <a:bodyPr wrap="square" lIns="0" tIns="0" rIns="0" bIns="0" rtlCol="0" anchor="ctr"/>
           <a:lstStyle/>
           <a:p>
-            <a:pPr indent="0" marL="0">
+            <a:pPr marL="0" indent="0">
               <a:buNone/>
             </a:pPr>
             <a:r>
@@ -6501,6 +6696,13 @@
             <a:prstDash val="solid"/>
           </a:ln>
         </p:spPr>
+        <p:txBody>
+          <a:bodyPr/>
+          <a:lstStyle/>
+          <a:p>
+            <a:endParaRPr lang="en-US"/>
+          </a:p>
+        </p:txBody>
       </p:sp>
       <p:sp>
         <p:nvSpPr>
@@ -6523,7 +6725,7 @@
           <a:bodyPr wrap="square" lIns="0" tIns="0" rIns="0" bIns="0" rtlCol="0" anchor="ctr"/>
           <a:lstStyle/>
           <a:p>
-            <a:pPr indent="0" marL="0">
+            <a:pPr marL="0" indent="0">
               <a:buNone/>
             </a:pPr>
             <a:r>
@@ -6562,7 +6764,7 @@
           <a:bodyPr wrap="square" lIns="0" tIns="0" rIns="0" bIns="0" rtlCol="0" anchor="ctr"/>
           <a:lstStyle/>
           <a:p>
-            <a:pPr indent="0" marL="0">
+            <a:pPr marL="0" indent="0">
               <a:buNone/>
             </a:pPr>
             <a:r>
@@ -6604,6 +6806,13 @@
             <a:prstDash val="solid"/>
           </a:ln>
         </p:spPr>
+        <p:txBody>
+          <a:bodyPr/>
+          <a:lstStyle/>
+          <a:p>
+            <a:endParaRPr lang="en-US"/>
+          </a:p>
+        </p:txBody>
       </p:sp>
       <p:sp>
         <p:nvSpPr>
@@ -6629,6 +6838,13 @@
             <a:prstDash val="solid"/>
           </a:ln>
         </p:spPr>
+        <p:txBody>
+          <a:bodyPr/>
+          <a:lstStyle/>
+          <a:p>
+            <a:endParaRPr lang="en-US"/>
+          </a:p>
+        </p:txBody>
       </p:sp>
       <p:sp>
         <p:nvSpPr>
@@ -6651,11 +6867,11 @@
           <a:bodyPr wrap="square" lIns="0" tIns="0" rIns="0" bIns="0" rtlCol="0" anchor="ctr"/>
           <a:lstStyle/>
           <a:p>
-            <a:pPr indent="0" marL="0">
-              <a:buNone/>
-            </a:pPr>
-            <a:r>
-              <a:rPr lang="en-US" sz="800" b="1" spc="300" kern="0" dirty="0">
+            <a:pPr marL="0" indent="0">
+              <a:buNone/>
+            </a:pPr>
+            <a:r>
+              <a:rPr lang="en-US" sz="800" b="1" kern="0" spc="300" dirty="0">
                 <a:solidFill>
                   <a:srgbClr val="F96167"/>
                 </a:solidFill>
@@ -6776,6 +6992,13 @@
             <a:prstDash val="solid"/>
           </a:ln>
         </p:spPr>
+        <p:txBody>
+          <a:bodyPr/>
+          <a:lstStyle/>
+          <a:p>
+            <a:endParaRPr lang="en-US"/>
+          </a:p>
+        </p:txBody>
       </p:sp>
       <p:sp>
         <p:nvSpPr>
@@ -6798,7 +7021,7 @@
           <a:bodyPr wrap="square" lIns="0" tIns="0" rIns="0" bIns="0" rtlCol="0" anchor="ctr"/>
           <a:lstStyle/>
           <a:p>
-            <a:pPr indent="0" marL="0">
+            <a:pPr marL="0" indent="0">
               <a:buNone/>
             </a:pPr>
             <a:r>
@@ -6837,7 +7060,7 @@
           <a:bodyPr wrap="square" lIns="0" tIns="0" rIns="0" bIns="0" rtlCol="0" anchor="ctr"/>
           <a:lstStyle/>
           <a:p>
-            <a:pPr algn="r" indent="0" marL="0">
+            <a:pPr marL="0" indent="0" algn="r">
               <a:buNone/>
             </a:pPr>
             <a:r>
@@ -6871,6 +7094,7 @@
         <a:solidFill>
           <a:srgbClr val="F5F7FB"/>
         </a:solidFill>
+        <a:effectLst/>
       </p:bgPr>
     </p:bg>
     <p:spTree>
@@ -6911,6 +7135,13 @@
             <a:prstDash val="solid"/>
           </a:ln>
         </p:spPr>
+        <p:txBody>
+          <a:bodyPr/>
+          <a:lstStyle/>
+          <a:p>
+            <a:endParaRPr lang="en-US"/>
+          </a:p>
+        </p:txBody>
       </p:sp>
       <p:sp>
         <p:nvSpPr>
@@ -6933,7 +7164,7 @@
           <a:bodyPr wrap="square" lIns="0" tIns="0" rIns="0" bIns="0" rtlCol="0" anchor="ctr"/>
           <a:lstStyle/>
           <a:p>
-            <a:pPr algn="r" indent="0" marL="0">
+            <a:pPr marL="0" indent="0" algn="r">
               <a:buNone/>
             </a:pPr>
             <a:r>
@@ -6972,7 +7203,7 @@
           <a:bodyPr wrap="square" lIns="0" tIns="0" rIns="0" bIns="0" rtlCol="0" anchor="ctr"/>
           <a:lstStyle/>
           <a:p>
-            <a:pPr indent="0" marL="0">
+            <a:pPr marL="0" indent="0">
               <a:buNone/>
             </a:pPr>
             <a:r>
@@ -7011,7 +7242,7 @@
           <a:bodyPr wrap="square" lIns="0" tIns="0" rIns="0" bIns="0" rtlCol="0" anchor="ctr"/>
           <a:lstStyle/>
           <a:p>
-            <a:pPr indent="0" marL="0">
+            <a:pPr marL="0" indent="0">
               <a:buNone/>
             </a:pPr>
             <a:r>
@@ -7053,13 +7284,20 @@
             <a:prstDash val="solid"/>
           </a:ln>
           <a:effectLst>
-            <a:outerShdw sx="100000" sy="100000" kx="0" ky="0" algn="bl" rotWithShape="0" blurRad="101600" dist="25400" dir="5400000">
+            <a:outerShdw blurRad="101600" dist="25400" dir="5400000" algn="bl" rotWithShape="0">
               <a:srgbClr val="000000">
                 <a:alpha val="8000"/>
               </a:srgbClr>
             </a:outerShdw>
           </a:effectLst>
         </p:spPr>
+        <p:txBody>
+          <a:bodyPr/>
+          <a:lstStyle/>
+          <a:p>
+            <a:endParaRPr lang="en-US"/>
+          </a:p>
+        </p:txBody>
       </p:sp>
       <p:sp>
         <p:nvSpPr>
@@ -7085,6 +7323,13 @@
             <a:prstDash val="solid"/>
           </a:ln>
         </p:spPr>
+        <p:txBody>
+          <a:bodyPr/>
+          <a:lstStyle/>
+          <a:p>
+            <a:endParaRPr lang="en-US"/>
+          </a:p>
+        </p:txBody>
       </p:sp>
       <p:sp>
         <p:nvSpPr>
@@ -7107,11 +7352,11 @@
           <a:bodyPr wrap="square" lIns="0" tIns="0" rIns="0" bIns="0" rtlCol="0" anchor="ctr"/>
           <a:lstStyle/>
           <a:p>
-            <a:pPr indent="0" marL="0">
-              <a:buNone/>
-            </a:pPr>
-            <a:r>
-              <a:rPr lang="en-US" sz="900" b="1" spc="300" kern="0" dirty="0">
+            <a:pPr marL="0" indent="0">
+              <a:buNone/>
+            </a:pPr>
+            <a:r>
+              <a:rPr lang="en-US" sz="900" b="1" kern="0" spc="300" dirty="0">
                 <a:solidFill>
                   <a:srgbClr val="FFFFFF"/>
                 </a:solidFill>
@@ -7146,7 +7391,7 @@
           <a:bodyPr wrap="square" lIns="0" tIns="0" rIns="0" bIns="0" rtlCol="0" anchor="ctr"/>
           <a:lstStyle/>
           <a:p>
-            <a:pPr indent="0" marL="0">
+            <a:pPr marL="0" indent="0">
               <a:buNone/>
             </a:pPr>
             <a:r>
@@ -7185,7 +7430,7 @@
           <a:bodyPr wrap="square" lIns="0" tIns="0" rIns="0" bIns="0" rtlCol="0" anchor="ctr"/>
           <a:lstStyle/>
           <a:p>
-            <a:pPr indent="0" marL="0">
+            <a:pPr marL="0" indent="0">
               <a:buNone/>
             </a:pPr>
             <a:r>
@@ -7226,6 +7471,13 @@
             <a:tailEnd type="triangle"/>
           </a:ln>
         </p:spPr>
+        <p:txBody>
+          <a:bodyPr/>
+          <a:lstStyle/>
+          <a:p>
+            <a:endParaRPr lang="en-US"/>
+          </a:p>
+        </p:txBody>
       </p:sp>
       <p:sp>
         <p:nvSpPr>
@@ -7251,13 +7503,20 @@
             <a:prstDash val="solid"/>
           </a:ln>
           <a:effectLst>
-            <a:outerShdw sx="100000" sy="100000" kx="0" ky="0" algn="bl" rotWithShape="0" blurRad="101600" dist="25400" dir="5400000">
+            <a:outerShdw blurRad="101600" dist="25400" dir="5400000" algn="bl" rotWithShape="0">
               <a:srgbClr val="000000">
                 <a:alpha val="8000"/>
               </a:srgbClr>
             </a:outerShdw>
           </a:effectLst>
         </p:spPr>
+        <p:txBody>
+          <a:bodyPr/>
+          <a:lstStyle/>
+          <a:p>
+            <a:endParaRPr lang="en-US"/>
+          </a:p>
+        </p:txBody>
       </p:sp>
       <p:sp>
         <p:nvSpPr>
@@ -7283,6 +7542,13 @@
             <a:prstDash val="solid"/>
           </a:ln>
         </p:spPr>
+        <p:txBody>
+          <a:bodyPr/>
+          <a:lstStyle/>
+          <a:p>
+            <a:endParaRPr lang="en-US"/>
+          </a:p>
+        </p:txBody>
       </p:sp>
       <p:sp>
         <p:nvSpPr>
@@ -7305,11 +7571,11 @@
           <a:bodyPr wrap="square" lIns="0" tIns="0" rIns="0" bIns="0" rtlCol="0" anchor="ctr"/>
           <a:lstStyle/>
           <a:p>
-            <a:pPr indent="0" marL="0">
-              <a:buNone/>
-            </a:pPr>
-            <a:r>
-              <a:rPr lang="en-US" sz="900" b="1" spc="300" kern="0" dirty="0">
+            <a:pPr marL="0" indent="0">
+              <a:buNone/>
+            </a:pPr>
+            <a:r>
+              <a:rPr lang="en-US" sz="900" b="1" kern="0" spc="300" dirty="0">
                 <a:solidFill>
                   <a:srgbClr val="FFFFFF"/>
                 </a:solidFill>
@@ -7344,7 +7610,7 @@
           <a:bodyPr wrap="square" lIns="0" tIns="0" rIns="0" bIns="0" rtlCol="0" anchor="ctr"/>
           <a:lstStyle/>
           <a:p>
-            <a:pPr indent="0" marL="0">
+            <a:pPr marL="0" indent="0">
               <a:buNone/>
             </a:pPr>
             <a:r>
@@ -7383,7 +7649,7 @@
           <a:bodyPr wrap="square" lIns="0" tIns="0" rIns="0" bIns="0" rtlCol="0" anchor="ctr"/>
           <a:lstStyle/>
           <a:p>
-            <a:pPr indent="0" marL="0">
+            <a:pPr marL="0" indent="0">
               <a:buNone/>
             </a:pPr>
             <a:r>
@@ -7424,6 +7690,13 @@
             <a:tailEnd type="triangle"/>
           </a:ln>
         </p:spPr>
+        <p:txBody>
+          <a:bodyPr/>
+          <a:lstStyle/>
+          <a:p>
+            <a:endParaRPr lang="en-US"/>
+          </a:p>
+        </p:txBody>
       </p:sp>
       <p:sp>
         <p:nvSpPr>
@@ -7449,13 +7722,20 @@
             <a:prstDash val="solid"/>
           </a:ln>
           <a:effectLst>
-            <a:outerShdw sx="100000" sy="100000" kx="0" ky="0" algn="bl" rotWithShape="0" blurRad="101600" dist="25400" dir="5400000">
+            <a:outerShdw blurRad="101600" dist="25400" dir="5400000" algn="bl" rotWithShape="0">
               <a:srgbClr val="000000">
                 <a:alpha val="8000"/>
               </a:srgbClr>
             </a:outerShdw>
           </a:effectLst>
         </p:spPr>
+        <p:txBody>
+          <a:bodyPr/>
+          <a:lstStyle/>
+          <a:p>
+            <a:endParaRPr lang="en-US"/>
+          </a:p>
+        </p:txBody>
       </p:sp>
       <p:sp>
         <p:nvSpPr>
@@ -7481,6 +7761,13 @@
             <a:prstDash val="solid"/>
           </a:ln>
         </p:spPr>
+        <p:txBody>
+          <a:bodyPr/>
+          <a:lstStyle/>
+          <a:p>
+            <a:endParaRPr lang="en-US"/>
+          </a:p>
+        </p:txBody>
       </p:sp>
       <p:sp>
         <p:nvSpPr>
@@ -7503,11 +7790,11 @@
           <a:bodyPr wrap="square" lIns="0" tIns="0" rIns="0" bIns="0" rtlCol="0" anchor="ctr"/>
           <a:lstStyle/>
           <a:p>
-            <a:pPr indent="0" marL="0">
-              <a:buNone/>
-            </a:pPr>
-            <a:r>
-              <a:rPr lang="en-US" sz="900" b="1" spc="300" kern="0" dirty="0">
+            <a:pPr marL="0" indent="0">
+              <a:buNone/>
+            </a:pPr>
+            <a:r>
+              <a:rPr lang="en-US" sz="900" b="1" kern="0" spc="300" dirty="0">
                 <a:solidFill>
                   <a:srgbClr val="FFFFFF"/>
                 </a:solidFill>
@@ -7542,7 +7829,7 @@
           <a:bodyPr wrap="square" lIns="0" tIns="0" rIns="0" bIns="0" rtlCol="0" anchor="ctr"/>
           <a:lstStyle/>
           <a:p>
-            <a:pPr indent="0" marL="0">
+            <a:pPr marL="0" indent="0">
               <a:buNone/>
             </a:pPr>
             <a:r>
@@ -7581,7 +7868,7 @@
           <a:bodyPr wrap="square" lIns="0" tIns="0" rIns="0" bIns="0" rtlCol="0" anchor="ctr"/>
           <a:lstStyle/>
           <a:p>
-            <a:pPr indent="0" marL="0">
+            <a:pPr marL="0" indent="0">
               <a:buNone/>
             </a:pPr>
             <a:r>
@@ -7622,6 +7909,13 @@
             <a:tailEnd type="triangle"/>
           </a:ln>
         </p:spPr>
+        <p:txBody>
+          <a:bodyPr/>
+          <a:lstStyle/>
+          <a:p>
+            <a:endParaRPr lang="en-US"/>
+          </a:p>
+        </p:txBody>
       </p:sp>
       <p:sp>
         <p:nvSpPr>
@@ -7647,13 +7941,20 @@
             <a:prstDash val="solid"/>
           </a:ln>
           <a:effectLst>
-            <a:outerShdw sx="100000" sy="100000" kx="0" ky="0" algn="bl" rotWithShape="0" blurRad="101600" dist="25400" dir="5400000">
+            <a:outerShdw blurRad="101600" dist="25400" dir="5400000" algn="bl" rotWithShape="0">
               <a:srgbClr val="000000">
                 <a:alpha val="8000"/>
               </a:srgbClr>
             </a:outerShdw>
           </a:effectLst>
         </p:spPr>
+        <p:txBody>
+          <a:bodyPr/>
+          <a:lstStyle/>
+          <a:p>
+            <a:endParaRPr lang="en-US"/>
+          </a:p>
+        </p:txBody>
       </p:sp>
       <p:sp>
         <p:nvSpPr>
@@ -7679,6 +7980,13 @@
             <a:prstDash val="solid"/>
           </a:ln>
         </p:spPr>
+        <p:txBody>
+          <a:bodyPr/>
+          <a:lstStyle/>
+          <a:p>
+            <a:endParaRPr lang="en-US"/>
+          </a:p>
+        </p:txBody>
       </p:sp>
       <p:sp>
         <p:nvSpPr>
@@ -7701,11 +8009,11 @@
           <a:bodyPr wrap="square" lIns="0" tIns="0" rIns="0" bIns="0" rtlCol="0" anchor="ctr"/>
           <a:lstStyle/>
           <a:p>
-            <a:pPr indent="0" marL="0">
-              <a:buNone/>
-            </a:pPr>
-            <a:r>
-              <a:rPr lang="en-US" sz="900" b="1" spc="300" kern="0" dirty="0">
+            <a:pPr marL="0" indent="0">
+              <a:buNone/>
+            </a:pPr>
+            <a:r>
+              <a:rPr lang="en-US" sz="900" b="1" kern="0" spc="300" dirty="0">
                 <a:solidFill>
                   <a:srgbClr val="FFFFFF"/>
                 </a:solidFill>
@@ -7740,7 +8048,7 @@
           <a:bodyPr wrap="square" lIns="0" tIns="0" rIns="0" bIns="0" rtlCol="0" anchor="ctr"/>
           <a:lstStyle/>
           <a:p>
-            <a:pPr indent="0" marL="0">
+            <a:pPr marL="0" indent="0">
               <a:buNone/>
             </a:pPr>
             <a:r>
@@ -7779,7 +8087,7 @@
           <a:bodyPr wrap="square" lIns="0" tIns="0" rIns="0" bIns="0" rtlCol="0" anchor="ctr"/>
           <a:lstStyle/>
           <a:p>
-            <a:pPr indent="0" marL="0">
+            <a:pPr marL="0" indent="0">
               <a:buNone/>
             </a:pPr>
             <a:r>
@@ -7823,6 +8131,13 @@
             <a:prstDash val="dash"/>
           </a:ln>
         </p:spPr>
+        <p:txBody>
+          <a:bodyPr/>
+          <a:lstStyle/>
+          <a:p>
+            <a:endParaRPr lang="en-US"/>
+          </a:p>
+        </p:txBody>
       </p:sp>
       <p:sp>
         <p:nvSpPr>
@@ -7845,11 +8160,11 @@
           <a:bodyPr wrap="square" lIns="0" tIns="0" rIns="0" bIns="0" rtlCol="0" anchor="ctr"/>
           <a:lstStyle/>
           <a:p>
-            <a:pPr algn="ctr" indent="0" marL="0">
-              <a:buNone/>
-            </a:pPr>
-            <a:r>
-              <a:rPr lang="en-US" sz="1000" b="1" spc="300" kern="0" dirty="0">
+            <a:pPr marL="0" indent="0" algn="ctr">
+              <a:buNone/>
+            </a:pPr>
+            <a:r>
+              <a:rPr lang="en-US" sz="1000" b="1" kern="0" spc="300" dirty="0">
                 <a:solidFill>
                   <a:srgbClr val="F96167"/>
                 </a:solidFill>
@@ -7887,13 +8202,20 @@
             <a:prstDash val="solid"/>
           </a:ln>
           <a:effectLst>
-            <a:outerShdw sx="100000" sy="100000" kx="0" ky="0" algn="bl" rotWithShape="0" blurRad="101600" dist="25400" dir="5400000">
+            <a:outerShdw blurRad="101600" dist="25400" dir="5400000" algn="bl" rotWithShape="0">
               <a:srgbClr val="000000">
                 <a:alpha val="8000"/>
               </a:srgbClr>
             </a:outerShdw>
           </a:effectLst>
         </p:spPr>
+        <p:txBody>
+          <a:bodyPr/>
+          <a:lstStyle/>
+          <a:p>
+            <a:endParaRPr lang="en-US"/>
+          </a:p>
+        </p:txBody>
       </p:sp>
       <p:sp>
         <p:nvSpPr>
@@ -7916,7 +8238,7 @@
           <a:bodyPr wrap="square" lIns="0" tIns="0" rIns="0" bIns="0" rtlCol="0" anchor="ctr"/>
           <a:lstStyle/>
           <a:p>
-            <a:pPr algn="ctr" indent="0" marL="0">
+            <a:pPr marL="0" indent="0" algn="ctr">
               <a:buNone/>
             </a:pPr>
             <a:r>
@@ -7955,7 +8277,7 @@
           <a:bodyPr wrap="square" lIns="0" tIns="0" rIns="0" bIns="0" rtlCol="0" anchor="ctr"/>
           <a:lstStyle/>
           <a:p>
-            <a:pPr algn="ctr" indent="0" marL="0">
+            <a:pPr marL="0" indent="0" algn="ctr">
               <a:buNone/>
             </a:pPr>
             <a:r>
@@ -7994,7 +8316,7 @@
           <a:bodyPr wrap="square" lIns="0" tIns="0" rIns="0" bIns="0" rtlCol="0" anchor="ctr"/>
           <a:lstStyle/>
           <a:p>
-            <a:pPr algn="ctr" indent="0" marL="0">
+            <a:pPr marL="0" indent="0" algn="ctr">
               <a:buNone/>
             </a:pPr>
             <a:r>
@@ -8033,7 +8355,7 @@
           <a:bodyPr wrap="square" lIns="0" tIns="0" rIns="0" bIns="0" rtlCol="0" anchor="ctr"/>
           <a:lstStyle/>
           <a:p>
-            <a:pPr algn="ctr" indent="0" marL="0">
+            <a:pPr marL="0" indent="0" algn="ctr">
               <a:buNone/>
             </a:pPr>
             <a:r>
@@ -8075,13 +8397,20 @@
             <a:prstDash val="solid"/>
           </a:ln>
           <a:effectLst>
-            <a:outerShdw sx="100000" sy="100000" kx="0" ky="0" algn="bl" rotWithShape="0" blurRad="101600" dist="25400" dir="5400000">
+            <a:outerShdw blurRad="101600" dist="25400" dir="5400000" algn="bl" rotWithShape="0">
               <a:srgbClr val="000000">
                 <a:alpha val="8000"/>
               </a:srgbClr>
             </a:outerShdw>
           </a:effectLst>
         </p:spPr>
+        <p:txBody>
+          <a:bodyPr/>
+          <a:lstStyle/>
+          <a:p>
+            <a:endParaRPr lang="en-US"/>
+          </a:p>
+        </p:txBody>
       </p:sp>
       <p:sp>
         <p:nvSpPr>
@@ -8104,7 +8433,7 @@
           <a:bodyPr wrap="square" lIns="0" tIns="0" rIns="0" bIns="0" rtlCol="0" anchor="ctr"/>
           <a:lstStyle/>
           <a:p>
-            <a:pPr algn="ctr" indent="0" marL="0">
+            <a:pPr marL="0" indent="0" algn="ctr">
               <a:buNone/>
             </a:pPr>
             <a:r>
@@ -8143,7 +8472,7 @@
           <a:bodyPr wrap="square" lIns="0" tIns="0" rIns="0" bIns="0" rtlCol="0" anchor="ctr"/>
           <a:lstStyle/>
           <a:p>
-            <a:pPr algn="ctr" indent="0" marL="0">
+            <a:pPr marL="0" indent="0" algn="ctr">
               <a:buNone/>
             </a:pPr>
             <a:r>
@@ -8182,7 +8511,7 @@
           <a:bodyPr wrap="square" lIns="0" tIns="0" rIns="0" bIns="0" rtlCol="0" anchor="ctr"/>
           <a:lstStyle/>
           <a:p>
-            <a:pPr algn="ctr" indent="0" marL="0">
+            <a:pPr marL="0" indent="0" algn="ctr">
               <a:buNone/>
             </a:pPr>
             <a:r>
@@ -8221,7 +8550,7 @@
           <a:bodyPr wrap="square" lIns="0" tIns="0" rIns="0" bIns="0" rtlCol="0" anchor="ctr"/>
           <a:lstStyle/>
           <a:p>
-            <a:pPr algn="ctr" indent="0" marL="0">
+            <a:pPr marL="0" indent="0" algn="ctr">
               <a:buNone/>
             </a:pPr>
             <a:r>
@@ -8263,13 +8592,20 @@
             <a:prstDash val="solid"/>
           </a:ln>
           <a:effectLst>
-            <a:outerShdw sx="100000" sy="100000" kx="0" ky="0" algn="bl" rotWithShape="0" blurRad="101600" dist="25400" dir="5400000">
+            <a:outerShdw blurRad="101600" dist="25400" dir="5400000" algn="bl" rotWithShape="0">
               <a:srgbClr val="000000">
                 <a:alpha val="8000"/>
               </a:srgbClr>
             </a:outerShdw>
           </a:effectLst>
         </p:spPr>
+        <p:txBody>
+          <a:bodyPr/>
+          <a:lstStyle/>
+          <a:p>
+            <a:endParaRPr lang="en-US"/>
+          </a:p>
+        </p:txBody>
       </p:sp>
       <p:sp>
         <p:nvSpPr>
@@ -8292,7 +8628,7 @@
           <a:bodyPr wrap="square" lIns="0" tIns="0" rIns="0" bIns="0" rtlCol="0" anchor="ctr"/>
           <a:lstStyle/>
           <a:p>
-            <a:pPr algn="ctr" indent="0" marL="0">
+            <a:pPr marL="0" indent="0" algn="ctr">
               <a:buNone/>
             </a:pPr>
             <a:r>
@@ -8331,7 +8667,7 @@
           <a:bodyPr wrap="square" lIns="0" tIns="0" rIns="0" bIns="0" rtlCol="0" anchor="ctr"/>
           <a:lstStyle/>
           <a:p>
-            <a:pPr algn="ctr" indent="0" marL="0">
+            <a:pPr marL="0" indent="0" algn="ctr">
               <a:buNone/>
             </a:pPr>
             <a:r>
@@ -8370,7 +8706,7 @@
           <a:bodyPr wrap="square" lIns="0" tIns="0" rIns="0" bIns="0" rtlCol="0" anchor="ctr"/>
           <a:lstStyle/>
           <a:p>
-            <a:pPr algn="ctr" indent="0" marL="0">
+            <a:pPr marL="0" indent="0" algn="ctr">
               <a:buNone/>
             </a:pPr>
             <a:r>
@@ -8409,7 +8745,7 @@
           <a:bodyPr wrap="square" lIns="0" tIns="0" rIns="0" bIns="0" rtlCol="0" anchor="ctr"/>
           <a:lstStyle/>
           <a:p>
-            <a:pPr algn="ctr" indent="0" marL="0">
+            <a:pPr marL="0" indent="0" algn="ctr">
               <a:buNone/>
             </a:pPr>
             <a:r>
@@ -8451,13 +8787,20 @@
             <a:prstDash val="solid"/>
           </a:ln>
           <a:effectLst>
-            <a:outerShdw sx="100000" sy="100000" kx="0" ky="0" algn="bl" rotWithShape="0" blurRad="101600" dist="25400" dir="5400000">
+            <a:outerShdw blurRad="101600" dist="25400" dir="5400000" algn="bl" rotWithShape="0">
               <a:srgbClr val="000000">
                 <a:alpha val="8000"/>
               </a:srgbClr>
             </a:outerShdw>
           </a:effectLst>
         </p:spPr>
+        <p:txBody>
+          <a:bodyPr/>
+          <a:lstStyle/>
+          <a:p>
+            <a:endParaRPr lang="en-US"/>
+          </a:p>
+        </p:txBody>
       </p:sp>
       <p:sp>
         <p:nvSpPr>
@@ -8480,7 +8823,7 @@
           <a:bodyPr wrap="square" lIns="0" tIns="0" rIns="0" bIns="0" rtlCol="0" anchor="ctr"/>
           <a:lstStyle/>
           <a:p>
-            <a:pPr algn="ctr" indent="0" marL="0">
+            <a:pPr marL="0" indent="0" algn="ctr">
               <a:buNone/>
             </a:pPr>
             <a:r>
@@ -8519,7 +8862,7 @@
           <a:bodyPr wrap="square" lIns="0" tIns="0" rIns="0" bIns="0" rtlCol="0" anchor="ctr"/>
           <a:lstStyle/>
           <a:p>
-            <a:pPr algn="ctr" indent="0" marL="0">
+            <a:pPr marL="0" indent="0" algn="ctr">
               <a:buNone/>
             </a:pPr>
             <a:r>
@@ -8558,7 +8901,7 @@
           <a:bodyPr wrap="square" lIns="0" tIns="0" rIns="0" bIns="0" rtlCol="0" anchor="ctr"/>
           <a:lstStyle/>
           <a:p>
-            <a:pPr algn="ctr" indent="0" marL="0">
+            <a:pPr marL="0" indent="0" algn="ctr">
               <a:buNone/>
             </a:pPr>
             <a:r>
@@ -8597,7 +8940,7 @@
           <a:bodyPr wrap="square" lIns="0" tIns="0" rIns="0" bIns="0" rtlCol="0" anchor="ctr"/>
           <a:lstStyle/>
           <a:p>
-            <a:pPr algn="ctr" indent="0" marL="0">
+            <a:pPr marL="0" indent="0" algn="ctr">
               <a:buNone/>
             </a:pPr>
             <a:r>
@@ -8639,13 +8982,20 @@
             <a:prstDash val="solid"/>
           </a:ln>
           <a:effectLst>
-            <a:outerShdw sx="100000" sy="100000" kx="0" ky="0" algn="bl" rotWithShape="0" blurRad="101600" dist="25400" dir="5400000">
+            <a:outerShdw blurRad="101600" dist="25400" dir="5400000" algn="bl" rotWithShape="0">
               <a:srgbClr val="000000">
                 <a:alpha val="8000"/>
               </a:srgbClr>
             </a:outerShdw>
           </a:effectLst>
         </p:spPr>
+        <p:txBody>
+          <a:bodyPr/>
+          <a:lstStyle/>
+          <a:p>
+            <a:endParaRPr lang="en-US"/>
+          </a:p>
+        </p:txBody>
       </p:sp>
       <p:sp>
         <p:nvSpPr>
@@ -8668,7 +9018,7 @@
           <a:bodyPr wrap="square" lIns="0" tIns="0" rIns="0" bIns="0" rtlCol="0" anchor="ctr"/>
           <a:lstStyle/>
           <a:p>
-            <a:pPr algn="ctr" indent="0" marL="0">
+            <a:pPr marL="0" indent="0" algn="ctr">
               <a:buNone/>
             </a:pPr>
             <a:r>
@@ -8707,7 +9057,7 @@
           <a:bodyPr wrap="square" lIns="0" tIns="0" rIns="0" bIns="0" rtlCol="0" anchor="ctr"/>
           <a:lstStyle/>
           <a:p>
-            <a:pPr algn="ctr" indent="0" marL="0">
+            <a:pPr marL="0" indent="0" algn="ctr">
               <a:buNone/>
             </a:pPr>
             <a:r>
@@ -8746,7 +9096,7 @@
           <a:bodyPr wrap="square" lIns="0" tIns="0" rIns="0" bIns="0" rtlCol="0" anchor="ctr"/>
           <a:lstStyle/>
           <a:p>
-            <a:pPr algn="ctr" indent="0" marL="0">
+            <a:pPr marL="0" indent="0" algn="ctr">
               <a:buNone/>
             </a:pPr>
             <a:r>
@@ -8785,7 +9135,7 @@
           <a:bodyPr wrap="square" lIns="0" tIns="0" rIns="0" bIns="0" rtlCol="0" anchor="ctr"/>
           <a:lstStyle/>
           <a:p>
-            <a:pPr algn="ctr" indent="0" marL="0">
+            <a:pPr marL="0" indent="0" algn="ctr">
               <a:buNone/>
             </a:pPr>
             <a:r>
@@ -8827,13 +9177,20 @@
             <a:prstDash val="solid"/>
           </a:ln>
           <a:effectLst>
-            <a:outerShdw sx="100000" sy="100000" kx="0" ky="0" algn="bl" rotWithShape="0" blurRad="101600" dist="25400" dir="5400000">
+            <a:outerShdw blurRad="101600" dist="25400" dir="5400000" algn="bl" rotWithShape="0">
               <a:srgbClr val="000000">
                 <a:alpha val="8000"/>
               </a:srgbClr>
             </a:outerShdw>
           </a:effectLst>
         </p:spPr>
+        <p:txBody>
+          <a:bodyPr/>
+          <a:lstStyle/>
+          <a:p>
+            <a:endParaRPr lang="en-US"/>
+          </a:p>
+        </p:txBody>
       </p:sp>
       <p:sp>
         <p:nvSpPr>
@@ -8856,7 +9213,7 @@
           <a:bodyPr wrap="square" lIns="0" tIns="0" rIns="0" bIns="0" rtlCol="0" anchor="ctr"/>
           <a:lstStyle/>
           <a:p>
-            <a:pPr algn="ctr" indent="0" marL="0">
+            <a:pPr marL="0" indent="0" algn="ctr">
               <a:buNone/>
             </a:pPr>
             <a:r>
@@ -8895,7 +9252,7 @@
           <a:bodyPr wrap="square" lIns="0" tIns="0" rIns="0" bIns="0" rtlCol="0" anchor="ctr"/>
           <a:lstStyle/>
           <a:p>
-            <a:pPr algn="ctr" indent="0" marL="0">
+            <a:pPr marL="0" indent="0" algn="ctr">
               <a:buNone/>
             </a:pPr>
             <a:r>
@@ -8934,7 +9291,7 @@
           <a:bodyPr wrap="square" lIns="0" tIns="0" rIns="0" bIns="0" rtlCol="0" anchor="ctr"/>
           <a:lstStyle/>
           <a:p>
-            <a:pPr algn="ctr" indent="0" marL="0">
+            <a:pPr marL="0" indent="0" algn="ctr">
               <a:buNone/>
             </a:pPr>
             <a:r>
@@ -8973,7 +9330,7 @@
           <a:bodyPr wrap="square" lIns="0" tIns="0" rIns="0" bIns="0" rtlCol="0" anchor="ctr"/>
           <a:lstStyle/>
           <a:p>
-            <a:pPr algn="ctr" indent="0" marL="0">
+            <a:pPr marL="0" indent="0" algn="ctr">
               <a:buNone/>
             </a:pPr>
             <a:r>
@@ -9015,13 +9372,20 @@
             <a:prstDash val="solid"/>
           </a:ln>
           <a:effectLst>
-            <a:outerShdw sx="100000" sy="100000" kx="0" ky="0" algn="bl" rotWithShape="0" blurRad="101600" dist="25400" dir="5400000">
+            <a:outerShdw blurRad="101600" dist="25400" dir="5400000" algn="bl" rotWithShape="0">
               <a:srgbClr val="000000">
                 <a:alpha val="8000"/>
               </a:srgbClr>
             </a:outerShdw>
           </a:effectLst>
         </p:spPr>
+        <p:txBody>
+          <a:bodyPr/>
+          <a:lstStyle/>
+          <a:p>
+            <a:endParaRPr lang="en-US"/>
+          </a:p>
+        </p:txBody>
       </p:sp>
       <p:sp>
         <p:nvSpPr>
@@ -9044,7 +9408,7 @@
           <a:bodyPr wrap="square" lIns="0" tIns="0" rIns="0" bIns="0" rtlCol="0" anchor="ctr"/>
           <a:lstStyle/>
           <a:p>
-            <a:pPr algn="ctr" indent="0" marL="0">
+            <a:pPr marL="0" indent="0" algn="ctr">
               <a:buNone/>
             </a:pPr>
             <a:r>
@@ -9083,7 +9447,7 @@
           <a:bodyPr wrap="square" lIns="0" tIns="0" rIns="0" bIns="0" rtlCol="0" anchor="ctr"/>
           <a:lstStyle/>
           <a:p>
-            <a:pPr algn="ctr" indent="0" marL="0">
+            <a:pPr marL="0" indent="0" algn="ctr">
               <a:buNone/>
             </a:pPr>
             <a:r>
@@ -9122,7 +9486,7 @@
           <a:bodyPr wrap="square" lIns="0" tIns="0" rIns="0" bIns="0" rtlCol="0" anchor="ctr"/>
           <a:lstStyle/>
           <a:p>
-            <a:pPr algn="ctr" indent="0" marL="0">
+            <a:pPr marL="0" indent="0" algn="ctr">
               <a:buNone/>
             </a:pPr>
             <a:r>
@@ -9161,7 +9525,7 @@
           <a:bodyPr wrap="square" lIns="0" tIns="0" rIns="0" bIns="0" rtlCol="0" anchor="ctr"/>
           <a:lstStyle/>
           <a:p>
-            <a:pPr algn="ctr" indent="0" marL="0">
+            <a:pPr marL="0" indent="0" algn="ctr">
               <a:buNone/>
             </a:pPr>
             <a:r>
@@ -9203,13 +9567,20 @@
             <a:prstDash val="solid"/>
           </a:ln>
           <a:effectLst>
-            <a:outerShdw sx="100000" sy="100000" kx="0" ky="0" algn="bl" rotWithShape="0" blurRad="101600" dist="25400" dir="5400000">
+            <a:outerShdw blurRad="101600" dist="25400" dir="5400000" algn="bl" rotWithShape="0">
               <a:srgbClr val="000000">
                 <a:alpha val="8000"/>
               </a:srgbClr>
             </a:outerShdw>
           </a:effectLst>
         </p:spPr>
+        <p:txBody>
+          <a:bodyPr/>
+          <a:lstStyle/>
+          <a:p>
+            <a:endParaRPr lang="en-US"/>
+          </a:p>
+        </p:txBody>
       </p:sp>
       <p:sp>
         <p:nvSpPr>
@@ -9232,7 +9603,7 @@
           <a:bodyPr wrap="square" lIns="0" tIns="0" rIns="0" bIns="0" rtlCol="0" anchor="ctr"/>
           <a:lstStyle/>
           <a:p>
-            <a:pPr algn="ctr" indent="0" marL="0">
+            <a:pPr marL="0" indent="0" algn="ctr">
               <a:buNone/>
             </a:pPr>
             <a:r>
@@ -9271,7 +9642,7 @@
           <a:bodyPr wrap="square" lIns="0" tIns="0" rIns="0" bIns="0" rtlCol="0" anchor="ctr"/>
           <a:lstStyle/>
           <a:p>
-            <a:pPr algn="ctr" indent="0" marL="0">
+            <a:pPr marL="0" indent="0" algn="ctr">
               <a:buNone/>
             </a:pPr>
             <a:r>
@@ -9310,7 +9681,7 @@
           <a:bodyPr wrap="square" lIns="0" tIns="0" rIns="0" bIns="0" rtlCol="0" anchor="ctr"/>
           <a:lstStyle/>
           <a:p>
-            <a:pPr algn="ctr" indent="0" marL="0">
+            <a:pPr marL="0" indent="0" algn="ctr">
               <a:buNone/>
             </a:pPr>
             <a:r>
@@ -9349,7 +9720,7 @@
           <a:bodyPr wrap="square" lIns="0" tIns="0" rIns="0" bIns="0" rtlCol="0" anchor="ctr"/>
           <a:lstStyle/>
           <a:p>
-            <a:pPr algn="ctr" indent="0" marL="0">
+            <a:pPr marL="0" indent="0" algn="ctr">
               <a:buNone/>
             </a:pPr>
             <a:r>
@@ -9391,13 +9762,20 @@
             <a:prstDash val="solid"/>
           </a:ln>
           <a:effectLst>
-            <a:outerShdw sx="100000" sy="100000" kx="0" ky="0" algn="bl" rotWithShape="0" blurRad="101600" dist="25400" dir="5400000">
+            <a:outerShdw blurRad="101600" dist="25400" dir="5400000" algn="bl" rotWithShape="0">
               <a:srgbClr val="000000">
                 <a:alpha val="8000"/>
               </a:srgbClr>
             </a:outerShdw>
           </a:effectLst>
         </p:spPr>
+        <p:txBody>
+          <a:bodyPr/>
+          <a:lstStyle/>
+          <a:p>
+            <a:endParaRPr lang="en-US"/>
+          </a:p>
+        </p:txBody>
       </p:sp>
       <p:sp>
         <p:nvSpPr>
@@ -9423,6 +9801,13 @@
             <a:prstDash val="solid"/>
           </a:ln>
         </p:spPr>
+        <p:txBody>
+          <a:bodyPr/>
+          <a:lstStyle/>
+          <a:p>
+            <a:endParaRPr lang="en-US"/>
+          </a:p>
+        </p:txBody>
       </p:sp>
       <p:sp>
         <p:nvSpPr>
@@ -9445,11 +9830,11 @@
           <a:bodyPr wrap="square" lIns="0" tIns="0" rIns="0" bIns="0" rtlCol="0" anchor="ctr"/>
           <a:lstStyle/>
           <a:p>
-            <a:pPr indent="0" marL="0">
-              <a:buNone/>
-            </a:pPr>
-            <a:r>
-              <a:rPr lang="en-US" sz="800" b="1" spc="300" kern="0" dirty="0">
+            <a:pPr marL="0" indent="0">
+              <a:buNone/>
+            </a:pPr>
+            <a:r>
+              <a:rPr lang="en-US" sz="800" b="1" kern="0" spc="300" dirty="0">
                 <a:solidFill>
                   <a:srgbClr val="028090"/>
                 </a:solidFill>
@@ -9484,7 +9869,7 @@
           <a:bodyPr wrap="square" lIns="0" tIns="0" rIns="0" bIns="0" rtlCol="0" anchor="ctr"/>
           <a:lstStyle/>
           <a:p>
-            <a:pPr indent="0" marL="0">
+            <a:pPr marL="0" indent="0">
               <a:buNone/>
             </a:pPr>
             <a:r>
@@ -9523,7 +9908,7 @@
           <a:bodyPr wrap="square" lIns="0" tIns="0" rIns="0" bIns="0" rtlCol="0" anchor="ctr"/>
           <a:lstStyle/>
           <a:p>
-            <a:pPr indent="0" marL="0">
+            <a:pPr marL="0" indent="0">
               <a:buNone/>
             </a:pPr>
             <a:r>
@@ -9563,6 +9948,13 @@
             <a:prstDash val="solid"/>
           </a:ln>
         </p:spPr>
+        <p:txBody>
+          <a:bodyPr/>
+          <a:lstStyle/>
+          <a:p>
+            <a:endParaRPr lang="en-US"/>
+          </a:p>
+        </p:txBody>
       </p:sp>
       <p:sp>
         <p:nvSpPr>
@@ -9585,7 +9977,7 @@
           <a:bodyPr wrap="square" lIns="0" tIns="0" rIns="0" bIns="0" rtlCol="0" anchor="ctr"/>
           <a:lstStyle/>
           <a:p>
-            <a:pPr indent="0" marL="0">
+            <a:pPr marL="0" indent="0">
               <a:buNone/>
             </a:pPr>
             <a:r>
@@ -9627,13 +10019,20 @@
             <a:prstDash val="solid"/>
           </a:ln>
           <a:effectLst>
-            <a:outerShdw sx="100000" sy="100000" kx="0" ky="0" algn="bl" rotWithShape="0" blurRad="101600" dist="25400" dir="5400000">
+            <a:outerShdw blurRad="101600" dist="25400" dir="5400000" algn="bl" rotWithShape="0">
               <a:srgbClr val="000000">
                 <a:alpha val="8000"/>
               </a:srgbClr>
             </a:outerShdw>
           </a:effectLst>
         </p:spPr>
+        <p:txBody>
+          <a:bodyPr/>
+          <a:lstStyle/>
+          <a:p>
+            <a:endParaRPr lang="en-US"/>
+          </a:p>
+        </p:txBody>
       </p:sp>
       <p:sp>
         <p:nvSpPr>
@@ -9659,6 +10058,13 @@
             <a:prstDash val="solid"/>
           </a:ln>
         </p:spPr>
+        <p:txBody>
+          <a:bodyPr/>
+          <a:lstStyle/>
+          <a:p>
+            <a:endParaRPr lang="en-US"/>
+          </a:p>
+        </p:txBody>
       </p:sp>
       <p:sp>
         <p:nvSpPr>
@@ -9681,7 +10087,7 @@
           <a:bodyPr wrap="square" lIns="0" tIns="0" rIns="0" bIns="0" rtlCol="0" anchor="ctr"/>
           <a:lstStyle/>
           <a:p>
-            <a:pPr indent="0" marL="0">
+            <a:pPr marL="0" indent="0">
               <a:buNone/>
             </a:pPr>
             <a:r>
@@ -9720,7 +10126,7 @@
           <a:bodyPr wrap="square" lIns="0" tIns="0" rIns="0" bIns="0" rtlCol="0" anchor="ctr"/>
           <a:lstStyle/>
           <a:p>
-            <a:pPr indent="0" marL="0">
+            <a:pPr marL="0" indent="0">
               <a:buNone/>
             </a:pPr>
             <a:r>
@@ -9762,13 +10168,20 @@
             <a:prstDash val="solid"/>
           </a:ln>
           <a:effectLst>
-            <a:outerShdw sx="100000" sy="100000" kx="0" ky="0" algn="bl" rotWithShape="0" blurRad="101600" dist="25400" dir="5400000">
+            <a:outerShdw blurRad="101600" dist="25400" dir="5400000" algn="bl" rotWithShape="0">
               <a:srgbClr val="000000">
                 <a:alpha val="8000"/>
               </a:srgbClr>
             </a:outerShdw>
           </a:effectLst>
         </p:spPr>
+        <p:txBody>
+          <a:bodyPr/>
+          <a:lstStyle/>
+          <a:p>
+            <a:endParaRPr lang="en-US"/>
+          </a:p>
+        </p:txBody>
       </p:sp>
       <p:sp>
         <p:nvSpPr>
@@ -9794,6 +10207,13 @@
             <a:prstDash val="solid"/>
           </a:ln>
         </p:spPr>
+        <p:txBody>
+          <a:bodyPr/>
+          <a:lstStyle/>
+          <a:p>
+            <a:endParaRPr lang="en-US"/>
+          </a:p>
+        </p:txBody>
       </p:sp>
       <p:sp>
         <p:nvSpPr>
@@ -9816,7 +10236,7 @@
           <a:bodyPr wrap="square" lIns="0" tIns="0" rIns="0" bIns="0" rtlCol="0" anchor="ctr"/>
           <a:lstStyle/>
           <a:p>
-            <a:pPr indent="0" marL="0">
+            <a:pPr marL="0" indent="0">
               <a:buNone/>
             </a:pPr>
             <a:r>
@@ -9855,7 +10275,7 @@
           <a:bodyPr wrap="square" lIns="0" tIns="0" rIns="0" bIns="0" rtlCol="0" anchor="ctr"/>
           <a:lstStyle/>
           <a:p>
-            <a:pPr indent="0" marL="0">
+            <a:pPr marL="0" indent="0">
               <a:buNone/>
             </a:pPr>
             <a:r>
@@ -9897,13 +10317,20 @@
             <a:prstDash val="solid"/>
           </a:ln>
           <a:effectLst>
-            <a:outerShdw sx="100000" sy="100000" kx="0" ky="0" algn="bl" rotWithShape="0" blurRad="101600" dist="25400" dir="5400000">
+            <a:outerShdw blurRad="101600" dist="25400" dir="5400000" algn="bl" rotWithShape="0">
               <a:srgbClr val="000000">
                 <a:alpha val="8000"/>
               </a:srgbClr>
             </a:outerShdw>
           </a:effectLst>
         </p:spPr>
+        <p:txBody>
+          <a:bodyPr/>
+          <a:lstStyle/>
+          <a:p>
+            <a:endParaRPr lang="en-US"/>
+          </a:p>
+        </p:txBody>
       </p:sp>
       <p:sp>
         <p:nvSpPr>
@@ -9929,6 +10356,13 @@
             <a:prstDash val="solid"/>
           </a:ln>
         </p:spPr>
+        <p:txBody>
+          <a:bodyPr/>
+          <a:lstStyle/>
+          <a:p>
+            <a:endParaRPr lang="en-US"/>
+          </a:p>
+        </p:txBody>
       </p:sp>
       <p:sp>
         <p:nvSpPr>
@@ -9951,7 +10385,7 @@
           <a:bodyPr wrap="square" lIns="0" tIns="0" rIns="0" bIns="0" rtlCol="0" anchor="ctr"/>
           <a:lstStyle/>
           <a:p>
-            <a:pPr indent="0" marL="0">
+            <a:pPr marL="0" indent="0">
               <a:buNone/>
             </a:pPr>
             <a:r>
@@ -9990,7 +10424,7 @@
           <a:bodyPr wrap="square" lIns="0" tIns="0" rIns="0" bIns="0" rtlCol="0" anchor="ctr"/>
           <a:lstStyle/>
           <a:p>
-            <a:pPr indent="0" marL="0">
+            <a:pPr marL="0" indent="0">
               <a:buNone/>
             </a:pPr>
             <a:r>
@@ -10030,6 +10464,13 @@
             <a:prstDash val="solid"/>
           </a:ln>
         </p:spPr>
+        <p:txBody>
+          <a:bodyPr/>
+          <a:lstStyle/>
+          <a:p>
+            <a:endParaRPr lang="en-US"/>
+          </a:p>
+        </p:txBody>
       </p:sp>
       <p:sp>
         <p:nvSpPr>
@@ -10052,7 +10493,7 @@
           <a:bodyPr wrap="square" lIns="0" tIns="0" rIns="0" bIns="0" rtlCol="0" anchor="ctr"/>
           <a:lstStyle/>
           <a:p>
-            <a:pPr indent="0" marL="0">
+            <a:pPr marL="0" indent="0">
               <a:buNone/>
             </a:pPr>
             <a:r>
@@ -10091,7 +10532,7 @@
           <a:bodyPr wrap="square" lIns="0" tIns="0" rIns="0" bIns="0" rtlCol="0" anchor="ctr"/>
           <a:lstStyle/>
           <a:p>
-            <a:pPr algn="r" indent="0" marL="0">
+            <a:pPr marL="0" indent="0" algn="r">
               <a:buNone/>
             </a:pPr>
             <a:r>
@@ -10125,6 +10566,7 @@
         <a:solidFill>
           <a:srgbClr val="F5F7FB"/>
         </a:solidFill>
+        <a:effectLst/>
       </p:bgPr>
     </p:bg>
     <p:spTree>
@@ -10165,6 +10607,13 @@
             <a:prstDash val="solid"/>
           </a:ln>
         </p:spPr>
+        <p:txBody>
+          <a:bodyPr/>
+          <a:lstStyle/>
+          <a:p>
+            <a:endParaRPr lang="en-US"/>
+          </a:p>
+        </p:txBody>
       </p:sp>
       <p:sp>
         <p:nvSpPr>
@@ -10187,7 +10636,7 @@
           <a:bodyPr wrap="square" lIns="0" tIns="0" rIns="0" bIns="0" rtlCol="0" anchor="ctr"/>
           <a:lstStyle/>
           <a:p>
-            <a:pPr algn="r" indent="0" marL="0">
+            <a:pPr marL="0" indent="0" algn="r">
               <a:buNone/>
             </a:pPr>
             <a:r>
@@ -10226,7 +10675,7 @@
           <a:bodyPr wrap="square" lIns="0" tIns="0" rIns="0" bIns="0" rtlCol="0" anchor="ctr"/>
           <a:lstStyle/>
           <a:p>
-            <a:pPr indent="0" marL="0">
+            <a:pPr marL="0" indent="0">
               <a:buNone/>
             </a:pPr>
             <a:r>
@@ -10265,7 +10714,7 @@
           <a:bodyPr wrap="square" lIns="0" tIns="0" rIns="0" bIns="0" rtlCol="0" anchor="ctr"/>
           <a:lstStyle/>
           <a:p>
-            <a:pPr indent="0" marL="0">
+            <a:pPr marL="0" indent="0">
               <a:buNone/>
             </a:pPr>
             <a:r>
@@ -10309,13 +10758,20 @@
             <a:prstDash val="solid"/>
           </a:ln>
           <a:effectLst>
-            <a:outerShdw sx="100000" sy="100000" kx="0" ky="0" algn="bl" rotWithShape="0" blurRad="101600" dist="25400" dir="5400000">
+            <a:outerShdw blurRad="101600" dist="25400" dir="5400000" algn="bl" rotWithShape="0">
               <a:srgbClr val="000000">
                 <a:alpha val="8000"/>
               </a:srgbClr>
             </a:outerShdw>
           </a:effectLst>
         </p:spPr>
+        <p:txBody>
+          <a:bodyPr/>
+          <a:lstStyle/>
+          <a:p>
+            <a:endParaRPr lang="en-US"/>
+          </a:p>
+        </p:txBody>
       </p:sp>
       <p:sp>
         <p:nvSpPr>
@@ -10338,11 +10794,11 @@
           <a:bodyPr wrap="square" lIns="0" tIns="0" rIns="0" bIns="0" rtlCol="0" anchor="ctr"/>
           <a:lstStyle/>
           <a:p>
-            <a:pPr algn="ctr" indent="0" marL="0">
-              <a:buNone/>
-            </a:pPr>
-            <a:r>
-              <a:rPr lang="en-US" sz="800" b="1" spc="300" kern="0" dirty="0">
+            <a:pPr marL="0" indent="0" algn="ctr">
+              <a:buNone/>
+            </a:pPr>
+            <a:r>
+              <a:rPr lang="en-US" sz="800" b="1" kern="0" spc="300" dirty="0">
                 <a:solidFill>
                   <a:srgbClr val="64748B"/>
                 </a:solidFill>
@@ -10377,7 +10833,7 @@
           <a:bodyPr wrap="square" lIns="0" tIns="0" rIns="0" bIns="0" rtlCol="0" anchor="ctr"/>
           <a:lstStyle/>
           <a:p>
-            <a:pPr algn="ctr" indent="0" marL="0">
+            <a:pPr marL="0" indent="0" algn="ctr">
               <a:buNone/>
             </a:pPr>
             <a:r>
@@ -10416,7 +10872,7 @@
           <a:bodyPr wrap="square" lIns="0" tIns="0" rIns="0" bIns="0" rtlCol="0" anchor="ctr"/>
           <a:lstStyle/>
           <a:p>
-            <a:pPr algn="ctr" indent="0" marL="0">
+            <a:pPr marL="0" indent="0" algn="ctr">
               <a:buNone/>
             </a:pPr>
             <a:r>
@@ -10457,6 +10913,13 @@
             <a:tailEnd type="triangle"/>
           </a:ln>
         </p:spPr>
+        <p:txBody>
+          <a:bodyPr/>
+          <a:lstStyle/>
+          <a:p>
+            <a:endParaRPr lang="en-US"/>
+          </a:p>
+        </p:txBody>
       </p:sp>
       <p:sp>
         <p:nvSpPr>
@@ -10482,13 +10945,20 @@
             <a:prstDash val="solid"/>
           </a:ln>
           <a:effectLst>
-            <a:outerShdw sx="100000" sy="100000" kx="0" ky="0" algn="bl" rotWithShape="0" blurRad="101600" dist="25400" dir="5400000">
+            <a:outerShdw blurRad="101600" dist="25400" dir="5400000" algn="bl" rotWithShape="0">
               <a:srgbClr val="000000">
                 <a:alpha val="8000"/>
               </a:srgbClr>
             </a:outerShdw>
           </a:effectLst>
         </p:spPr>
+        <p:txBody>
+          <a:bodyPr/>
+          <a:lstStyle/>
+          <a:p>
+            <a:endParaRPr lang="en-US"/>
+          </a:p>
+        </p:txBody>
       </p:sp>
       <p:sp>
         <p:nvSpPr>
@@ -10511,7 +10981,7 @@
           <a:bodyPr wrap="square" lIns="0" tIns="0" rIns="0" bIns="0" rtlCol="0" anchor="ctr"/>
           <a:lstStyle/>
           <a:p>
-            <a:pPr algn="ctr" indent="0" marL="0">
+            <a:pPr marL="0" indent="0" algn="ctr">
               <a:buNone/>
             </a:pPr>
             <a:r>
@@ -10550,7 +11020,7 @@
           <a:bodyPr wrap="square" lIns="0" tIns="0" rIns="0" bIns="0" rtlCol="0" anchor="ctr"/>
           <a:lstStyle/>
           <a:p>
-            <a:pPr algn="ctr" indent="0" marL="0">
+            <a:pPr marL="0" indent="0" algn="ctr">
               <a:buNone/>
             </a:pPr>
             <a:r>
@@ -10589,7 +11059,7 @@
           <a:bodyPr wrap="square" lIns="0" tIns="0" rIns="0" bIns="0" rtlCol="0" anchor="ctr"/>
           <a:lstStyle/>
           <a:p>
-            <a:pPr algn="ctr" indent="0" marL="0">
+            <a:pPr marL="0" indent="0" algn="ctr">
               <a:buNone/>
             </a:pPr>
             <a:r>
@@ -10630,6 +11100,13 @@
             <a:tailEnd type="triangle"/>
           </a:ln>
         </p:spPr>
+        <p:txBody>
+          <a:bodyPr/>
+          <a:lstStyle/>
+          <a:p>
+            <a:endParaRPr lang="en-US"/>
+          </a:p>
+        </p:txBody>
       </p:sp>
       <p:sp>
         <p:nvSpPr>
@@ -10657,6 +11134,13 @@
             <a:prstDash val="dash"/>
           </a:ln>
         </p:spPr>
+        <p:txBody>
+          <a:bodyPr/>
+          <a:lstStyle/>
+          <a:p>
+            <a:endParaRPr lang="en-US"/>
+          </a:p>
+        </p:txBody>
       </p:sp>
       <p:sp>
         <p:nvSpPr>
@@ -10679,11 +11163,11 @@
           <a:bodyPr wrap="square" lIns="0" tIns="0" rIns="0" bIns="0" rtlCol="0" anchor="ctr"/>
           <a:lstStyle/>
           <a:p>
-            <a:pPr algn="ctr" indent="0" marL="0">
-              <a:buNone/>
-            </a:pPr>
-            <a:r>
-              <a:rPr lang="en-US" sz="1000" b="1" spc="300" kern="0" dirty="0">
+            <a:pPr marL="0" indent="0" algn="ctr">
+              <a:buNone/>
+            </a:pPr>
+            <a:r>
+              <a:rPr lang="en-US" sz="1000" b="1" kern="0" spc="300" dirty="0">
                 <a:solidFill>
                   <a:srgbClr val="1E2761"/>
                 </a:solidFill>
@@ -10721,13 +11205,20 @@
             <a:prstDash val="solid"/>
           </a:ln>
           <a:effectLst>
-            <a:outerShdw sx="100000" sy="100000" kx="0" ky="0" algn="bl" rotWithShape="0" blurRad="101600" dist="25400" dir="5400000">
+            <a:outerShdw blurRad="101600" dist="25400" dir="5400000" algn="bl" rotWithShape="0">
               <a:srgbClr val="000000">
                 <a:alpha val="8000"/>
               </a:srgbClr>
             </a:outerShdw>
           </a:effectLst>
         </p:spPr>
+        <p:txBody>
+          <a:bodyPr/>
+          <a:lstStyle/>
+          <a:p>
+            <a:endParaRPr lang="en-US"/>
+          </a:p>
+        </p:txBody>
       </p:sp>
       <p:sp>
         <p:nvSpPr>
@@ -10753,6 +11244,13 @@
             <a:prstDash val="solid"/>
           </a:ln>
         </p:spPr>
+        <p:txBody>
+          <a:bodyPr/>
+          <a:lstStyle/>
+          <a:p>
+            <a:endParaRPr lang="en-US"/>
+          </a:p>
+        </p:txBody>
       </p:sp>
       <p:sp>
         <p:nvSpPr>
@@ -10775,11 +11273,11 @@
           <a:bodyPr wrap="square" lIns="0" tIns="0" rIns="0" bIns="0" rtlCol="0" anchor="ctr"/>
           <a:lstStyle/>
           <a:p>
-            <a:pPr indent="0" marL="0">
-              <a:buNone/>
-            </a:pPr>
-            <a:r>
-              <a:rPr lang="en-US" sz="800" b="1" spc="200" kern="0" dirty="0">
+            <a:pPr marL="0" indent="0">
+              <a:buNone/>
+            </a:pPr>
+            <a:r>
+              <a:rPr lang="en-US" sz="800" b="1" kern="0" spc="200" dirty="0">
                 <a:solidFill>
                   <a:srgbClr val="1E2761"/>
                 </a:solidFill>
@@ -10814,7 +11312,7 @@
           <a:bodyPr wrap="square" lIns="0" tIns="0" rIns="0" bIns="0" rtlCol="0" anchor="ctr"/>
           <a:lstStyle/>
           <a:p>
-            <a:pPr indent="0" marL="0">
+            <a:pPr marL="0" indent="0">
               <a:buNone/>
             </a:pPr>
             <a:r>
@@ -10853,7 +11351,7 @@
           <a:bodyPr wrap="square" lIns="0" tIns="0" rIns="0" bIns="0" rtlCol="0" anchor="ctr"/>
           <a:lstStyle/>
           <a:p>
-            <a:pPr indent="0" marL="0">
+            <a:pPr marL="0" indent="0">
               <a:buNone/>
             </a:pPr>
             <a:r>
@@ -11001,13 +11499,20 @@
             <a:prstDash val="solid"/>
           </a:ln>
           <a:effectLst>
-            <a:outerShdw sx="100000" sy="100000" kx="0" ky="0" algn="bl" rotWithShape="0" blurRad="101600" dist="25400" dir="5400000">
+            <a:outerShdw blurRad="101600" dist="25400" dir="5400000" algn="bl" rotWithShape="0">
               <a:srgbClr val="000000">
                 <a:alpha val="8000"/>
               </a:srgbClr>
             </a:outerShdw>
           </a:effectLst>
         </p:spPr>
+        <p:txBody>
+          <a:bodyPr/>
+          <a:lstStyle/>
+          <a:p>
+            <a:endParaRPr lang="en-US"/>
+          </a:p>
+        </p:txBody>
       </p:sp>
       <p:sp>
         <p:nvSpPr>
@@ -11033,6 +11538,13 @@
             <a:prstDash val="solid"/>
           </a:ln>
         </p:spPr>
+        <p:txBody>
+          <a:bodyPr/>
+          <a:lstStyle/>
+          <a:p>
+            <a:endParaRPr lang="en-US"/>
+          </a:p>
+        </p:txBody>
       </p:sp>
       <p:sp>
         <p:nvSpPr>
@@ -11055,11 +11567,11 @@
           <a:bodyPr wrap="square" lIns="0" tIns="0" rIns="0" bIns="0" rtlCol="0" anchor="ctr"/>
           <a:lstStyle/>
           <a:p>
-            <a:pPr indent="0" marL="0">
-              <a:buNone/>
-            </a:pPr>
-            <a:r>
-              <a:rPr lang="en-US" sz="800" b="1" spc="200" kern="0" dirty="0">
+            <a:pPr marL="0" indent="0">
+              <a:buNone/>
+            </a:pPr>
+            <a:r>
+              <a:rPr lang="en-US" sz="800" b="1" kern="0" spc="200" dirty="0">
                 <a:solidFill>
                   <a:srgbClr val="F96167"/>
                 </a:solidFill>
@@ -11094,7 +11606,7 @@
           <a:bodyPr wrap="square" lIns="0" tIns="0" rIns="0" bIns="0" rtlCol="0" anchor="ctr"/>
           <a:lstStyle/>
           <a:p>
-            <a:pPr indent="0" marL="0">
+            <a:pPr marL="0" indent="0">
               <a:buNone/>
             </a:pPr>
             <a:r>
@@ -11133,7 +11645,7 @@
           <a:bodyPr wrap="square" lIns="0" tIns="0" rIns="0" bIns="0" rtlCol="0" anchor="ctr"/>
           <a:lstStyle/>
           <a:p>
-            <a:pPr indent="0" marL="0">
+            <a:pPr marL="0" indent="0">
               <a:buNone/>
             </a:pPr>
             <a:r>
@@ -11281,13 +11793,20 @@
             <a:prstDash val="solid"/>
           </a:ln>
           <a:effectLst>
-            <a:outerShdw sx="100000" sy="100000" kx="0" ky="0" algn="bl" rotWithShape="0" blurRad="101600" dist="25400" dir="5400000">
+            <a:outerShdw blurRad="101600" dist="25400" dir="5400000" algn="bl" rotWithShape="0">
               <a:srgbClr val="000000">
                 <a:alpha val="8000"/>
               </a:srgbClr>
             </a:outerShdw>
           </a:effectLst>
         </p:spPr>
+        <p:txBody>
+          <a:bodyPr/>
+          <a:lstStyle/>
+          <a:p>
+            <a:endParaRPr lang="en-US"/>
+          </a:p>
+        </p:txBody>
       </p:sp>
       <p:sp>
         <p:nvSpPr>
@@ -11313,6 +11832,13 @@
             <a:prstDash val="solid"/>
           </a:ln>
         </p:spPr>
+        <p:txBody>
+          <a:bodyPr/>
+          <a:lstStyle/>
+          <a:p>
+            <a:endParaRPr lang="en-US"/>
+          </a:p>
+        </p:txBody>
       </p:sp>
       <p:sp>
         <p:nvSpPr>
@@ -11335,11 +11861,11 @@
           <a:bodyPr wrap="square" lIns="0" tIns="0" rIns="0" bIns="0" rtlCol="0" anchor="ctr"/>
           <a:lstStyle/>
           <a:p>
-            <a:pPr indent="0" marL="0">
-              <a:buNone/>
-            </a:pPr>
-            <a:r>
-              <a:rPr lang="en-US" sz="800" b="1" spc="200" kern="0" dirty="0">
+            <a:pPr marL="0" indent="0">
+              <a:buNone/>
+            </a:pPr>
+            <a:r>
+              <a:rPr lang="en-US" sz="800" b="1" kern="0" spc="200" dirty="0">
                 <a:solidFill>
                   <a:srgbClr val="1E2761"/>
                 </a:solidFill>
@@ -11374,7 +11900,7 @@
           <a:bodyPr wrap="square" lIns="0" tIns="0" rIns="0" bIns="0" rtlCol="0" anchor="ctr"/>
           <a:lstStyle/>
           <a:p>
-            <a:pPr indent="0" marL="0">
+            <a:pPr marL="0" indent="0">
               <a:buNone/>
             </a:pPr>
             <a:r>
@@ -11413,7 +11939,7 @@
           <a:bodyPr wrap="square" lIns="0" tIns="0" rIns="0" bIns="0" rtlCol="0" anchor="ctr"/>
           <a:lstStyle/>
           <a:p>
-            <a:pPr indent="0" marL="0">
+            <a:pPr marL="0" indent="0">
               <a:buNone/>
             </a:pPr>
             <a:r>
@@ -11540,13 +12066,20 @@
             <a:prstDash val="solid"/>
           </a:ln>
           <a:effectLst>
-            <a:outerShdw sx="100000" sy="100000" kx="0" ky="0" algn="bl" rotWithShape="0" blurRad="101600" dist="25400" dir="5400000">
+            <a:outerShdw blurRad="101600" dist="25400" dir="5400000" algn="bl" rotWithShape="0">
               <a:srgbClr val="000000">
                 <a:alpha val="8000"/>
               </a:srgbClr>
             </a:outerShdw>
           </a:effectLst>
         </p:spPr>
+        <p:txBody>
+          <a:bodyPr/>
+          <a:lstStyle/>
+          <a:p>
+            <a:endParaRPr lang="en-US"/>
+          </a:p>
+        </p:txBody>
       </p:sp>
       <p:sp>
         <p:nvSpPr>
@@ -11572,6 +12105,13 @@
             <a:prstDash val="solid"/>
           </a:ln>
         </p:spPr>
+        <p:txBody>
+          <a:bodyPr/>
+          <a:lstStyle/>
+          <a:p>
+            <a:endParaRPr lang="en-US"/>
+          </a:p>
+        </p:txBody>
       </p:sp>
       <p:sp>
         <p:nvSpPr>
@@ -11594,11 +12134,11 @@
           <a:bodyPr wrap="square" lIns="0" tIns="0" rIns="0" bIns="0" rtlCol="0" anchor="ctr"/>
           <a:lstStyle/>
           <a:p>
-            <a:pPr indent="0" marL="0">
-              <a:buNone/>
-            </a:pPr>
-            <a:r>
-              <a:rPr lang="en-US" sz="800" b="1" spc="200" kern="0" dirty="0">
+            <a:pPr marL="0" indent="0">
+              <a:buNone/>
+            </a:pPr>
+            <a:r>
+              <a:rPr lang="en-US" sz="800" b="1" kern="0" spc="200" dirty="0">
                 <a:solidFill>
                   <a:srgbClr val="1E2761"/>
                 </a:solidFill>
@@ -11633,7 +12173,7 @@
           <a:bodyPr wrap="square" lIns="0" tIns="0" rIns="0" bIns="0" rtlCol="0" anchor="ctr"/>
           <a:lstStyle/>
           <a:p>
-            <a:pPr indent="0" marL="0">
+            <a:pPr marL="0" indent="0">
               <a:buNone/>
             </a:pPr>
             <a:r>
@@ -11672,7 +12212,7 @@
           <a:bodyPr wrap="square" lIns="0" tIns="0" rIns="0" bIns="0" rtlCol="0" anchor="ctr"/>
           <a:lstStyle/>
           <a:p>
-            <a:pPr indent="0" marL="0">
+            <a:pPr marL="0" indent="0">
               <a:buNone/>
             </a:pPr>
             <a:r>
@@ -11799,13 +12339,20 @@
             <a:prstDash val="solid"/>
           </a:ln>
           <a:effectLst>
-            <a:outerShdw sx="100000" sy="100000" kx="0" ky="0" algn="bl" rotWithShape="0" blurRad="101600" dist="25400" dir="5400000">
+            <a:outerShdw blurRad="101600" dist="25400" dir="5400000" algn="bl" rotWithShape="0">
               <a:srgbClr val="000000">
                 <a:alpha val="8000"/>
               </a:srgbClr>
             </a:outerShdw>
           </a:effectLst>
         </p:spPr>
+        <p:txBody>
+          <a:bodyPr/>
+          <a:lstStyle/>
+          <a:p>
+            <a:endParaRPr lang="en-US"/>
+          </a:p>
+        </p:txBody>
       </p:sp>
       <p:sp>
         <p:nvSpPr>
@@ -11831,6 +12378,13 @@
             <a:prstDash val="solid"/>
           </a:ln>
         </p:spPr>
+        <p:txBody>
+          <a:bodyPr/>
+          <a:lstStyle/>
+          <a:p>
+            <a:endParaRPr lang="en-US"/>
+          </a:p>
+        </p:txBody>
       </p:sp>
       <p:sp>
         <p:nvSpPr>
@@ -11853,11 +12407,11 @@
           <a:bodyPr wrap="square" lIns="0" tIns="0" rIns="0" bIns="0" rtlCol="0" anchor="ctr"/>
           <a:lstStyle/>
           <a:p>
-            <a:pPr indent="0" marL="0">
-              <a:buNone/>
-            </a:pPr>
-            <a:r>
-              <a:rPr lang="en-US" sz="800" b="1" spc="200" kern="0" dirty="0">
+            <a:pPr marL="0" indent="0">
+              <a:buNone/>
+            </a:pPr>
+            <a:r>
+              <a:rPr lang="en-US" sz="800" b="1" kern="0" spc="200" dirty="0">
                 <a:solidFill>
                   <a:srgbClr val="1E2761"/>
                 </a:solidFill>
@@ -11892,7 +12446,7 @@
           <a:bodyPr wrap="square" lIns="0" tIns="0" rIns="0" bIns="0" rtlCol="0" anchor="ctr"/>
           <a:lstStyle/>
           <a:p>
-            <a:pPr indent="0" marL="0">
+            <a:pPr marL="0" indent="0">
               <a:buNone/>
             </a:pPr>
             <a:r>
@@ -11977,6 +12531,13 @@
             <a:prstDash val="dash"/>
           </a:ln>
         </p:spPr>
+        <p:txBody>
+          <a:bodyPr/>
+          <a:lstStyle/>
+          <a:p>
+            <a:endParaRPr lang="en-US"/>
+          </a:p>
+        </p:txBody>
       </p:sp>
       <p:sp>
         <p:nvSpPr>
@@ -12002,6 +12563,13 @@
             <a:prstDash val="solid"/>
           </a:ln>
         </p:spPr>
+        <p:txBody>
+          <a:bodyPr/>
+          <a:lstStyle/>
+          <a:p>
+            <a:endParaRPr lang="en-US"/>
+          </a:p>
+        </p:txBody>
       </p:sp>
       <p:sp>
         <p:nvSpPr>
@@ -12024,11 +12592,11 @@
           <a:bodyPr wrap="square" lIns="0" tIns="0" rIns="0" bIns="0" rtlCol="0" anchor="ctr"/>
           <a:lstStyle/>
           <a:p>
-            <a:pPr indent="0" marL="0">
-              <a:buNone/>
-            </a:pPr>
-            <a:r>
-              <a:rPr lang="en-US" sz="800" b="1" spc="300" kern="0" dirty="0">
+            <a:pPr marL="0" indent="0">
+              <a:buNone/>
+            </a:pPr>
+            <a:r>
+              <a:rPr lang="en-US" sz="800" b="1" kern="0" spc="300" dirty="0">
                 <a:solidFill>
                   <a:srgbClr val="D97706"/>
                 </a:solidFill>
@@ -12063,7 +12631,7 @@
           <a:bodyPr wrap="square" lIns="0" tIns="0" rIns="0" bIns="0" rtlCol="0" anchor="ctr"/>
           <a:lstStyle/>
           <a:p>
-            <a:pPr indent="0" marL="0">
+            <a:pPr marL="0" indent="0">
               <a:buNone/>
             </a:pPr>
             <a:r>
@@ -12102,7 +12670,7 @@
           <a:bodyPr wrap="square" lIns="0" tIns="0" rIns="0" bIns="0" rtlCol="0" anchor="ctr"/>
           <a:lstStyle/>
           <a:p>
-            <a:pPr indent="0" marL="0">
+            <a:pPr marL="0" indent="0">
               <a:buNone/>
             </a:pPr>
             <a:r>
@@ -12141,7 +12709,7 @@
           <a:bodyPr wrap="square" lIns="0" tIns="0" rIns="0" bIns="0" rtlCol="0" anchor="ctr"/>
           <a:lstStyle/>
           <a:p>
-            <a:pPr indent="0" marL="0">
+            <a:pPr marL="0" indent="0">
               <a:buNone/>
             </a:pPr>
             <a:r>
@@ -12183,13 +12751,20 @@
             <a:prstDash val="solid"/>
           </a:ln>
           <a:effectLst>
-            <a:outerShdw sx="100000" sy="100000" kx="0" ky="0" algn="bl" rotWithShape="0" blurRad="101600" dist="25400" dir="5400000">
+            <a:outerShdw blurRad="101600" dist="25400" dir="5400000" algn="bl" rotWithShape="0">
               <a:srgbClr val="000000">
                 <a:alpha val="8000"/>
               </a:srgbClr>
             </a:outerShdw>
           </a:effectLst>
         </p:spPr>
+        <p:txBody>
+          <a:bodyPr/>
+          <a:lstStyle/>
+          <a:p>
+            <a:endParaRPr lang="en-US"/>
+          </a:p>
+        </p:txBody>
       </p:sp>
       <p:sp>
         <p:nvSpPr>
@@ -12215,6 +12790,13 @@
             <a:prstDash val="solid"/>
           </a:ln>
         </p:spPr>
+        <p:txBody>
+          <a:bodyPr/>
+          <a:lstStyle/>
+          <a:p>
+            <a:endParaRPr lang="en-US"/>
+          </a:p>
+        </p:txBody>
       </p:sp>
       <p:sp>
         <p:nvSpPr>
@@ -12237,11 +12819,11 @@
           <a:bodyPr wrap="square" lIns="0" tIns="0" rIns="0" bIns="0" rtlCol="0" anchor="ctr"/>
           <a:lstStyle/>
           <a:p>
-            <a:pPr indent="0" marL="0">
-              <a:buNone/>
-            </a:pPr>
-            <a:r>
-              <a:rPr lang="en-US" sz="800" b="1" spc="300" kern="0" dirty="0">
+            <a:pPr marL="0" indent="0">
+              <a:buNone/>
+            </a:pPr>
+            <a:r>
+              <a:rPr lang="en-US" sz="800" b="1" kern="0" spc="300" dirty="0">
                 <a:solidFill>
                   <a:srgbClr val="028090"/>
                 </a:solidFill>
@@ -12276,7 +12858,7 @@
           <a:bodyPr wrap="square" lIns="0" tIns="0" rIns="0" bIns="0" rtlCol="0" anchor="ctr"/>
           <a:lstStyle/>
           <a:p>
-            <a:pPr indent="0" marL="0">
+            <a:pPr marL="0" indent="0">
               <a:buNone/>
             </a:pPr>
             <a:r>
@@ -12422,6 +13004,13 @@
             <a:prstDash val="solid"/>
           </a:ln>
         </p:spPr>
+        <p:txBody>
+          <a:bodyPr/>
+          <a:lstStyle/>
+          <a:p>
+            <a:endParaRPr lang="en-US"/>
+          </a:p>
+        </p:txBody>
       </p:sp>
       <p:sp>
         <p:nvSpPr>
@@ -12444,7 +13033,7 @@
           <a:bodyPr wrap="square" lIns="0" tIns="0" rIns="0" bIns="0" rtlCol="0" anchor="ctr"/>
           <a:lstStyle/>
           <a:p>
-            <a:pPr indent="0" marL="0">
+            <a:pPr marL="0" indent="0">
               <a:buNone/>
             </a:pPr>
             <a:r>
@@ -12483,7 +13072,7 @@
           <a:bodyPr wrap="square" lIns="0" tIns="0" rIns="0" bIns="0" rtlCol="0" anchor="ctr"/>
           <a:lstStyle/>
           <a:p>
-            <a:pPr algn="r" indent="0" marL="0">
+            <a:pPr marL="0" indent="0" algn="r">
               <a:buNone/>
             </a:pPr>
             <a:r>
@@ -12517,6 +13106,7 @@
         <a:solidFill>
           <a:srgbClr val="F5F7FB"/>
         </a:solidFill>
+        <a:effectLst/>
       </p:bgPr>
     </p:bg>
     <p:spTree>
@@ -12557,6 +13147,13 @@
             <a:prstDash val="solid"/>
           </a:ln>
         </p:spPr>
+        <p:txBody>
+          <a:bodyPr/>
+          <a:lstStyle/>
+          <a:p>
+            <a:endParaRPr lang="en-US"/>
+          </a:p>
+        </p:txBody>
       </p:sp>
       <p:sp>
         <p:nvSpPr>
@@ -12579,7 +13176,7 @@
           <a:bodyPr wrap="square" lIns="0" tIns="0" rIns="0" bIns="0" rtlCol="0" anchor="ctr"/>
           <a:lstStyle/>
           <a:p>
-            <a:pPr algn="r" indent="0" marL="0">
+            <a:pPr marL="0" indent="0" algn="r">
               <a:buNone/>
             </a:pPr>
             <a:r>
@@ -12618,7 +13215,7 @@
           <a:bodyPr wrap="square" lIns="0" tIns="0" rIns="0" bIns="0" rtlCol="0" anchor="ctr"/>
           <a:lstStyle/>
           <a:p>
-            <a:pPr indent="0" marL="0">
+            <a:pPr marL="0" indent="0">
               <a:buNone/>
             </a:pPr>
             <a:r>
@@ -12657,7 +13254,7 @@
           <a:bodyPr wrap="square" lIns="0" tIns="0" rIns="0" bIns="0" rtlCol="0" anchor="ctr"/>
           <a:lstStyle/>
           <a:p>
-            <a:pPr indent="0" marL="0">
+            <a:pPr marL="0" indent="0">
               <a:buNone/>
             </a:pPr>
             <a:r>
@@ -12699,13 +13296,20 @@
             <a:prstDash val="solid"/>
           </a:ln>
           <a:effectLst>
-            <a:outerShdw sx="100000" sy="100000" kx="0" ky="0" algn="bl" rotWithShape="0" blurRad="101600" dist="25400" dir="5400000">
+            <a:outerShdw blurRad="101600" dist="25400" dir="5400000" algn="bl" rotWithShape="0">
               <a:srgbClr val="000000">
                 <a:alpha val="8000"/>
               </a:srgbClr>
             </a:outerShdw>
           </a:effectLst>
         </p:spPr>
+        <p:txBody>
+          <a:bodyPr/>
+          <a:lstStyle/>
+          <a:p>
+            <a:endParaRPr lang="en-US"/>
+          </a:p>
+        </p:txBody>
       </p:sp>
       <p:sp>
         <p:nvSpPr>
@@ -12731,6 +13335,13 @@
             <a:prstDash val="solid"/>
           </a:ln>
         </p:spPr>
+        <p:txBody>
+          <a:bodyPr/>
+          <a:lstStyle/>
+          <a:p>
+            <a:endParaRPr lang="en-US"/>
+          </a:p>
+        </p:txBody>
       </p:sp>
       <p:sp>
         <p:nvSpPr>
@@ -12753,7 +13364,7 @@
           <a:bodyPr wrap="square" lIns="0" tIns="0" rIns="0" bIns="0" rtlCol="0" anchor="ctr"/>
           <a:lstStyle/>
           <a:p>
-            <a:pPr indent="0" marL="0">
+            <a:pPr marL="0" indent="0">
               <a:buNone/>
             </a:pPr>
             <a:r>
@@ -12792,7 +13403,7 @@
           <a:bodyPr wrap="square" lIns="0" tIns="0" rIns="0" bIns="0" rtlCol="0" anchor="ctr"/>
           <a:lstStyle/>
           <a:p>
-            <a:pPr indent="0" marL="0">
+            <a:pPr marL="0" indent="0">
               <a:buNone/>
             </a:pPr>
             <a:r>
@@ -12831,7 +13442,7 @@
           <a:bodyPr wrap="square" lIns="0" tIns="0" rIns="0" bIns="0" rtlCol="0" anchor="ctr"/>
           <a:lstStyle/>
           <a:p>
-            <a:pPr indent="0" marL="0">
+            <a:pPr marL="0" indent="0">
               <a:buNone/>
             </a:pPr>
             <a:r>
@@ -12870,7 +13481,7 @@
           <a:bodyPr wrap="square" lIns="0" tIns="0" rIns="0" bIns="0" rtlCol="0" anchor="ctr"/>
           <a:lstStyle/>
           <a:p>
-            <a:pPr algn="r" indent="0" marL="0">
+            <a:pPr marL="0" indent="0" algn="r">
               <a:buNone/>
             </a:pPr>
             <a:r>
@@ -12912,6 +13523,13 @@
             <a:prstDash val="solid"/>
           </a:ln>
         </p:spPr>
+        <p:txBody>
+          <a:bodyPr/>
+          <a:lstStyle/>
+          <a:p>
+            <a:endParaRPr lang="en-US"/>
+          </a:p>
+        </p:txBody>
       </p:sp>
       <p:sp>
         <p:nvSpPr>
@@ -12934,7 +13552,7 @@
           <a:bodyPr wrap="square" lIns="0" tIns="0" rIns="0" bIns="0" rtlCol="0" anchor="ctr"/>
           <a:lstStyle/>
           <a:p>
-            <a:pPr indent="0" marL="0">
+            <a:pPr marL="0" indent="0">
               <a:buNone/>
             </a:pPr>
             <a:r>
@@ -12973,7 +13591,7 @@
           <a:bodyPr wrap="square" lIns="0" tIns="0" rIns="0" bIns="0" rtlCol="0" anchor="ctr"/>
           <a:lstStyle/>
           <a:p>
-            <a:pPr indent="0" marL="0">
+            <a:pPr marL="0" indent="0">
               <a:buNone/>
             </a:pPr>
             <a:r>
@@ -13012,7 +13630,7 @@
           <a:bodyPr wrap="square" lIns="0" tIns="0" rIns="0" bIns="0" rtlCol="0" anchor="ctr"/>
           <a:lstStyle/>
           <a:p>
-            <a:pPr algn="r" indent="0" marL="0">
+            <a:pPr marL="0" indent="0" algn="r">
               <a:buNone/>
             </a:pPr>
             <a:r>
@@ -13051,7 +13669,7 @@
           <a:bodyPr wrap="square" lIns="0" tIns="0" rIns="0" bIns="0" rtlCol="0" anchor="ctr"/>
           <a:lstStyle/>
           <a:p>
-            <a:pPr indent="0" marL="0">
+            <a:pPr marL="0" indent="0">
               <a:buNone/>
             </a:pPr>
             <a:endParaRPr lang="en-US" sz="800" dirty="0"/>
@@ -13079,7 +13697,7 @@
           <a:bodyPr wrap="square" lIns="0" tIns="0" rIns="0" bIns="0" rtlCol="0" anchor="ctr"/>
           <a:lstStyle/>
           <a:p>
-            <a:pPr indent="0" marL="0">
+            <a:pPr marL="0" indent="0">
               <a:buNone/>
             </a:pPr>
             <a:r>
@@ -13118,7 +13736,7 @@
           <a:bodyPr wrap="square" lIns="0" tIns="0" rIns="0" bIns="0" rtlCol="0" anchor="ctr"/>
           <a:lstStyle/>
           <a:p>
-            <a:pPr algn="r" indent="0" marL="0">
+            <a:pPr marL="0" indent="0" algn="r">
               <a:buNone/>
             </a:pPr>
             <a:r>
@@ -13160,6 +13778,13 @@
             <a:prstDash val="solid"/>
           </a:ln>
         </p:spPr>
+        <p:txBody>
+          <a:bodyPr/>
+          <a:lstStyle/>
+          <a:p>
+            <a:endParaRPr lang="en-US"/>
+          </a:p>
+        </p:txBody>
       </p:sp>
       <p:sp>
         <p:nvSpPr>
@@ -13182,7 +13807,7 @@
           <a:bodyPr wrap="square" lIns="0" tIns="0" rIns="0" bIns="0" rtlCol="0" anchor="ctr"/>
           <a:lstStyle/>
           <a:p>
-            <a:pPr indent="0" marL="0">
+            <a:pPr marL="0" indent="0">
               <a:buNone/>
             </a:pPr>
             <a:endParaRPr lang="en-US" sz="800" dirty="0"/>
@@ -13210,7 +13835,7 @@
           <a:bodyPr wrap="square" lIns="0" tIns="0" rIns="0" bIns="0" rtlCol="0" anchor="ctr"/>
           <a:lstStyle/>
           <a:p>
-            <a:pPr indent="0" marL="0">
+            <a:pPr marL="0" indent="0">
               <a:buNone/>
             </a:pPr>
             <a:r>
@@ -13249,7 +13874,7 @@
           <a:bodyPr wrap="square" lIns="0" tIns="0" rIns="0" bIns="0" rtlCol="0" anchor="ctr"/>
           <a:lstStyle/>
           <a:p>
-            <a:pPr algn="r" indent="0" marL="0">
+            <a:pPr marL="0" indent="0" algn="r">
               <a:buNone/>
             </a:pPr>
             <a:r>
@@ -13288,7 +13913,7 @@
           <a:bodyPr wrap="square" lIns="0" tIns="0" rIns="0" bIns="0" rtlCol="0" anchor="ctr"/>
           <a:lstStyle/>
           <a:p>
-            <a:pPr indent="0" marL="0">
+            <a:pPr marL="0" indent="0">
               <a:buNone/>
             </a:pPr>
             <a:endParaRPr lang="en-US" sz="800" dirty="0"/>
@@ -13316,7 +13941,7 @@
           <a:bodyPr wrap="square" lIns="0" tIns="0" rIns="0" bIns="0" rtlCol="0" anchor="ctr"/>
           <a:lstStyle/>
           <a:p>
-            <a:pPr indent="0" marL="0">
+            <a:pPr marL="0" indent="0">
               <a:buNone/>
             </a:pPr>
             <a:r>
@@ -13355,7 +13980,7 @@
           <a:bodyPr wrap="square" lIns="0" tIns="0" rIns="0" bIns="0" rtlCol="0" anchor="ctr"/>
           <a:lstStyle/>
           <a:p>
-            <a:pPr algn="r" indent="0" marL="0">
+            <a:pPr marL="0" indent="0" algn="r">
               <a:buNone/>
             </a:pPr>
             <a:r>
@@ -13397,6 +14022,13 @@
             <a:prstDash val="solid"/>
           </a:ln>
         </p:spPr>
+        <p:txBody>
+          <a:bodyPr/>
+          <a:lstStyle/>
+          <a:p>
+            <a:endParaRPr lang="en-US"/>
+          </a:p>
+        </p:txBody>
       </p:sp>
       <p:sp>
         <p:nvSpPr>
@@ -13419,7 +14051,7 @@
           <a:bodyPr wrap="square" lIns="0" tIns="0" rIns="0" bIns="0" rtlCol="0" anchor="ctr"/>
           <a:lstStyle/>
           <a:p>
-            <a:pPr indent="0" marL="0">
+            <a:pPr marL="0" indent="0">
               <a:buNone/>
             </a:pPr>
             <a:endParaRPr lang="en-US" sz="800" dirty="0"/>
@@ -13447,7 +14079,7 @@
           <a:bodyPr wrap="square" lIns="0" tIns="0" rIns="0" bIns="0" rtlCol="0" anchor="ctr"/>
           <a:lstStyle/>
           <a:p>
-            <a:pPr indent="0" marL="0">
+            <a:pPr marL="0" indent="0">
               <a:buNone/>
             </a:pPr>
             <a:r>
@@ -13486,7 +14118,7 @@
           <a:bodyPr wrap="square" lIns="0" tIns="0" rIns="0" bIns="0" rtlCol="0" anchor="ctr"/>
           <a:lstStyle/>
           <a:p>
-            <a:pPr algn="r" indent="0" marL="0">
+            <a:pPr marL="0" indent="0" algn="r">
               <a:buNone/>
             </a:pPr>
             <a:r>
@@ -13525,7 +14157,7 @@
           <a:bodyPr wrap="square" lIns="0" tIns="0" rIns="0" bIns="0" rtlCol="0" anchor="ctr"/>
           <a:lstStyle/>
           <a:p>
-            <a:pPr indent="0" marL="0">
+            <a:pPr marL="0" indent="0">
               <a:buNone/>
             </a:pPr>
             <a:endParaRPr lang="en-US" sz="800" dirty="0"/>
@@ -13553,7 +14185,7 @@
           <a:bodyPr wrap="square" lIns="0" tIns="0" rIns="0" bIns="0" rtlCol="0" anchor="ctr"/>
           <a:lstStyle/>
           <a:p>
-            <a:pPr indent="0" marL="0">
+            <a:pPr marL="0" indent="0">
               <a:buNone/>
             </a:pPr>
             <a:r>
@@ -13592,7 +14224,7 @@
           <a:bodyPr wrap="square" lIns="0" tIns="0" rIns="0" bIns="0" rtlCol="0" anchor="ctr"/>
           <a:lstStyle/>
           <a:p>
-            <a:pPr algn="r" indent="0" marL="0">
+            <a:pPr marL="0" indent="0" algn="r">
               <a:buNone/>
             </a:pPr>
             <a:r>
@@ -13634,13 +14266,20 @@
             <a:prstDash val="solid"/>
           </a:ln>
           <a:effectLst>
-            <a:outerShdw sx="100000" sy="100000" kx="0" ky="0" algn="bl" rotWithShape="0" blurRad="101600" dist="25400" dir="5400000">
+            <a:outerShdw blurRad="101600" dist="25400" dir="5400000" algn="bl" rotWithShape="0">
               <a:srgbClr val="000000">
                 <a:alpha val="8000"/>
               </a:srgbClr>
             </a:outerShdw>
           </a:effectLst>
         </p:spPr>
+        <p:txBody>
+          <a:bodyPr/>
+          <a:lstStyle/>
+          <a:p>
+            <a:endParaRPr lang="en-US"/>
+          </a:p>
+        </p:txBody>
       </p:sp>
       <p:sp>
         <p:nvSpPr>
@@ -13666,6 +14305,13 @@
             <a:prstDash val="solid"/>
           </a:ln>
         </p:spPr>
+        <p:txBody>
+          <a:bodyPr/>
+          <a:lstStyle/>
+          <a:p>
+            <a:endParaRPr lang="en-US"/>
+          </a:p>
+        </p:txBody>
       </p:sp>
       <p:sp>
         <p:nvSpPr>
@@ -13688,7 +14334,7 @@
           <a:bodyPr wrap="square" lIns="0" tIns="0" rIns="0" bIns="0" rtlCol="0" anchor="ctr"/>
           <a:lstStyle/>
           <a:p>
-            <a:pPr indent="0" marL="0">
+            <a:pPr marL="0" indent="0">
               <a:buNone/>
             </a:pPr>
             <a:r>
@@ -13727,7 +14373,7 @@
           <a:bodyPr wrap="square" lIns="0" tIns="0" rIns="0" bIns="0" rtlCol="0" anchor="ctr"/>
           <a:lstStyle/>
           <a:p>
-            <a:pPr indent="0" marL="0">
+            <a:pPr marL="0" indent="0">
               <a:buNone/>
             </a:pPr>
             <a:r>
@@ -13766,7 +14412,7 @@
           <a:bodyPr wrap="square" lIns="0" tIns="0" rIns="0" bIns="0" rtlCol="0" anchor="ctr"/>
           <a:lstStyle/>
           <a:p>
-            <a:pPr indent="0" marL="0">
+            <a:pPr marL="0" indent="0">
               <a:buNone/>
             </a:pPr>
             <a:r>
@@ -13805,7 +14451,7 @@
           <a:bodyPr wrap="square" lIns="0" tIns="0" rIns="0" bIns="0" rtlCol="0" anchor="ctr"/>
           <a:lstStyle/>
           <a:p>
-            <a:pPr algn="r" indent="0" marL="0">
+            <a:pPr marL="0" indent="0" algn="r">
               <a:buNone/>
             </a:pPr>
             <a:r>
@@ -13847,6 +14493,13 @@
             <a:prstDash val="solid"/>
           </a:ln>
         </p:spPr>
+        <p:txBody>
+          <a:bodyPr/>
+          <a:lstStyle/>
+          <a:p>
+            <a:endParaRPr lang="en-US"/>
+          </a:p>
+        </p:txBody>
       </p:sp>
       <p:sp>
         <p:nvSpPr>
@@ -13869,7 +14522,7 @@
           <a:bodyPr wrap="square" lIns="0" tIns="0" rIns="0" bIns="0" rtlCol="0" anchor="ctr"/>
           <a:lstStyle/>
           <a:p>
-            <a:pPr indent="0" marL="0">
+            <a:pPr marL="0" indent="0">
               <a:buNone/>
             </a:pPr>
             <a:r>
@@ -13908,7 +14561,7 @@
           <a:bodyPr wrap="square" lIns="0" tIns="0" rIns="0" bIns="0" rtlCol="0" anchor="ctr"/>
           <a:lstStyle/>
           <a:p>
-            <a:pPr indent="0" marL="0">
+            <a:pPr marL="0" indent="0">
               <a:buNone/>
             </a:pPr>
             <a:r>
@@ -13947,7 +14600,7 @@
           <a:bodyPr wrap="square" lIns="0" tIns="0" rIns="0" bIns="0" rtlCol="0" anchor="ctr"/>
           <a:lstStyle/>
           <a:p>
-            <a:pPr algn="r" indent="0" marL="0">
+            <a:pPr marL="0" indent="0" algn="r">
               <a:buNone/>
             </a:pPr>
             <a:r>
@@ -13986,7 +14639,7 @@
           <a:bodyPr wrap="square" lIns="0" tIns="0" rIns="0" bIns="0" rtlCol="0" anchor="ctr"/>
           <a:lstStyle/>
           <a:p>
-            <a:pPr indent="0" marL="0">
+            <a:pPr marL="0" indent="0">
               <a:buNone/>
             </a:pPr>
             <a:endParaRPr lang="en-US" sz="800" dirty="0"/>
@@ -14014,7 +14667,7 @@
           <a:bodyPr wrap="square" lIns="0" tIns="0" rIns="0" bIns="0" rtlCol="0" anchor="ctr"/>
           <a:lstStyle/>
           <a:p>
-            <a:pPr indent="0" marL="0">
+            <a:pPr marL="0" indent="0">
               <a:buNone/>
             </a:pPr>
             <a:r>
@@ -14053,7 +14706,7 @@
           <a:bodyPr wrap="square" lIns="0" tIns="0" rIns="0" bIns="0" rtlCol="0" anchor="ctr"/>
           <a:lstStyle/>
           <a:p>
-            <a:pPr algn="r" indent="0" marL="0">
+            <a:pPr marL="0" indent="0" algn="r">
               <a:buNone/>
             </a:pPr>
             <a:r>
@@ -14095,6 +14748,13 @@
             <a:prstDash val="solid"/>
           </a:ln>
         </p:spPr>
+        <p:txBody>
+          <a:bodyPr/>
+          <a:lstStyle/>
+          <a:p>
+            <a:endParaRPr lang="en-US"/>
+          </a:p>
+        </p:txBody>
       </p:sp>
       <p:sp>
         <p:nvSpPr>
@@ -14117,7 +14777,7 @@
           <a:bodyPr wrap="square" lIns="0" tIns="0" rIns="0" bIns="0" rtlCol="0" anchor="ctr"/>
           <a:lstStyle/>
           <a:p>
-            <a:pPr indent="0" marL="0">
+            <a:pPr marL="0" indent="0">
               <a:buNone/>
             </a:pPr>
             <a:endParaRPr lang="en-US" sz="800" dirty="0"/>
@@ -14145,7 +14805,7 @@
           <a:bodyPr wrap="square" lIns="0" tIns="0" rIns="0" bIns="0" rtlCol="0" anchor="ctr"/>
           <a:lstStyle/>
           <a:p>
-            <a:pPr indent="0" marL="0">
+            <a:pPr marL="0" indent="0">
               <a:buNone/>
             </a:pPr>
             <a:r>
@@ -14184,7 +14844,7 @@
           <a:bodyPr wrap="square" lIns="0" tIns="0" rIns="0" bIns="0" rtlCol="0" anchor="ctr"/>
           <a:lstStyle/>
           <a:p>
-            <a:pPr algn="r" indent="0" marL="0">
+            <a:pPr marL="0" indent="0" algn="r">
               <a:buNone/>
             </a:pPr>
             <a:r>
@@ -14223,7 +14883,7 @@
           <a:bodyPr wrap="square" lIns="0" tIns="0" rIns="0" bIns="0" rtlCol="0" anchor="ctr"/>
           <a:lstStyle/>
           <a:p>
-            <a:pPr indent="0" marL="0">
+            <a:pPr marL="0" indent="0">
               <a:buNone/>
             </a:pPr>
             <a:endParaRPr lang="en-US" sz="800" dirty="0"/>
@@ -14251,7 +14911,7 @@
           <a:bodyPr wrap="square" lIns="0" tIns="0" rIns="0" bIns="0" rtlCol="0" anchor="ctr"/>
           <a:lstStyle/>
           <a:p>
-            <a:pPr indent="0" marL="0">
+            <a:pPr marL="0" indent="0">
               <a:buNone/>
             </a:pPr>
             <a:r>
@@ -14290,7 +14950,7 @@
           <a:bodyPr wrap="square" lIns="0" tIns="0" rIns="0" bIns="0" rtlCol="0" anchor="ctr"/>
           <a:lstStyle/>
           <a:p>
-            <a:pPr algn="r" indent="0" marL="0">
+            <a:pPr marL="0" indent="0" algn="r">
               <a:buNone/>
             </a:pPr>
             <a:r>
@@ -14332,6 +14992,13 @@
             <a:prstDash val="solid"/>
           </a:ln>
         </p:spPr>
+        <p:txBody>
+          <a:bodyPr/>
+          <a:lstStyle/>
+          <a:p>
+            <a:endParaRPr lang="en-US"/>
+          </a:p>
+        </p:txBody>
       </p:sp>
       <p:sp>
         <p:nvSpPr>
@@ -14354,7 +15021,7 @@
           <a:bodyPr wrap="square" lIns="0" tIns="0" rIns="0" bIns="0" rtlCol="0" anchor="ctr"/>
           <a:lstStyle/>
           <a:p>
-            <a:pPr indent="0" marL="0">
+            <a:pPr marL="0" indent="0">
               <a:buNone/>
             </a:pPr>
             <a:endParaRPr lang="en-US" sz="800" dirty="0"/>
@@ -14382,7 +15049,7 @@
           <a:bodyPr wrap="square" lIns="0" tIns="0" rIns="0" bIns="0" rtlCol="0" anchor="ctr"/>
           <a:lstStyle/>
           <a:p>
-            <a:pPr indent="0" marL="0">
+            <a:pPr marL="0" indent="0">
               <a:buNone/>
             </a:pPr>
             <a:r>
@@ -14421,7 +15088,7 @@
           <a:bodyPr wrap="square" lIns="0" tIns="0" rIns="0" bIns="0" rtlCol="0" anchor="ctr"/>
           <a:lstStyle/>
           <a:p>
-            <a:pPr algn="r" indent="0" marL="0">
+            <a:pPr marL="0" indent="0" algn="r">
               <a:buNone/>
             </a:pPr>
             <a:r>
@@ -14460,7 +15127,7 @@
           <a:bodyPr wrap="square" lIns="0" tIns="0" rIns="0" bIns="0" rtlCol="0" anchor="ctr"/>
           <a:lstStyle/>
           <a:p>
-            <a:pPr indent="0" marL="0">
+            <a:pPr marL="0" indent="0">
               <a:buNone/>
             </a:pPr>
             <a:endParaRPr lang="en-US" sz="800" dirty="0"/>
@@ -14488,7 +15155,7 @@
           <a:bodyPr wrap="square" lIns="0" tIns="0" rIns="0" bIns="0" rtlCol="0" anchor="ctr"/>
           <a:lstStyle/>
           <a:p>
-            <a:pPr indent="0" marL="0">
+            <a:pPr marL="0" indent="0">
               <a:buNone/>
             </a:pPr>
             <a:r>
@@ -14527,7 +15194,7 @@
           <a:bodyPr wrap="square" lIns="0" tIns="0" rIns="0" bIns="0" rtlCol="0" anchor="ctr"/>
           <a:lstStyle/>
           <a:p>
-            <a:pPr algn="r" indent="0" marL="0">
+            <a:pPr marL="0" indent="0" algn="r">
               <a:buNone/>
             </a:pPr>
             <a:r>
@@ -14569,13 +15236,20 @@
             <a:prstDash val="solid"/>
           </a:ln>
           <a:effectLst>
-            <a:outerShdw sx="100000" sy="100000" kx="0" ky="0" algn="bl" rotWithShape="0" blurRad="101600" dist="25400" dir="5400000">
+            <a:outerShdw blurRad="101600" dist="25400" dir="5400000" algn="bl" rotWithShape="0">
               <a:srgbClr val="000000">
                 <a:alpha val="8000"/>
               </a:srgbClr>
             </a:outerShdw>
           </a:effectLst>
         </p:spPr>
+        <p:txBody>
+          <a:bodyPr/>
+          <a:lstStyle/>
+          <a:p>
+            <a:endParaRPr lang="en-US"/>
+          </a:p>
+        </p:txBody>
       </p:sp>
       <p:sp>
         <p:nvSpPr>
@@ -14601,6 +15275,13 @@
             <a:prstDash val="solid"/>
           </a:ln>
         </p:spPr>
+        <p:txBody>
+          <a:bodyPr/>
+          <a:lstStyle/>
+          <a:p>
+            <a:endParaRPr lang="en-US"/>
+          </a:p>
+        </p:txBody>
       </p:sp>
       <p:sp>
         <p:nvSpPr>
@@ -14623,7 +15304,7 @@
           <a:bodyPr wrap="square" lIns="0" tIns="0" rIns="0" bIns="0" rtlCol="0" anchor="ctr"/>
           <a:lstStyle/>
           <a:p>
-            <a:pPr indent="0" marL="0">
+            <a:pPr marL="0" indent="0">
               <a:buNone/>
             </a:pPr>
             <a:r>
@@ -14662,7 +15343,7 @@
           <a:bodyPr wrap="square" lIns="0" tIns="0" rIns="0" bIns="0" rtlCol="0" anchor="ctr"/>
           <a:lstStyle/>
           <a:p>
-            <a:pPr indent="0" marL="0">
+            <a:pPr marL="0" indent="0">
               <a:buNone/>
             </a:pPr>
             <a:r>
@@ -14701,7 +15382,7 @@
           <a:bodyPr wrap="square" lIns="0" tIns="0" rIns="0" bIns="0" rtlCol="0" anchor="ctr"/>
           <a:lstStyle/>
           <a:p>
-            <a:pPr indent="0" marL="0">
+            <a:pPr marL="0" indent="0">
               <a:buNone/>
             </a:pPr>
             <a:r>
@@ -14740,7 +15421,7 @@
           <a:bodyPr wrap="square" lIns="0" tIns="0" rIns="0" bIns="0" rtlCol="0" anchor="ctr"/>
           <a:lstStyle/>
           <a:p>
-            <a:pPr algn="r" indent="0" marL="0">
+            <a:pPr marL="0" indent="0" algn="r">
               <a:buNone/>
             </a:pPr>
             <a:r>
@@ -14782,6 +15463,13 @@
             <a:prstDash val="solid"/>
           </a:ln>
         </p:spPr>
+        <p:txBody>
+          <a:bodyPr/>
+          <a:lstStyle/>
+          <a:p>
+            <a:endParaRPr lang="en-US"/>
+          </a:p>
+        </p:txBody>
       </p:sp>
       <p:sp>
         <p:nvSpPr>
@@ -14804,7 +15492,7 @@
           <a:bodyPr wrap="square" lIns="0" tIns="0" rIns="0" bIns="0" rtlCol="0" anchor="ctr"/>
           <a:lstStyle/>
           <a:p>
-            <a:pPr indent="0" marL="0">
+            <a:pPr marL="0" indent="0">
               <a:buNone/>
             </a:pPr>
             <a:r>
@@ -14843,7 +15531,7 @@
           <a:bodyPr wrap="square" lIns="0" tIns="0" rIns="0" bIns="0" rtlCol="0" anchor="ctr"/>
           <a:lstStyle/>
           <a:p>
-            <a:pPr indent="0" marL="0">
+            <a:pPr marL="0" indent="0">
               <a:buNone/>
             </a:pPr>
             <a:r>
@@ -14882,7 +15570,7 @@
           <a:bodyPr wrap="square" lIns="0" tIns="0" rIns="0" bIns="0" rtlCol="0" anchor="ctr"/>
           <a:lstStyle/>
           <a:p>
-            <a:pPr algn="r" indent="0" marL="0">
+            <a:pPr marL="0" indent="0" algn="r">
               <a:buNone/>
             </a:pPr>
             <a:r>
@@ -14921,7 +15609,7 @@
           <a:bodyPr wrap="square" lIns="0" tIns="0" rIns="0" bIns="0" rtlCol="0" anchor="ctr"/>
           <a:lstStyle/>
           <a:p>
-            <a:pPr indent="0" marL="0">
+            <a:pPr marL="0" indent="0">
               <a:buNone/>
             </a:pPr>
             <a:endParaRPr lang="en-US" sz="800" dirty="0"/>
@@ -14949,7 +15637,7 @@
           <a:bodyPr wrap="square" lIns="0" tIns="0" rIns="0" bIns="0" rtlCol="0" anchor="ctr"/>
           <a:lstStyle/>
           <a:p>
-            <a:pPr indent="0" marL="0">
+            <a:pPr marL="0" indent="0">
               <a:buNone/>
             </a:pPr>
             <a:r>
@@ -14988,7 +15676,7 @@
           <a:bodyPr wrap="square" lIns="0" tIns="0" rIns="0" bIns="0" rtlCol="0" anchor="ctr"/>
           <a:lstStyle/>
           <a:p>
-            <a:pPr algn="r" indent="0" marL="0">
+            <a:pPr marL="0" indent="0" algn="r">
               <a:buNone/>
             </a:pPr>
             <a:r>
@@ -15030,6 +15718,13 @@
             <a:prstDash val="solid"/>
           </a:ln>
         </p:spPr>
+        <p:txBody>
+          <a:bodyPr/>
+          <a:lstStyle/>
+          <a:p>
+            <a:endParaRPr lang="en-US"/>
+          </a:p>
+        </p:txBody>
       </p:sp>
       <p:sp>
         <p:nvSpPr>
@@ -15052,7 +15747,7 @@
           <a:bodyPr wrap="square" lIns="0" tIns="0" rIns="0" bIns="0" rtlCol="0" anchor="ctr"/>
           <a:lstStyle/>
           <a:p>
-            <a:pPr indent="0" marL="0">
+            <a:pPr marL="0" indent="0">
               <a:buNone/>
             </a:pPr>
             <a:endParaRPr lang="en-US" sz="800" dirty="0"/>
@@ -15080,7 +15775,7 @@
           <a:bodyPr wrap="square" lIns="0" tIns="0" rIns="0" bIns="0" rtlCol="0" anchor="ctr"/>
           <a:lstStyle/>
           <a:p>
-            <a:pPr indent="0" marL="0">
+            <a:pPr marL="0" indent="0">
               <a:buNone/>
             </a:pPr>
             <a:r>
@@ -15119,7 +15814,7 @@
           <a:bodyPr wrap="square" lIns="0" tIns="0" rIns="0" bIns="0" rtlCol="0" anchor="ctr"/>
           <a:lstStyle/>
           <a:p>
-            <a:pPr algn="r" indent="0" marL="0">
+            <a:pPr marL="0" indent="0" algn="r">
               <a:buNone/>
             </a:pPr>
             <a:r>
@@ -15158,7 +15853,7 @@
           <a:bodyPr wrap="square" lIns="0" tIns="0" rIns="0" bIns="0" rtlCol="0" anchor="ctr"/>
           <a:lstStyle/>
           <a:p>
-            <a:pPr indent="0" marL="0">
+            <a:pPr marL="0" indent="0">
               <a:buNone/>
             </a:pPr>
             <a:endParaRPr lang="en-US" sz="800" dirty="0"/>
@@ -15186,7 +15881,7 @@
           <a:bodyPr wrap="square" lIns="0" tIns="0" rIns="0" bIns="0" rtlCol="0" anchor="ctr"/>
           <a:lstStyle/>
           <a:p>
-            <a:pPr indent="0" marL="0">
+            <a:pPr marL="0" indent="0">
               <a:buNone/>
             </a:pPr>
             <a:r>
@@ -15225,7 +15920,7 @@
           <a:bodyPr wrap="square" lIns="0" tIns="0" rIns="0" bIns="0" rtlCol="0" anchor="ctr"/>
           <a:lstStyle/>
           <a:p>
-            <a:pPr algn="r" indent="0" marL="0">
+            <a:pPr marL="0" indent="0" algn="r">
               <a:buNone/>
             </a:pPr>
             <a:r>
@@ -15267,6 +15962,13 @@
             <a:prstDash val="solid"/>
           </a:ln>
         </p:spPr>
+        <p:txBody>
+          <a:bodyPr/>
+          <a:lstStyle/>
+          <a:p>
+            <a:endParaRPr lang="en-US"/>
+          </a:p>
+        </p:txBody>
       </p:sp>
       <p:sp>
         <p:nvSpPr>
@@ -15289,7 +15991,7 @@
           <a:bodyPr wrap="square" lIns="0" tIns="0" rIns="0" bIns="0" rtlCol="0" anchor="ctr"/>
           <a:lstStyle/>
           <a:p>
-            <a:pPr indent="0" marL="0">
+            <a:pPr marL="0" indent="0">
               <a:buNone/>
             </a:pPr>
             <a:endParaRPr lang="en-US" sz="800" dirty="0"/>
@@ -15317,7 +16019,7 @@
           <a:bodyPr wrap="square" lIns="0" tIns="0" rIns="0" bIns="0" rtlCol="0" anchor="ctr"/>
           <a:lstStyle/>
           <a:p>
-            <a:pPr indent="0" marL="0">
+            <a:pPr marL="0" indent="0">
               <a:buNone/>
             </a:pPr>
             <a:r>
@@ -15356,7 +16058,7 @@
           <a:bodyPr wrap="square" lIns="0" tIns="0" rIns="0" bIns="0" rtlCol="0" anchor="ctr"/>
           <a:lstStyle/>
           <a:p>
-            <a:pPr algn="r" indent="0" marL="0">
+            <a:pPr marL="0" indent="0" algn="r">
               <a:buNone/>
             </a:pPr>
             <a:r>
@@ -15395,7 +16097,7 @@
           <a:bodyPr wrap="square" lIns="0" tIns="0" rIns="0" bIns="0" rtlCol="0" anchor="ctr"/>
           <a:lstStyle/>
           <a:p>
-            <a:pPr indent="0" marL="0">
+            <a:pPr marL="0" indent="0">
               <a:buNone/>
             </a:pPr>
             <a:endParaRPr lang="en-US" sz="800" dirty="0"/>
@@ -15423,7 +16125,7 @@
           <a:bodyPr wrap="square" lIns="0" tIns="0" rIns="0" bIns="0" rtlCol="0" anchor="ctr"/>
           <a:lstStyle/>
           <a:p>
-            <a:pPr indent="0" marL="0">
+            <a:pPr marL="0" indent="0">
               <a:buNone/>
             </a:pPr>
             <a:r>
@@ -15462,7 +16164,7 @@
           <a:bodyPr wrap="square" lIns="0" tIns="0" rIns="0" bIns="0" rtlCol="0" anchor="ctr"/>
           <a:lstStyle/>
           <a:p>
-            <a:pPr algn="r" indent="0" marL="0">
+            <a:pPr marL="0" indent="0" algn="r">
               <a:buNone/>
             </a:pPr>
             <a:r>
@@ -15504,13 +16206,20 @@
             <a:prstDash val="solid"/>
           </a:ln>
           <a:effectLst>
-            <a:outerShdw sx="100000" sy="100000" kx="0" ky="0" algn="bl" rotWithShape="0" blurRad="101600" dist="25400" dir="5400000">
+            <a:outerShdw blurRad="101600" dist="25400" dir="5400000" algn="bl" rotWithShape="0">
               <a:srgbClr val="000000">
                 <a:alpha val="8000"/>
               </a:srgbClr>
             </a:outerShdw>
           </a:effectLst>
         </p:spPr>
+        <p:txBody>
+          <a:bodyPr/>
+          <a:lstStyle/>
+          <a:p>
+            <a:endParaRPr lang="en-US"/>
+          </a:p>
+        </p:txBody>
       </p:sp>
       <p:sp>
         <p:nvSpPr>
@@ -15536,6 +16245,13 @@
             <a:prstDash val="solid"/>
           </a:ln>
         </p:spPr>
+        <p:txBody>
+          <a:bodyPr/>
+          <a:lstStyle/>
+          <a:p>
+            <a:endParaRPr lang="en-US"/>
+          </a:p>
+        </p:txBody>
       </p:sp>
       <p:sp>
         <p:nvSpPr>
@@ -15558,7 +16274,7 @@
           <a:bodyPr wrap="square" lIns="0" tIns="0" rIns="0" bIns="0" rtlCol="0" anchor="ctr"/>
           <a:lstStyle/>
           <a:p>
-            <a:pPr indent="0" marL="0">
+            <a:pPr marL="0" indent="0">
               <a:buNone/>
             </a:pPr>
             <a:r>
@@ -15597,7 +16313,7 @@
           <a:bodyPr wrap="square" lIns="0" tIns="0" rIns="0" bIns="0" rtlCol="0" anchor="ctr"/>
           <a:lstStyle/>
           <a:p>
-            <a:pPr indent="0" marL="0">
+            <a:pPr marL="0" indent="0">
               <a:buNone/>
             </a:pPr>
             <a:r>
@@ -15636,7 +16352,7 @@
           <a:bodyPr wrap="square" lIns="0" tIns="0" rIns="0" bIns="0" rtlCol="0" anchor="ctr"/>
           <a:lstStyle/>
           <a:p>
-            <a:pPr indent="0" marL="0">
+            <a:pPr marL="0" indent="0">
               <a:buNone/>
             </a:pPr>
             <a:r>
@@ -15675,7 +16391,7 @@
           <a:bodyPr wrap="square" lIns="0" tIns="0" rIns="0" bIns="0" rtlCol="0" anchor="ctr"/>
           <a:lstStyle/>
           <a:p>
-            <a:pPr algn="r" indent="0" marL="0">
+            <a:pPr marL="0" indent="0" algn="r">
               <a:buNone/>
             </a:pPr>
             <a:r>
@@ -15717,6 +16433,13 @@
             <a:prstDash val="solid"/>
           </a:ln>
         </p:spPr>
+        <p:txBody>
+          <a:bodyPr/>
+          <a:lstStyle/>
+          <a:p>
+            <a:endParaRPr lang="en-US"/>
+          </a:p>
+        </p:txBody>
       </p:sp>
       <p:sp>
         <p:nvSpPr>
@@ -15739,7 +16462,7 @@
           <a:bodyPr wrap="square" lIns="0" tIns="0" rIns="0" bIns="0" rtlCol="0" anchor="ctr"/>
           <a:lstStyle/>
           <a:p>
-            <a:pPr indent="0" marL="0">
+            <a:pPr marL="0" indent="0">
               <a:buNone/>
             </a:pPr>
             <a:endParaRPr lang="en-US" sz="800" dirty="0"/>
@@ -15767,7 +16490,7 @@
           <a:bodyPr wrap="square" lIns="0" tIns="0" rIns="0" bIns="0" rtlCol="0" anchor="ctr"/>
           <a:lstStyle/>
           <a:p>
-            <a:pPr indent="0" marL="0">
+            <a:pPr marL="0" indent="0">
               <a:buNone/>
             </a:pPr>
             <a:r>
@@ -15806,7 +16529,7 @@
           <a:bodyPr wrap="square" lIns="0" tIns="0" rIns="0" bIns="0" rtlCol="0" anchor="ctr"/>
           <a:lstStyle/>
           <a:p>
-            <a:pPr algn="r" indent="0" marL="0">
+            <a:pPr marL="0" indent="0" algn="r">
               <a:buNone/>
             </a:pPr>
             <a:r>
@@ -15845,7 +16568,7 @@
           <a:bodyPr wrap="square" lIns="0" tIns="0" rIns="0" bIns="0" rtlCol="0" anchor="ctr"/>
           <a:lstStyle/>
           <a:p>
-            <a:pPr indent="0" marL="0">
+            <a:pPr marL="0" indent="0">
               <a:buNone/>
             </a:pPr>
             <a:endParaRPr lang="en-US" sz="800" dirty="0"/>
@@ -15873,7 +16596,7 @@
           <a:bodyPr wrap="square" lIns="0" tIns="0" rIns="0" bIns="0" rtlCol="0" anchor="ctr"/>
           <a:lstStyle/>
           <a:p>
-            <a:pPr indent="0" marL="0">
+            <a:pPr marL="0" indent="0">
               <a:buNone/>
             </a:pPr>
             <a:r>
@@ -15912,7 +16635,7 @@
           <a:bodyPr wrap="square" lIns="0" tIns="0" rIns="0" bIns="0" rtlCol="0" anchor="ctr"/>
           <a:lstStyle/>
           <a:p>
-            <a:pPr algn="r" indent="0" marL="0">
+            <a:pPr marL="0" indent="0" algn="r">
               <a:buNone/>
             </a:pPr>
             <a:r>
@@ -15954,6 +16677,13 @@
             <a:prstDash val="solid"/>
           </a:ln>
         </p:spPr>
+        <p:txBody>
+          <a:bodyPr/>
+          <a:lstStyle/>
+          <a:p>
+            <a:endParaRPr lang="en-US"/>
+          </a:p>
+        </p:txBody>
       </p:sp>
       <p:sp>
         <p:nvSpPr>
@@ -15976,7 +16706,7 @@
           <a:bodyPr wrap="square" lIns="0" tIns="0" rIns="0" bIns="0" rtlCol="0" anchor="ctr"/>
           <a:lstStyle/>
           <a:p>
-            <a:pPr indent="0" marL="0">
+            <a:pPr marL="0" indent="0">
               <a:buNone/>
             </a:pPr>
             <a:endParaRPr lang="en-US" sz="800" dirty="0"/>
@@ -16004,7 +16734,7 @@
           <a:bodyPr wrap="square" lIns="0" tIns="0" rIns="0" bIns="0" rtlCol="0" anchor="ctr"/>
           <a:lstStyle/>
           <a:p>
-            <a:pPr indent="0" marL="0">
+            <a:pPr marL="0" indent="0">
               <a:buNone/>
             </a:pPr>
             <a:r>
@@ -16043,7 +16773,7 @@
           <a:bodyPr wrap="square" lIns="0" tIns="0" rIns="0" bIns="0" rtlCol="0" anchor="ctr"/>
           <a:lstStyle/>
           <a:p>
-            <a:pPr algn="r" indent="0" marL="0">
+            <a:pPr marL="0" indent="0" algn="r">
               <a:buNone/>
             </a:pPr>
             <a:r>
@@ -16082,7 +16812,7 @@
           <a:bodyPr wrap="square" lIns="0" tIns="0" rIns="0" bIns="0" rtlCol="0" anchor="ctr"/>
           <a:lstStyle/>
           <a:p>
-            <a:pPr indent="0" marL="0">
+            <a:pPr marL="0" indent="0">
               <a:buNone/>
             </a:pPr>
             <a:endParaRPr lang="en-US" sz="800" dirty="0"/>
@@ -16110,7 +16840,7 @@
           <a:bodyPr wrap="square" lIns="0" tIns="0" rIns="0" bIns="0" rtlCol="0" anchor="ctr"/>
           <a:lstStyle/>
           <a:p>
-            <a:pPr indent="0" marL="0">
+            <a:pPr marL="0" indent="0">
               <a:buNone/>
             </a:pPr>
             <a:r>
@@ -16149,7 +16879,7 @@
           <a:bodyPr wrap="square" lIns="0" tIns="0" rIns="0" bIns="0" rtlCol="0" anchor="ctr"/>
           <a:lstStyle/>
           <a:p>
-            <a:pPr algn="r" indent="0" marL="0">
+            <a:pPr marL="0" indent="0" algn="r">
               <a:buNone/>
             </a:pPr>
             <a:r>
@@ -16191,6 +16921,13 @@
             <a:prstDash val="solid"/>
           </a:ln>
         </p:spPr>
+        <p:txBody>
+          <a:bodyPr/>
+          <a:lstStyle/>
+          <a:p>
+            <a:endParaRPr lang="en-US"/>
+          </a:p>
+        </p:txBody>
       </p:sp>
       <p:sp>
         <p:nvSpPr>
@@ -16213,7 +16950,7 @@
           <a:bodyPr wrap="square" lIns="0" tIns="0" rIns="0" bIns="0" rtlCol="0" anchor="ctr"/>
           <a:lstStyle/>
           <a:p>
-            <a:pPr indent="0" marL="0">
+            <a:pPr marL="0" indent="0">
               <a:buNone/>
             </a:pPr>
             <a:endParaRPr lang="en-US" sz="800" dirty="0"/>
@@ -16241,7 +16978,7 @@
           <a:bodyPr wrap="square" lIns="0" tIns="0" rIns="0" bIns="0" rtlCol="0" anchor="ctr"/>
           <a:lstStyle/>
           <a:p>
-            <a:pPr indent="0" marL="0">
+            <a:pPr marL="0" indent="0">
               <a:buNone/>
             </a:pPr>
             <a:r>
@@ -16280,7 +17017,7 @@
           <a:bodyPr wrap="square" lIns="0" tIns="0" rIns="0" bIns="0" rtlCol="0" anchor="ctr"/>
           <a:lstStyle/>
           <a:p>
-            <a:pPr algn="r" indent="0" marL="0">
+            <a:pPr marL="0" indent="0" algn="r">
               <a:buNone/>
             </a:pPr>
             <a:r>
@@ -16319,7 +17056,7 @@
           <a:bodyPr wrap="square" lIns="0" tIns="0" rIns="0" bIns="0" rtlCol="0" anchor="ctr"/>
           <a:lstStyle/>
           <a:p>
-            <a:pPr indent="0" marL="0">
+            <a:pPr marL="0" indent="0">
               <a:buNone/>
             </a:pPr>
             <a:endParaRPr lang="en-US" sz="800" dirty="0"/>
@@ -16347,7 +17084,7 @@
           <a:bodyPr wrap="square" lIns="0" tIns="0" rIns="0" bIns="0" rtlCol="0" anchor="ctr"/>
           <a:lstStyle/>
           <a:p>
-            <a:pPr indent="0" marL="0">
+            <a:pPr marL="0" indent="0">
               <a:buNone/>
             </a:pPr>
             <a:r>
@@ -16386,7 +17123,7 @@
           <a:bodyPr wrap="square" lIns="0" tIns="0" rIns="0" bIns="0" rtlCol="0" anchor="ctr"/>
           <a:lstStyle/>
           <a:p>
-            <a:pPr algn="r" indent="0" marL="0">
+            <a:pPr marL="0" indent="0" algn="r">
               <a:buNone/>
             </a:pPr>
             <a:r>
@@ -16428,13 +17165,20 @@
             <a:prstDash val="solid"/>
           </a:ln>
           <a:effectLst>
-            <a:outerShdw sx="100000" sy="100000" kx="0" ky="0" algn="bl" rotWithShape="0" blurRad="101600" dist="25400" dir="5400000">
+            <a:outerShdw blurRad="101600" dist="25400" dir="5400000" algn="bl" rotWithShape="0">
               <a:srgbClr val="000000">
                 <a:alpha val="8000"/>
               </a:srgbClr>
             </a:outerShdw>
           </a:effectLst>
         </p:spPr>
+        <p:txBody>
+          <a:bodyPr/>
+          <a:lstStyle/>
+          <a:p>
+            <a:endParaRPr lang="en-US"/>
+          </a:p>
+        </p:txBody>
       </p:sp>
       <p:sp>
         <p:nvSpPr>
@@ -16460,6 +17204,13 @@
             <a:prstDash val="solid"/>
           </a:ln>
         </p:spPr>
+        <p:txBody>
+          <a:bodyPr/>
+          <a:lstStyle/>
+          <a:p>
+            <a:endParaRPr lang="en-US"/>
+          </a:p>
+        </p:txBody>
       </p:sp>
       <p:sp>
         <p:nvSpPr>
@@ -16482,11 +17233,11 @@
           <a:bodyPr wrap="square" lIns="0" tIns="0" rIns="0" bIns="0" rtlCol="0" anchor="ctr"/>
           <a:lstStyle/>
           <a:p>
-            <a:pPr indent="0" marL="0">
-              <a:buNone/>
-            </a:pPr>
-            <a:r>
-              <a:rPr lang="en-US" sz="800" b="1" spc="300" kern="0" dirty="0">
+            <a:pPr marL="0" indent="0">
+              <a:buNone/>
+            </a:pPr>
+            <a:r>
+              <a:rPr lang="en-US" sz="800" b="1" kern="0" spc="300" dirty="0">
                 <a:solidFill>
                   <a:srgbClr val="1E2761"/>
                 </a:solidFill>
@@ -16521,7 +17272,7 @@
           <a:bodyPr wrap="square" lIns="0" tIns="0" rIns="0" bIns="0" rtlCol="0" anchor="ctr"/>
           <a:lstStyle/>
           <a:p>
-            <a:pPr indent="0" marL="0">
+            <a:pPr marL="0" indent="0">
               <a:buNone/>
             </a:pPr>
             <a:r>
@@ -16645,7 +17396,7 @@
           <a:bodyPr wrap="square" lIns="0" tIns="0" rIns="0" bIns="0" rtlCol="0" anchor="ctr"/>
           <a:lstStyle/>
           <a:p>
-            <a:pPr indent="0" marL="0">
+            <a:pPr marL="0" indent="0">
               <a:buNone/>
             </a:pPr>
             <a:r>
@@ -16769,7 +17520,7 @@
           <a:bodyPr wrap="square" lIns="0" tIns="0" rIns="0" bIns="0" rtlCol="0" anchor="ctr"/>
           <a:lstStyle/>
           <a:p>
-            <a:pPr indent="0" marL="0">
+            <a:pPr marL="0" indent="0">
               <a:buNone/>
             </a:pPr>
             <a:r>
@@ -16809,6 +17560,13 @@
             <a:prstDash val="solid"/>
           </a:ln>
         </p:spPr>
+        <p:txBody>
+          <a:bodyPr/>
+          <a:lstStyle/>
+          <a:p>
+            <a:endParaRPr lang="en-US"/>
+          </a:p>
+        </p:txBody>
       </p:sp>
       <p:sp>
         <p:nvSpPr>
@@ -16831,7 +17589,7 @@
           <a:bodyPr wrap="square" lIns="0" tIns="0" rIns="0" bIns="0" rtlCol="0" anchor="ctr"/>
           <a:lstStyle/>
           <a:p>
-            <a:pPr indent="0" marL="0">
+            <a:pPr marL="0" indent="0">
               <a:buNone/>
             </a:pPr>
             <a:r>
@@ -16870,7 +17628,7 @@
           <a:bodyPr wrap="square" lIns="0" tIns="0" rIns="0" bIns="0" rtlCol="0" anchor="ctr"/>
           <a:lstStyle/>
           <a:p>
-            <a:pPr algn="r" indent="0" marL="0">
+            <a:pPr marL="0" indent="0" algn="r">
               <a:buNone/>
             </a:pPr>
             <a:r>
@@ -16904,6 +17662,7 @@
         <a:solidFill>
           <a:srgbClr val="F5F7FB"/>
         </a:solidFill>
+        <a:effectLst/>
       </p:bgPr>
     </p:bg>
     <p:spTree>
@@ -16944,6 +17703,13 @@
             <a:prstDash val="solid"/>
           </a:ln>
         </p:spPr>
+        <p:txBody>
+          <a:bodyPr/>
+          <a:lstStyle/>
+          <a:p>
+            <a:endParaRPr lang="en-US"/>
+          </a:p>
+        </p:txBody>
       </p:sp>
       <p:sp>
         <p:nvSpPr>
@@ -16966,7 +17732,7 @@
           <a:bodyPr wrap="square" lIns="0" tIns="0" rIns="0" bIns="0" rtlCol="0" anchor="ctr"/>
           <a:lstStyle/>
           <a:p>
-            <a:pPr algn="r" indent="0" marL="0">
+            <a:pPr marL="0" indent="0" algn="r">
               <a:buNone/>
             </a:pPr>
             <a:r>
@@ -17005,7 +17771,7 @@
           <a:bodyPr wrap="square" lIns="0" tIns="0" rIns="0" bIns="0" rtlCol="0" anchor="ctr"/>
           <a:lstStyle/>
           <a:p>
-            <a:pPr indent="0" marL="0">
+            <a:pPr marL="0" indent="0">
               <a:buNone/>
             </a:pPr>
             <a:r>
@@ -17044,7 +17810,7 @@
           <a:bodyPr wrap="square" lIns="0" tIns="0" rIns="0" bIns="0" rtlCol="0" anchor="ctr"/>
           <a:lstStyle/>
           <a:p>
-            <a:pPr indent="0" marL="0">
+            <a:pPr marL="0" indent="0">
               <a:buNone/>
             </a:pPr>
             <a:r>
@@ -17086,13 +17852,20 @@
             <a:prstDash val="solid"/>
           </a:ln>
           <a:effectLst>
-            <a:outerShdw sx="100000" sy="100000" kx="0" ky="0" algn="bl" rotWithShape="0" blurRad="101600" dist="25400" dir="5400000">
+            <a:outerShdw blurRad="101600" dist="25400" dir="5400000" algn="bl" rotWithShape="0">
               <a:srgbClr val="000000">
                 <a:alpha val="8000"/>
               </a:srgbClr>
             </a:outerShdw>
           </a:effectLst>
         </p:spPr>
+        <p:txBody>
+          <a:bodyPr/>
+          <a:lstStyle/>
+          <a:p>
+            <a:endParaRPr lang="en-US"/>
+          </a:p>
+        </p:txBody>
       </p:sp>
       <p:sp>
         <p:nvSpPr>
@@ -17118,6 +17891,13 @@
             <a:prstDash val="solid"/>
           </a:ln>
         </p:spPr>
+        <p:txBody>
+          <a:bodyPr/>
+          <a:lstStyle/>
+          <a:p>
+            <a:endParaRPr lang="en-US"/>
+          </a:p>
+        </p:txBody>
       </p:sp>
       <p:sp>
         <p:nvSpPr>
@@ -17140,11 +17920,11 @@
           <a:bodyPr wrap="square" lIns="0" tIns="0" rIns="0" bIns="0" rtlCol="0" anchor="ctr"/>
           <a:lstStyle/>
           <a:p>
-            <a:pPr indent="0" marL="0">
-              <a:buNone/>
-            </a:pPr>
-            <a:r>
-              <a:rPr lang="en-US" sz="1000" b="1" spc="300" kern="0" dirty="0">
+            <a:pPr marL="0" indent="0">
+              <a:buNone/>
+            </a:pPr>
+            <a:r>
+              <a:rPr lang="en-US" sz="1000" b="1" kern="0" spc="300" dirty="0">
                 <a:solidFill>
                   <a:srgbClr val="FFFFFF"/>
                 </a:solidFill>
@@ -17182,6 +17962,13 @@
             <a:prstDash val="solid"/>
           </a:ln>
         </p:spPr>
+        <p:txBody>
+          <a:bodyPr/>
+          <a:lstStyle/>
+          <a:p>
+            <a:endParaRPr lang="en-US"/>
+          </a:p>
+        </p:txBody>
       </p:sp>
       <p:sp>
         <p:nvSpPr>
@@ -17204,11 +17991,11 @@
           <a:bodyPr wrap="square" lIns="0" tIns="0" rIns="0" bIns="0" rtlCol="0" anchor="ctr"/>
           <a:lstStyle/>
           <a:p>
-            <a:pPr indent="0" marL="0">
-              <a:buNone/>
-            </a:pPr>
-            <a:r>
-              <a:rPr lang="en-US" sz="1000" b="1" spc="100" kern="0" dirty="0">
+            <a:pPr marL="0" indent="0">
+              <a:buNone/>
+            </a:pPr>
+            <a:r>
+              <a:rPr lang="en-US" sz="1000" b="1" kern="0" spc="100" dirty="0">
                 <a:solidFill>
                   <a:srgbClr val="64748B"/>
                 </a:solidFill>
@@ -17243,7 +18030,7 @@
           <a:bodyPr wrap="square" lIns="0" tIns="0" rIns="0" bIns="0" rtlCol="0" anchor="ctr"/>
           <a:lstStyle/>
           <a:p>
-            <a:pPr indent="0" marL="0">
+            <a:pPr marL="0" indent="0">
               <a:buNone/>
             </a:pPr>
             <a:r>
@@ -17282,11 +18069,11 @@
           <a:bodyPr wrap="square" lIns="0" tIns="0" rIns="0" bIns="0" rtlCol="0" anchor="ctr"/>
           <a:lstStyle/>
           <a:p>
-            <a:pPr indent="0" marL="0">
-              <a:buNone/>
-            </a:pPr>
-            <a:r>
-              <a:rPr lang="en-US" sz="1000" b="1" spc="100" kern="0" dirty="0">
+            <a:pPr marL="0" indent="0">
+              <a:buNone/>
+            </a:pPr>
+            <a:r>
+              <a:rPr lang="en-US" sz="1000" b="1" kern="0" spc="100" dirty="0">
                 <a:solidFill>
                   <a:srgbClr val="64748B"/>
                 </a:solidFill>
@@ -17321,7 +18108,7 @@
           <a:bodyPr wrap="square" lIns="0" tIns="0" rIns="0" bIns="0" rtlCol="0" anchor="ctr"/>
           <a:lstStyle/>
           <a:p>
-            <a:pPr indent="0" marL="0">
+            <a:pPr marL="0" indent="0">
               <a:buNone/>
             </a:pPr>
             <a:r>
@@ -17363,6 +18150,13 @@
             <a:prstDash val="solid"/>
           </a:ln>
         </p:spPr>
+        <p:txBody>
+          <a:bodyPr/>
+          <a:lstStyle/>
+          <a:p>
+            <a:endParaRPr lang="en-US"/>
+          </a:p>
+        </p:txBody>
       </p:sp>
       <p:sp>
         <p:nvSpPr>
@@ -17385,11 +18179,11 @@
           <a:bodyPr wrap="square" lIns="0" tIns="0" rIns="0" bIns="0" rtlCol="0" anchor="ctr"/>
           <a:lstStyle/>
           <a:p>
-            <a:pPr indent="0" marL="0">
-              <a:buNone/>
-            </a:pPr>
-            <a:r>
-              <a:rPr lang="en-US" sz="1000" b="1" spc="100" kern="0" dirty="0">
+            <a:pPr marL="0" indent="0">
+              <a:buNone/>
+            </a:pPr>
+            <a:r>
+              <a:rPr lang="en-US" sz="1000" b="1" kern="0" spc="100" dirty="0">
                 <a:solidFill>
                   <a:srgbClr val="64748B"/>
                 </a:solidFill>
@@ -17424,7 +18218,7 @@
           <a:bodyPr wrap="square" lIns="0" tIns="0" rIns="0" bIns="0" rtlCol="0" anchor="ctr"/>
           <a:lstStyle/>
           <a:p>
-            <a:pPr indent="0" marL="0">
+            <a:pPr marL="0" indent="0">
               <a:buNone/>
             </a:pPr>
             <a:r>
@@ -17463,11 +18257,11 @@
           <a:bodyPr wrap="square" lIns="0" tIns="0" rIns="0" bIns="0" rtlCol="0" anchor="ctr"/>
           <a:lstStyle/>
           <a:p>
-            <a:pPr indent="0" marL="0">
-              <a:buNone/>
-            </a:pPr>
-            <a:r>
-              <a:rPr lang="en-US" sz="1000" b="1" spc="100" kern="0" dirty="0">
+            <a:pPr marL="0" indent="0">
+              <a:buNone/>
+            </a:pPr>
+            <a:r>
+              <a:rPr lang="en-US" sz="1000" b="1" kern="0" spc="100" dirty="0">
                 <a:solidFill>
                   <a:srgbClr val="64748B"/>
                 </a:solidFill>
@@ -17502,7 +18296,7 @@
           <a:bodyPr wrap="square" lIns="0" tIns="0" rIns="0" bIns="0" rtlCol="0" anchor="ctr"/>
           <a:lstStyle/>
           <a:p>
-            <a:pPr indent="0" marL="0">
+            <a:pPr marL="0" indent="0">
               <a:buNone/>
             </a:pPr>
             <a:r>
@@ -17544,6 +18338,13 @@
             <a:prstDash val="solid"/>
           </a:ln>
         </p:spPr>
+        <p:txBody>
+          <a:bodyPr/>
+          <a:lstStyle/>
+          <a:p>
+            <a:endParaRPr lang="en-US"/>
+          </a:p>
+        </p:txBody>
       </p:sp>
       <p:sp>
         <p:nvSpPr>
@@ -17566,11 +18367,11 @@
           <a:bodyPr wrap="square" lIns="0" tIns="0" rIns="0" bIns="0" rtlCol="0" anchor="ctr"/>
           <a:lstStyle/>
           <a:p>
-            <a:pPr indent="0" marL="0">
-              <a:buNone/>
-            </a:pPr>
-            <a:r>
-              <a:rPr lang="en-US" sz="1000" b="1" spc="100" kern="0" dirty="0">
+            <a:pPr marL="0" indent="0">
+              <a:buNone/>
+            </a:pPr>
+            <a:r>
+              <a:rPr lang="en-US" sz="1000" b="1" kern="0" spc="100" dirty="0">
                 <a:solidFill>
                   <a:srgbClr val="64748B"/>
                 </a:solidFill>
@@ -17605,7 +18406,7 @@
           <a:bodyPr wrap="square" lIns="0" tIns="0" rIns="0" bIns="0" rtlCol="0" anchor="ctr"/>
           <a:lstStyle/>
           <a:p>
-            <a:pPr indent="0" marL="0">
+            <a:pPr marL="0" indent="0">
               <a:buNone/>
             </a:pPr>
             <a:r>
@@ -17644,11 +18445,11 @@
           <a:bodyPr wrap="square" lIns="0" tIns="0" rIns="0" bIns="0" rtlCol="0" anchor="ctr"/>
           <a:lstStyle/>
           <a:p>
-            <a:pPr indent="0" marL="0">
-              <a:buNone/>
-            </a:pPr>
-            <a:r>
-              <a:rPr lang="en-US" sz="1000" b="1" spc="100" kern="0" dirty="0">
+            <a:pPr marL="0" indent="0">
+              <a:buNone/>
+            </a:pPr>
+            <a:r>
+              <a:rPr lang="en-US" sz="1000" b="1" kern="0" spc="100" dirty="0">
                 <a:solidFill>
                   <a:srgbClr val="64748B"/>
                 </a:solidFill>
@@ -17683,7 +18484,7 @@
           <a:bodyPr wrap="square" lIns="0" tIns="0" rIns="0" bIns="0" rtlCol="0" anchor="ctr"/>
           <a:lstStyle/>
           <a:p>
-            <a:pPr indent="0" marL="0">
+            <a:pPr marL="0" indent="0">
               <a:buNone/>
             </a:pPr>
             <a:r>
@@ -17725,6 +18526,13 @@
             <a:prstDash val="solid"/>
           </a:ln>
         </p:spPr>
+        <p:txBody>
+          <a:bodyPr/>
+          <a:lstStyle/>
+          <a:p>
+            <a:endParaRPr lang="en-US"/>
+          </a:p>
+        </p:txBody>
       </p:sp>
       <p:sp>
         <p:nvSpPr>
@@ -17747,11 +18555,11 @@
           <a:bodyPr wrap="square" lIns="0" tIns="0" rIns="0" bIns="0" rtlCol="0" anchor="ctr"/>
           <a:lstStyle/>
           <a:p>
-            <a:pPr indent="0" marL="0">
-              <a:buNone/>
-            </a:pPr>
-            <a:r>
-              <a:rPr lang="en-US" sz="1000" b="1" spc="100" kern="0" dirty="0">
+            <a:pPr marL="0" indent="0">
+              <a:buNone/>
+            </a:pPr>
+            <a:r>
+              <a:rPr lang="en-US" sz="1000" b="1" kern="0" spc="100" dirty="0">
                 <a:solidFill>
                   <a:srgbClr val="64748B"/>
                 </a:solidFill>
@@ -17786,7 +18594,7 @@
           <a:bodyPr wrap="square" lIns="0" tIns="0" rIns="0" bIns="0" rtlCol="0" anchor="ctr"/>
           <a:lstStyle/>
           <a:p>
-            <a:pPr indent="0" marL="0">
+            <a:pPr marL="0" indent="0">
               <a:buNone/>
             </a:pPr>
             <a:r>
@@ -17825,11 +18633,11 @@
           <a:bodyPr wrap="square" lIns="0" tIns="0" rIns="0" bIns="0" rtlCol="0" anchor="ctr"/>
           <a:lstStyle/>
           <a:p>
-            <a:pPr indent="0" marL="0">
-              <a:buNone/>
-            </a:pPr>
-            <a:r>
-              <a:rPr lang="en-US" sz="1000" b="1" spc="100" kern="0" dirty="0">
+            <a:pPr marL="0" indent="0">
+              <a:buNone/>
+            </a:pPr>
+            <a:r>
+              <a:rPr lang="en-US" sz="1000" b="1" kern="0" spc="100" dirty="0">
                 <a:solidFill>
                   <a:srgbClr val="64748B"/>
                 </a:solidFill>
@@ -17864,7 +18672,7 @@
           <a:bodyPr wrap="square" lIns="0" tIns="0" rIns="0" bIns="0" rtlCol="0" anchor="ctr"/>
           <a:lstStyle/>
           <a:p>
-            <a:pPr indent="0" marL="0">
+            <a:pPr marL="0" indent="0">
               <a:buNone/>
             </a:pPr>
             <a:r>
@@ -17906,6 +18714,13 @@
             <a:prstDash val="solid"/>
           </a:ln>
         </p:spPr>
+        <p:txBody>
+          <a:bodyPr/>
+          <a:lstStyle/>
+          <a:p>
+            <a:endParaRPr lang="en-US"/>
+          </a:p>
+        </p:txBody>
       </p:sp>
       <p:sp>
         <p:nvSpPr>
@@ -17928,11 +18743,11 @@
           <a:bodyPr wrap="square" lIns="0" tIns="0" rIns="0" bIns="0" rtlCol="0" anchor="ctr"/>
           <a:lstStyle/>
           <a:p>
-            <a:pPr indent="0" marL="0">
-              <a:buNone/>
-            </a:pPr>
-            <a:r>
-              <a:rPr lang="en-US" sz="1000" b="1" spc="100" kern="0" dirty="0">
+            <a:pPr marL="0" indent="0">
+              <a:buNone/>
+            </a:pPr>
+            <a:r>
+              <a:rPr lang="en-US" sz="1000" b="1" kern="0" spc="100" dirty="0">
                 <a:solidFill>
                   <a:srgbClr val="64748B"/>
                 </a:solidFill>
@@ -17967,7 +18782,7 @@
           <a:bodyPr wrap="square" lIns="0" tIns="0" rIns="0" bIns="0" rtlCol="0" anchor="ctr"/>
           <a:lstStyle/>
           <a:p>
-            <a:pPr indent="0" marL="0">
+            <a:pPr marL="0" indent="0">
               <a:buNone/>
             </a:pPr>
             <a:r>
@@ -18006,11 +18821,11 @@
           <a:bodyPr wrap="square" lIns="0" tIns="0" rIns="0" bIns="0" rtlCol="0" anchor="ctr"/>
           <a:lstStyle/>
           <a:p>
-            <a:pPr indent="0" marL="0">
-              <a:buNone/>
-            </a:pPr>
-            <a:r>
-              <a:rPr lang="en-US" sz="1000" b="1" spc="100" kern="0" dirty="0">
+            <a:pPr marL="0" indent="0">
+              <a:buNone/>
+            </a:pPr>
+            <a:r>
+              <a:rPr lang="en-US" sz="1000" b="1" kern="0" spc="100" dirty="0">
                 <a:solidFill>
                   <a:srgbClr val="64748B"/>
                 </a:solidFill>
@@ -18045,7 +18860,7 @@
           <a:bodyPr wrap="square" lIns="0" tIns="0" rIns="0" bIns="0" rtlCol="0" anchor="ctr"/>
           <a:lstStyle/>
           <a:p>
-            <a:pPr indent="0" marL="0">
+            <a:pPr marL="0" indent="0">
               <a:buNone/>
             </a:pPr>
             <a:r>
@@ -18087,13 +18902,20 @@
             <a:prstDash val="solid"/>
           </a:ln>
           <a:effectLst>
-            <a:outerShdw sx="100000" sy="100000" kx="0" ky="0" algn="bl" rotWithShape="0" blurRad="101600" dist="25400" dir="5400000">
+            <a:outerShdw blurRad="101600" dist="25400" dir="5400000" algn="bl" rotWithShape="0">
               <a:srgbClr val="000000">
                 <a:alpha val="8000"/>
               </a:srgbClr>
             </a:outerShdw>
           </a:effectLst>
         </p:spPr>
+        <p:txBody>
+          <a:bodyPr/>
+          <a:lstStyle/>
+          <a:p>
+            <a:endParaRPr lang="en-US"/>
+          </a:p>
+        </p:txBody>
       </p:sp>
       <p:sp>
         <p:nvSpPr>
@@ -18119,6 +18941,13 @@
             <a:prstDash val="solid"/>
           </a:ln>
         </p:spPr>
+        <p:txBody>
+          <a:bodyPr/>
+          <a:lstStyle/>
+          <a:p>
+            <a:endParaRPr lang="en-US"/>
+          </a:p>
+        </p:txBody>
       </p:sp>
       <p:sp>
         <p:nvSpPr>
@@ -18141,11 +18970,11 @@
           <a:bodyPr wrap="square" lIns="0" tIns="0" rIns="0" bIns="0" rtlCol="0" anchor="ctr"/>
           <a:lstStyle/>
           <a:p>
-            <a:pPr indent="0" marL="0">
-              <a:buNone/>
-            </a:pPr>
-            <a:r>
-              <a:rPr lang="en-US" sz="1000" b="1" spc="300" kern="0" dirty="0">
+            <a:pPr marL="0" indent="0">
+              <a:buNone/>
+            </a:pPr>
+            <a:r>
+              <a:rPr lang="en-US" sz="1000" b="1" kern="0" spc="300" dirty="0">
                 <a:solidFill>
                   <a:srgbClr val="FFFFFF"/>
                 </a:solidFill>
@@ -18183,6 +19012,13 @@
             <a:prstDash val="solid"/>
           </a:ln>
         </p:spPr>
+        <p:txBody>
+          <a:bodyPr/>
+          <a:lstStyle/>
+          <a:p>
+            <a:endParaRPr lang="en-US"/>
+          </a:p>
+        </p:txBody>
       </p:sp>
       <p:sp>
         <p:nvSpPr>
@@ -18205,11 +19041,11 @@
           <a:bodyPr wrap="square" lIns="0" tIns="0" rIns="0" bIns="0" rtlCol="0" anchor="ctr"/>
           <a:lstStyle/>
           <a:p>
-            <a:pPr indent="0" marL="0">
-              <a:buNone/>
-            </a:pPr>
-            <a:r>
-              <a:rPr lang="en-US" sz="1000" b="1" spc="100" kern="0" dirty="0">
+            <a:pPr marL="0" indent="0">
+              <a:buNone/>
+            </a:pPr>
+            <a:r>
+              <a:rPr lang="en-US" sz="1000" b="1" kern="0" spc="100" dirty="0">
                 <a:solidFill>
                   <a:srgbClr val="64748B"/>
                 </a:solidFill>
@@ -18244,7 +19080,7 @@
           <a:bodyPr wrap="square" lIns="0" tIns="0" rIns="0" bIns="0" rtlCol="0" anchor="ctr"/>
           <a:lstStyle/>
           <a:p>
-            <a:pPr indent="0" marL="0">
+            <a:pPr marL="0" indent="0">
               <a:buNone/>
             </a:pPr>
             <a:r>
@@ -18283,11 +19119,11 @@
           <a:bodyPr wrap="square" lIns="0" tIns="0" rIns="0" bIns="0" rtlCol="0" anchor="ctr"/>
           <a:lstStyle/>
           <a:p>
-            <a:pPr indent="0" marL="0">
-              <a:buNone/>
-            </a:pPr>
-            <a:r>
-              <a:rPr lang="en-US" sz="1000" b="1" spc="100" kern="0" dirty="0">
+            <a:pPr marL="0" indent="0">
+              <a:buNone/>
+            </a:pPr>
+            <a:r>
+              <a:rPr lang="en-US" sz="1000" b="1" kern="0" spc="100" dirty="0">
                 <a:solidFill>
                   <a:srgbClr val="64748B"/>
                 </a:solidFill>
@@ -18322,7 +19158,7 @@
           <a:bodyPr wrap="square" lIns="0" tIns="0" rIns="0" bIns="0" rtlCol="0" anchor="ctr"/>
           <a:lstStyle/>
           <a:p>
-            <a:pPr indent="0" marL="0">
+            <a:pPr marL="0" indent="0">
               <a:buNone/>
             </a:pPr>
             <a:r>
@@ -18364,6 +19200,13 @@
             <a:prstDash val="solid"/>
           </a:ln>
         </p:spPr>
+        <p:txBody>
+          <a:bodyPr/>
+          <a:lstStyle/>
+          <a:p>
+            <a:endParaRPr lang="en-US"/>
+          </a:p>
+        </p:txBody>
       </p:sp>
       <p:sp>
         <p:nvSpPr>
@@ -18386,11 +19229,11 @@
           <a:bodyPr wrap="square" lIns="0" tIns="0" rIns="0" bIns="0" rtlCol="0" anchor="ctr"/>
           <a:lstStyle/>
           <a:p>
-            <a:pPr indent="0" marL="0">
-              <a:buNone/>
-            </a:pPr>
-            <a:r>
-              <a:rPr lang="en-US" sz="1000" b="1" spc="100" kern="0" dirty="0">
+            <a:pPr marL="0" indent="0">
+              <a:buNone/>
+            </a:pPr>
+            <a:r>
+              <a:rPr lang="en-US" sz="1000" b="1" kern="0" spc="100" dirty="0">
                 <a:solidFill>
                   <a:srgbClr val="64748B"/>
                 </a:solidFill>
@@ -18425,7 +19268,7 @@
           <a:bodyPr wrap="square" lIns="0" tIns="0" rIns="0" bIns="0" rtlCol="0" anchor="ctr"/>
           <a:lstStyle/>
           <a:p>
-            <a:pPr indent="0" marL="0">
+            <a:pPr marL="0" indent="0">
               <a:buNone/>
             </a:pPr>
             <a:r>
@@ -18464,11 +19307,11 @@
           <a:bodyPr wrap="square" lIns="0" tIns="0" rIns="0" bIns="0" rtlCol="0" anchor="ctr"/>
           <a:lstStyle/>
           <a:p>
-            <a:pPr indent="0" marL="0">
-              <a:buNone/>
-            </a:pPr>
-            <a:r>
-              <a:rPr lang="en-US" sz="1000" b="1" spc="100" kern="0" dirty="0">
+            <a:pPr marL="0" indent="0">
+              <a:buNone/>
+            </a:pPr>
+            <a:r>
+              <a:rPr lang="en-US" sz="1000" b="1" kern="0" spc="100" dirty="0">
                 <a:solidFill>
                   <a:srgbClr val="64748B"/>
                 </a:solidFill>
@@ -18503,7 +19346,7 @@
           <a:bodyPr wrap="square" lIns="0" tIns="0" rIns="0" bIns="0" rtlCol="0" anchor="ctr"/>
           <a:lstStyle/>
           <a:p>
-            <a:pPr indent="0" marL="0">
+            <a:pPr marL="0" indent="0">
               <a:buNone/>
             </a:pPr>
             <a:r>
@@ -18545,6 +19388,13 @@
             <a:prstDash val="solid"/>
           </a:ln>
         </p:spPr>
+        <p:txBody>
+          <a:bodyPr/>
+          <a:lstStyle/>
+          <a:p>
+            <a:endParaRPr lang="en-US"/>
+          </a:p>
+        </p:txBody>
       </p:sp>
       <p:sp>
         <p:nvSpPr>
@@ -18567,11 +19417,11 @@
           <a:bodyPr wrap="square" lIns="0" tIns="0" rIns="0" bIns="0" rtlCol="0" anchor="ctr"/>
           <a:lstStyle/>
           <a:p>
-            <a:pPr indent="0" marL="0">
-              <a:buNone/>
-            </a:pPr>
-            <a:r>
-              <a:rPr lang="en-US" sz="1000" b="1" spc="100" kern="0" dirty="0">
+            <a:pPr marL="0" indent="0">
+              <a:buNone/>
+            </a:pPr>
+            <a:r>
+              <a:rPr lang="en-US" sz="1000" b="1" kern="0" spc="100" dirty="0">
                 <a:solidFill>
                   <a:srgbClr val="64748B"/>
                 </a:solidFill>
@@ -18606,7 +19456,7 @@
           <a:bodyPr wrap="square" lIns="0" tIns="0" rIns="0" bIns="0" rtlCol="0" anchor="ctr"/>
           <a:lstStyle/>
           <a:p>
-            <a:pPr indent="0" marL="0">
+            <a:pPr marL="0" indent="0">
               <a:buNone/>
             </a:pPr>
             <a:r>
@@ -18645,11 +19495,11 @@
           <a:bodyPr wrap="square" lIns="0" tIns="0" rIns="0" bIns="0" rtlCol="0" anchor="ctr"/>
           <a:lstStyle/>
           <a:p>
-            <a:pPr indent="0" marL="0">
-              <a:buNone/>
-            </a:pPr>
-            <a:r>
-              <a:rPr lang="en-US" sz="1000" b="1" spc="100" kern="0" dirty="0">
+            <a:pPr marL="0" indent="0">
+              <a:buNone/>
+            </a:pPr>
+            <a:r>
+              <a:rPr lang="en-US" sz="1000" b="1" kern="0" spc="100" dirty="0">
                 <a:solidFill>
                   <a:srgbClr val="64748B"/>
                 </a:solidFill>
@@ -18684,7 +19534,7 @@
           <a:bodyPr wrap="square" lIns="0" tIns="0" rIns="0" bIns="0" rtlCol="0" anchor="ctr"/>
           <a:lstStyle/>
           <a:p>
-            <a:pPr indent="0" marL="0">
+            <a:pPr marL="0" indent="0">
               <a:buNone/>
             </a:pPr>
             <a:r>
@@ -18726,6 +19576,13 @@
             <a:prstDash val="solid"/>
           </a:ln>
         </p:spPr>
+        <p:txBody>
+          <a:bodyPr/>
+          <a:lstStyle/>
+          <a:p>
+            <a:endParaRPr lang="en-US"/>
+          </a:p>
+        </p:txBody>
       </p:sp>
       <p:sp>
         <p:nvSpPr>
@@ -18748,11 +19605,11 @@
           <a:bodyPr wrap="square" lIns="0" tIns="0" rIns="0" bIns="0" rtlCol="0" anchor="ctr"/>
           <a:lstStyle/>
           <a:p>
-            <a:pPr indent="0" marL="0">
-              <a:buNone/>
-            </a:pPr>
-            <a:r>
-              <a:rPr lang="en-US" sz="1000" b="1" spc="100" kern="0" dirty="0">
+            <a:pPr marL="0" indent="0">
+              <a:buNone/>
+            </a:pPr>
+            <a:r>
+              <a:rPr lang="en-US" sz="1000" b="1" kern="0" spc="100" dirty="0">
                 <a:solidFill>
                   <a:srgbClr val="64748B"/>
                 </a:solidFill>
@@ -18787,7 +19644,7 @@
           <a:bodyPr wrap="square" lIns="0" tIns="0" rIns="0" bIns="0" rtlCol="0" anchor="ctr"/>
           <a:lstStyle/>
           <a:p>
-            <a:pPr indent="0" marL="0">
+            <a:pPr marL="0" indent="0">
               <a:buNone/>
             </a:pPr>
             <a:r>
@@ -18826,11 +19683,11 @@
           <a:bodyPr wrap="square" lIns="0" tIns="0" rIns="0" bIns="0" rtlCol="0" anchor="ctr"/>
           <a:lstStyle/>
           <a:p>
-            <a:pPr indent="0" marL="0">
-              <a:buNone/>
-            </a:pPr>
-            <a:r>
-              <a:rPr lang="en-US" sz="1000" b="1" spc="100" kern="0" dirty="0">
+            <a:pPr marL="0" indent="0">
+              <a:buNone/>
+            </a:pPr>
+            <a:r>
+              <a:rPr lang="en-US" sz="1000" b="1" kern="0" spc="100" dirty="0">
                 <a:solidFill>
                   <a:srgbClr val="64748B"/>
                 </a:solidFill>
@@ -18865,7 +19722,7 @@
           <a:bodyPr wrap="square" lIns="0" tIns="0" rIns="0" bIns="0" rtlCol="0" anchor="ctr"/>
           <a:lstStyle/>
           <a:p>
-            <a:pPr indent="0" marL="0">
+            <a:pPr marL="0" indent="0">
               <a:buNone/>
             </a:pPr>
             <a:r>
@@ -18907,6 +19764,13 @@
             <a:prstDash val="solid"/>
           </a:ln>
         </p:spPr>
+        <p:txBody>
+          <a:bodyPr/>
+          <a:lstStyle/>
+          <a:p>
+            <a:endParaRPr lang="en-US"/>
+          </a:p>
+        </p:txBody>
       </p:sp>
       <p:sp>
         <p:nvSpPr>
@@ -18929,11 +19793,11 @@
           <a:bodyPr wrap="square" lIns="0" tIns="0" rIns="0" bIns="0" rtlCol="0" anchor="ctr"/>
           <a:lstStyle/>
           <a:p>
-            <a:pPr indent="0" marL="0">
-              <a:buNone/>
-            </a:pPr>
-            <a:r>
-              <a:rPr lang="en-US" sz="1000" b="1" spc="100" kern="0" dirty="0">
+            <a:pPr marL="0" indent="0">
+              <a:buNone/>
+            </a:pPr>
+            <a:r>
+              <a:rPr lang="en-US" sz="1000" b="1" kern="0" spc="100" dirty="0">
                 <a:solidFill>
                   <a:srgbClr val="64748B"/>
                 </a:solidFill>
@@ -18968,7 +19832,7 @@
           <a:bodyPr wrap="square" lIns="0" tIns="0" rIns="0" bIns="0" rtlCol="0" anchor="ctr"/>
           <a:lstStyle/>
           <a:p>
-            <a:pPr indent="0" marL="0">
+            <a:pPr marL="0" indent="0">
               <a:buNone/>
             </a:pPr>
             <a:r>
@@ -19007,11 +19871,11 @@
           <a:bodyPr wrap="square" lIns="0" tIns="0" rIns="0" bIns="0" rtlCol="0" anchor="ctr"/>
           <a:lstStyle/>
           <a:p>
-            <a:pPr indent="0" marL="0">
-              <a:buNone/>
-            </a:pPr>
-            <a:r>
-              <a:rPr lang="en-US" sz="1000" b="1" spc="100" kern="0" dirty="0">
+            <a:pPr marL="0" indent="0">
+              <a:buNone/>
+            </a:pPr>
+            <a:r>
+              <a:rPr lang="en-US" sz="1000" b="1" kern="0" spc="100" dirty="0">
                 <a:solidFill>
                   <a:srgbClr val="64748B"/>
                 </a:solidFill>
@@ -19046,7 +19910,7 @@
           <a:bodyPr wrap="square" lIns="0" tIns="0" rIns="0" bIns="0" rtlCol="0" anchor="ctr"/>
           <a:lstStyle/>
           <a:p>
-            <a:pPr indent="0" marL="0">
+            <a:pPr marL="0" indent="0">
               <a:buNone/>
             </a:pPr>
             <a:r>
@@ -19086,6 +19950,13 @@
             <a:prstDash val="solid"/>
           </a:ln>
         </p:spPr>
+        <p:txBody>
+          <a:bodyPr/>
+          <a:lstStyle/>
+          <a:p>
+            <a:endParaRPr lang="en-US"/>
+          </a:p>
+        </p:txBody>
       </p:sp>
       <p:sp>
         <p:nvSpPr>
@@ -19108,7 +19979,7 @@
           <a:bodyPr wrap="square" lIns="0" tIns="0" rIns="0" bIns="0" rtlCol="0" anchor="ctr"/>
           <a:lstStyle/>
           <a:p>
-            <a:pPr indent="0" marL="0">
+            <a:pPr marL="0" indent="0">
               <a:buNone/>
             </a:pPr>
             <a:r>
@@ -19147,7 +20018,7 @@
           <a:bodyPr wrap="square" lIns="0" tIns="0" rIns="0" bIns="0" rtlCol="0" anchor="ctr"/>
           <a:lstStyle/>
           <a:p>
-            <a:pPr algn="r" indent="0" marL="0">
+            <a:pPr marL="0" indent="0" algn="r">
               <a:buNone/>
             </a:pPr>
             <a:r>
@@ -19466,4 +20337,319 @@
     </a:ext>
   </a:extLst>
 </a:theme>
+</file>
+
+<file path=ppt/theme/theme2.xml><?xml version="1.0" encoding="utf-8"?>
+<a:theme xmlns:a="http://schemas.openxmlformats.org/drawingml/2006/main" name="Office Theme">
+  <a:themeElements>
+    <a:clrScheme name="Office">
+      <a:dk1>
+        <a:sysClr val="windowText" lastClr="000000"/>
+      </a:dk1>
+      <a:lt1>
+        <a:sysClr val="window" lastClr="FFFFFF"/>
+      </a:lt1>
+      <a:dk2>
+        <a:srgbClr val="0E2841"/>
+      </a:dk2>
+      <a:lt2>
+        <a:srgbClr val="E8E8E8"/>
+      </a:lt2>
+      <a:accent1>
+        <a:srgbClr val="156082"/>
+      </a:accent1>
+      <a:accent2>
+        <a:srgbClr val="E97132"/>
+      </a:accent2>
+      <a:accent3>
+        <a:srgbClr val="196B24"/>
+      </a:accent3>
+      <a:accent4>
+        <a:srgbClr val="0F9ED5"/>
+      </a:accent4>
+      <a:accent5>
+        <a:srgbClr val="A02B93"/>
+      </a:accent5>
+      <a:accent6>
+        <a:srgbClr val="4EA72E"/>
+      </a:accent6>
+      <a:hlink>
+        <a:srgbClr val="467886"/>
+      </a:hlink>
+      <a:folHlink>
+        <a:srgbClr val="96607D"/>
+      </a:folHlink>
+    </a:clrScheme>
+    <a:fontScheme name="Office">
+      <a:majorFont>
+        <a:latin typeface="Aptos Display" panose="02110004020202020204"/>
+        <a:ea typeface=""/>
+        <a:cs typeface=""/>
+        <a:font script="Jpan" typeface="游ゴシック Light"/>
+        <a:font script="Hang" typeface="맑은 고딕"/>
+        <a:font script="Hans" typeface="等线 Light"/>
+        <a:font script="Hant" typeface="新細明體"/>
+        <a:font script="Arab" typeface="Times New Roman"/>
+        <a:font script="Hebr" typeface="Times New Roman"/>
+        <a:font script="Thai" typeface="Angsana New"/>
+        <a:font script="Ethi" typeface="Nyala"/>
+        <a:font script="Beng" typeface="Vrinda"/>
+        <a:font script="Gujr" typeface="Shruti"/>
+        <a:font script="Khmr" typeface="MoolBoran"/>
+        <a:font script="Knda" typeface="Tunga"/>
+        <a:font script="Guru" typeface="Raavi"/>
+        <a:font script="Cans" typeface="Euphemia"/>
+        <a:font script="Cher" typeface="Plantagenet Cherokee"/>
+        <a:font script="Yiii" typeface="Microsoft Yi Baiti"/>
+        <a:font script="Tibt" typeface="Microsoft Himalaya"/>
+        <a:font script="Thaa" typeface="MV Boli"/>
+        <a:font script="Deva" typeface="Mangal"/>
+        <a:font script="Telu" typeface="Gautami"/>
+        <a:font script="Taml" typeface="Latha"/>
+        <a:font script="Syrc" typeface="Estrangelo Edessa"/>
+        <a:font script="Orya" typeface="Kalinga"/>
+        <a:font script="Mlym" typeface="Kartika"/>
+        <a:font script="Laoo" typeface="DokChampa"/>
+        <a:font script="Sinh" typeface="Iskoola Pota"/>
+        <a:font script="Mong" typeface="Mongolian Baiti"/>
+        <a:font script="Viet" typeface="Times New Roman"/>
+        <a:font script="Uigh" typeface="Microsoft Uighur"/>
+        <a:font script="Geor" typeface="Sylfaen"/>
+        <a:font script="Armn" typeface="Arial"/>
+        <a:font script="Bugi" typeface="Leelawadee UI"/>
+        <a:font script="Bopo" typeface="Microsoft JhengHei"/>
+        <a:font script="Java" typeface="Javanese Text"/>
+        <a:font script="Lisu" typeface="Segoe UI"/>
+        <a:font script="Mymr" typeface="Myanmar Text"/>
+        <a:font script="Nkoo" typeface="Ebrima"/>
+        <a:font script="Olck" typeface="Nirmala UI"/>
+        <a:font script="Osma" typeface="Ebrima"/>
+        <a:font script="Phag" typeface="Phagspa"/>
+        <a:font script="Syrn" typeface="Estrangelo Edessa"/>
+        <a:font script="Syrj" typeface="Estrangelo Edessa"/>
+        <a:font script="Syre" typeface="Estrangelo Edessa"/>
+        <a:font script="Sora" typeface="Nirmala UI"/>
+        <a:font script="Tale" typeface="Microsoft Tai Le"/>
+        <a:font script="Talu" typeface="Microsoft New Tai Lue"/>
+        <a:font script="Tfng" typeface="Ebrima"/>
+      </a:majorFont>
+      <a:minorFont>
+        <a:latin typeface="Aptos" panose="02110004020202020204"/>
+        <a:ea typeface=""/>
+        <a:cs typeface=""/>
+        <a:font script="Jpan" typeface="游ゴシック"/>
+        <a:font script="Hang" typeface="맑은 고딕"/>
+        <a:font script="Hans" typeface="等线"/>
+        <a:font script="Hant" typeface="新細明體"/>
+        <a:font script="Arab" typeface="Arial"/>
+        <a:font script="Hebr" typeface="Arial"/>
+        <a:font script="Thai" typeface="Cordia New"/>
+        <a:font script="Ethi" typeface="Nyala"/>
+        <a:font script="Beng" typeface="Vrinda"/>
+        <a:font script="Gujr" typeface="Shruti"/>
+        <a:font script="Khmr" typeface="DaunPenh"/>
+        <a:font script="Knda" typeface="Tunga"/>
+        <a:font script="Guru" typeface="Raavi"/>
+        <a:font script="Cans" typeface="Euphemia"/>
+        <a:font script="Cher" typeface="Plantagenet Cherokee"/>
+        <a:font script="Yiii" typeface="Microsoft Yi Baiti"/>
+        <a:font script="Tibt" typeface="Microsoft Himalaya"/>
+        <a:font script="Thaa" typeface="MV Boli"/>
+        <a:font script="Deva" typeface="Mangal"/>
+        <a:font script="Telu" typeface="Gautami"/>
+        <a:font script="Taml" typeface="Latha"/>
+        <a:font script="Syrc" typeface="Estrangelo Edessa"/>
+        <a:font script="Orya" typeface="Kalinga"/>
+        <a:font script="Mlym" typeface="Kartika"/>
+        <a:font script="Laoo" typeface="DokChampa"/>
+        <a:font script="Sinh" typeface="Iskoola Pota"/>
+        <a:font script="Mong" typeface="Mongolian Baiti"/>
+        <a:font script="Viet" typeface="Arial"/>
+        <a:font script="Uigh" typeface="Microsoft Uighur"/>
+        <a:font script="Geor" typeface="Sylfaen"/>
+        <a:font script="Armn" typeface="Arial"/>
+        <a:font script="Bugi" typeface="Leelawadee UI"/>
+        <a:font script="Bopo" typeface="Microsoft JhengHei"/>
+        <a:font script="Java" typeface="Javanese Text"/>
+        <a:font script="Lisu" typeface="Segoe UI"/>
+        <a:font script="Mymr" typeface="Myanmar Text"/>
+        <a:font script="Nkoo" typeface="Ebrima"/>
+        <a:font script="Olck" typeface="Nirmala UI"/>
+        <a:font script="Osma" typeface="Ebrima"/>
+        <a:font script="Phag" typeface="Phagspa"/>
+        <a:font script="Syrn" typeface="Estrangelo Edessa"/>
+        <a:font script="Syrj" typeface="Estrangelo Edessa"/>
+        <a:font script="Syre" typeface="Estrangelo Edessa"/>
+        <a:font script="Sora" typeface="Nirmala UI"/>
+        <a:font script="Tale" typeface="Microsoft Tai Le"/>
+        <a:font script="Talu" typeface="Microsoft New Tai Lue"/>
+        <a:font script="Tfng" typeface="Ebrima"/>
+      </a:minorFont>
+    </a:fontScheme>
+    <a:fmtScheme name="Office">
+      <a:fillStyleLst>
+        <a:solidFill>
+          <a:schemeClr val="phClr"/>
+        </a:solidFill>
+        <a:gradFill rotWithShape="1">
+          <a:gsLst>
+            <a:gs pos="0">
+              <a:schemeClr val="phClr">
+                <a:lumMod val="110000"/>
+                <a:satMod val="105000"/>
+                <a:tint val="67000"/>
+              </a:schemeClr>
+            </a:gs>
+            <a:gs pos="50000">
+              <a:schemeClr val="phClr">
+                <a:lumMod val="105000"/>
+                <a:satMod val="103000"/>
+                <a:tint val="73000"/>
+              </a:schemeClr>
+            </a:gs>
+            <a:gs pos="100000">
+              <a:schemeClr val="phClr">
+                <a:lumMod val="105000"/>
+                <a:satMod val="109000"/>
+                <a:tint val="81000"/>
+              </a:schemeClr>
+            </a:gs>
+          </a:gsLst>
+          <a:lin ang="5400000" scaled="0"/>
+        </a:gradFill>
+        <a:gradFill rotWithShape="1">
+          <a:gsLst>
+            <a:gs pos="0">
+              <a:schemeClr val="phClr">
+                <a:satMod val="103000"/>
+                <a:lumMod val="102000"/>
+                <a:tint val="94000"/>
+              </a:schemeClr>
+            </a:gs>
+            <a:gs pos="50000">
+              <a:schemeClr val="phClr">
+                <a:satMod val="110000"/>
+                <a:lumMod val="100000"/>
+                <a:shade val="100000"/>
+              </a:schemeClr>
+            </a:gs>
+            <a:gs pos="100000">
+              <a:schemeClr val="phClr">
+                <a:lumMod val="99000"/>
+                <a:satMod val="120000"/>
+                <a:shade val="78000"/>
+              </a:schemeClr>
+            </a:gs>
+          </a:gsLst>
+          <a:lin ang="5400000" scaled="0"/>
+        </a:gradFill>
+      </a:fillStyleLst>
+      <a:lnStyleLst>
+        <a:ln w="12700" cap="flat" cmpd="sng" algn="ctr">
+          <a:solidFill>
+            <a:schemeClr val="phClr"/>
+          </a:solidFill>
+          <a:prstDash val="solid"/>
+          <a:miter lim="800000"/>
+        </a:ln>
+        <a:ln w="19050" cap="flat" cmpd="sng" algn="ctr">
+          <a:solidFill>
+            <a:schemeClr val="phClr"/>
+          </a:solidFill>
+          <a:prstDash val="solid"/>
+          <a:miter lim="800000"/>
+        </a:ln>
+        <a:ln w="25400" cap="flat" cmpd="sng" algn="ctr">
+          <a:solidFill>
+            <a:schemeClr val="phClr"/>
+          </a:solidFill>
+          <a:prstDash val="solid"/>
+          <a:miter lim="800000"/>
+        </a:ln>
+      </a:lnStyleLst>
+      <a:effectStyleLst>
+        <a:effectStyle>
+          <a:effectLst/>
+        </a:effectStyle>
+        <a:effectStyle>
+          <a:effectLst/>
+        </a:effectStyle>
+        <a:effectStyle>
+          <a:effectLst>
+            <a:outerShdw blurRad="57150" dist="19050" dir="5400000" algn="ctr" rotWithShape="0">
+              <a:srgbClr val="000000">
+                <a:alpha val="63000"/>
+              </a:srgbClr>
+            </a:outerShdw>
+          </a:effectLst>
+        </a:effectStyle>
+      </a:effectStyleLst>
+      <a:bgFillStyleLst>
+        <a:solidFill>
+          <a:schemeClr val="phClr"/>
+        </a:solidFill>
+        <a:solidFill>
+          <a:schemeClr val="phClr">
+            <a:tint val="95000"/>
+            <a:satMod val="170000"/>
+          </a:schemeClr>
+        </a:solidFill>
+        <a:gradFill rotWithShape="1">
+          <a:gsLst>
+            <a:gs pos="0">
+              <a:schemeClr val="phClr">
+                <a:tint val="93000"/>
+                <a:satMod val="150000"/>
+                <a:shade val="98000"/>
+                <a:lumMod val="102000"/>
+              </a:schemeClr>
+            </a:gs>
+            <a:gs pos="50000">
+              <a:schemeClr val="phClr">
+                <a:tint val="98000"/>
+                <a:satMod val="130000"/>
+                <a:shade val="90000"/>
+                <a:lumMod val="103000"/>
+              </a:schemeClr>
+            </a:gs>
+            <a:gs pos="100000">
+              <a:schemeClr val="phClr">
+                <a:shade val="63000"/>
+                <a:satMod val="120000"/>
+              </a:schemeClr>
+            </a:gs>
+          </a:gsLst>
+          <a:lin ang="5400000" scaled="0"/>
+        </a:gradFill>
+      </a:bgFillStyleLst>
+    </a:fmtScheme>
+  </a:themeElements>
+  <a:objectDefaults>
+    <a:lnDef>
+      <a:spPr/>
+      <a:bodyPr/>
+      <a:lstStyle/>
+      <a:style>
+        <a:lnRef idx="2">
+          <a:schemeClr val="accent1"/>
+        </a:lnRef>
+        <a:fillRef idx="0">
+          <a:schemeClr val="accent1"/>
+        </a:fillRef>
+        <a:effectRef idx="1">
+          <a:schemeClr val="accent1"/>
+        </a:effectRef>
+        <a:fontRef idx="minor">
+          <a:schemeClr val="tx1"/>
+        </a:fontRef>
+      </a:style>
+    </a:lnDef>
+  </a:objectDefaults>
+  <a:extraClrSchemeLst/>
+  <a:extLst>
+    <a:ext uri="{05A4C25C-085E-4340-85A3-A5531E510DB2}">
+      <thm15:themeFamily xmlns:thm15="http://schemas.microsoft.com/office/thememl/2012/main" name="Office Theme" id="{2E142A2C-CD16-42D6-873A-C26D2A0506FA}" vid="{1BDDFF52-6CD6-40A5-AB3C-68EB2F1E4D0A}"/>
+    </a:ext>
+  </a:extLst>
+</a:theme>
 </file>